--- a/legacy/Presentation1.pptx
+++ b/legacy/Presentation1.pptx
@@ -9436,6 +9436,53 @@
               <a:t>Primary Index</a:t>
             </a:r>
             <a:endParaRPr lang="en-US"/>
+          </a:p>
+        </p:txBody>
+      </p:sp>
+      <p:sp>
+        <p:nvSpPr>
+          <p:cNvPr id="2" name="Text Box 1"/>
+          <p:cNvSpPr txBox="1"/>
+          <p:nvPr/>
+        </p:nvSpPr>
+        <p:spPr>
+          <a:xfrm>
+            <a:off x="1985645" y="1765935"/>
+            <a:ext cx="1833245" cy="398780"/>
+          </a:xfrm>
+          <a:prstGeom prst="rect">
+            <a:avLst/>
+          </a:prstGeom>
+          <a:noFill/>
+        </p:spPr>
+        <p:txBody>
+          <a:bodyPr wrap="square" rtlCol="0">
+            <a:spAutoFit/>
+          </a:bodyPr>
+          <a:p>
+            <a:r>
+              <a:rPr lang="en-US" sz="2000" b="1">
+                <a:solidFill>
+                  <a:schemeClr val="accent6">
+                    <a:lumMod val="75000"/>
+                  </a:schemeClr>
+                </a:solidFill>
+                <a:latin typeface="Calibri Bold" panose="020F0702030404030204" charset="0"/>
+                <a:cs typeface="Calibri Bold" panose="020F0702030404030204" charset="0"/>
+              </a:rPr>
+              <a:t>Mul</a:t>
+            </a:r>
+            <a:r>
+              <a:rPr lang="en-US" sz="2000" b="1">
+                <a:latin typeface="Calibri Bold" panose="020F0702030404030204" charset="0"/>
+                <a:cs typeface="Calibri Bold" panose="020F0702030404030204" charset="0"/>
+              </a:rPr>
+              <a:t>DataFrame</a:t>
+            </a:r>
+            <a:endParaRPr lang="en-US" sz="2000" b="1">
+              <a:latin typeface="Calibri Bold" panose="020F0702030404030204" charset="0"/>
+              <a:cs typeface="Calibri Bold" panose="020F0702030404030204" charset="0"/>
+            </a:endParaRPr>
           </a:p>
         </p:txBody>
       </p:sp>

--- a/legacy/Presentation1.pptx
+++ b/legacy/Presentation1.pptx
@@ -8,10 +8,12 @@
     <p:notesMasterId r:id="rId4"/>
   </p:notesMasterIdLst>
   <p:handoutMasterIdLst>
-    <p:handoutMasterId r:id="rId5"/>
+    <p:handoutMasterId r:id="rId7"/>
   </p:handoutMasterIdLst>
   <p:sldIdLst>
     <p:sldId id="256" r:id="rId3"/>
+    <p:sldId id="257" r:id="rId5"/>
+    <p:sldId id="258" r:id="rId6"/>
   </p:sldIdLst>
   <p:sldSz cx="12192000" cy="6858000"/>
   <p:notesSz cx="7103745" cy="10234295"/>
@@ -113,12 +115,12 @@
   <p:extLst>
     <p:ext uri="{EFAFB233-063F-42B5-8137-9DF3F51BA10A}">
       <p15:sldGuideLst xmlns:p15="http://schemas.microsoft.com/office/powerpoint/2012/main">
-        <p15:guide id="1" orient="horz" pos="2166" userDrawn="1">
+        <p15:guide id="1" orient="horz" pos="2155" userDrawn="1">
           <p15:clr>
             <a:srgbClr val="A4A3A4"/>
           </p15:clr>
         </p15:guide>
-        <p15:guide id="2" pos="3840" userDrawn="1">
+        <p15:guide id="2" pos="3839" userDrawn="1">
           <p15:clr>
             <a:srgbClr val="A4A3A4"/>
           </p15:clr>
@@ -9494,7 +9496,4204 @@
 </p:sld>
 </file>
 
+<file path=ppt/slides/slide2.xml><?xml version="1.0" encoding="utf-8"?>
+<p:sld xmlns:a="http://schemas.openxmlformats.org/drawingml/2006/main" xmlns:r="http://schemas.openxmlformats.org/officeDocument/2006/relationships" xmlns:p="http://schemas.openxmlformats.org/presentationml/2006/main">
+  <p:cSld>
+    <p:spTree>
+      <p:nvGrpSpPr>
+        <p:cNvPr id="1" name=""/>
+        <p:cNvGrpSpPr/>
+        <p:nvPr/>
+      </p:nvGrpSpPr>
+      <p:grpSpPr/>
+      <p:sp>
+        <p:nvSpPr>
+          <p:cNvPr id="5" name="Text Box 4"/>
+          <p:cNvSpPr txBox="1"/>
+          <p:nvPr/>
+        </p:nvSpPr>
+        <p:spPr>
+          <a:xfrm>
+            <a:off x="1532890" y="1641475"/>
+            <a:ext cx="1054735" cy="1630045"/>
+          </a:xfrm>
+          <a:prstGeom prst="rect">
+            <a:avLst/>
+          </a:prstGeom>
+        </p:spPr>
+        <p:txBody>
+          <a:bodyPr wrap="square">
+            <a:spAutoFit/>
+          </a:bodyPr>
+          <a:p>
+            <a:pPr>
+              <a:lnSpc>
+                <a:spcPts val="2000"/>
+              </a:lnSpc>
+            </a:pPr>
+            <a:r>
+              <a:rPr lang="en-US" altLang="zh-CN" sz="1200" b="0">
+                <a:solidFill>
+                  <a:srgbClr val="CCCCCC"/>
+                </a:solidFill>
+                <a:latin typeface="Menlo" panose="020B0609030804020204"/>
+                <a:ea typeface="Menlo" panose="020B0609030804020204"/>
+              </a:rPr>
+              <a:t>  </a:t>
+            </a:r>
+            <a:r>
+              <a:rPr lang="en-US" altLang="zh-CN" sz="1200" b="0">
+                <a:solidFill>
+                  <a:schemeClr val="tx1"/>
+                </a:solidFill>
+                <a:latin typeface="Menlo" panose="020B0609030804020204"/>
+                <a:ea typeface="Menlo" panose="020B0609030804020204"/>
+              </a:rPr>
+              <a:t>  c d</a:t>
+            </a:r>
+            <a:endParaRPr lang="en-US" altLang="zh-CN" sz="1200" b="0">
+              <a:solidFill>
+                <a:schemeClr val="tx1"/>
+              </a:solidFill>
+              <a:latin typeface="Menlo" panose="020B0609030804020204"/>
+              <a:ea typeface="Menlo" panose="020B0609030804020204"/>
+            </a:endParaRPr>
+          </a:p>
+          <a:p>
+            <a:pPr>
+              <a:lnSpc>
+                <a:spcPts val="2000"/>
+              </a:lnSpc>
+            </a:pPr>
+            <a:r>
+              <a:rPr lang="en-US" altLang="zh-CN" sz="1200" b="0">
+                <a:solidFill>
+                  <a:schemeClr val="tx1"/>
+                </a:solidFill>
+                <a:latin typeface="Menlo" panose="020B0609030804020204"/>
+                <a:ea typeface="Menlo" panose="020B0609030804020204"/>
+              </a:rPr>
+              <a:t>x y </a:t>
+            </a:r>
+            <a:endParaRPr lang="en-US" altLang="zh-CN" sz="1200" b="0">
+              <a:solidFill>
+                <a:schemeClr val="tx1"/>
+              </a:solidFill>
+              <a:latin typeface="Menlo" panose="020B0609030804020204"/>
+              <a:ea typeface="Menlo" panose="020B0609030804020204"/>
+            </a:endParaRPr>
+          </a:p>
+          <a:p>
+            <a:pPr>
+              <a:lnSpc>
+                <a:spcPts val="2000"/>
+              </a:lnSpc>
+            </a:pPr>
+            <a:r>
+              <a:rPr lang="en-US" altLang="zh-CN" sz="1200" b="0">
+                <a:solidFill>
+                  <a:schemeClr val="tx1"/>
+                </a:solidFill>
+                <a:latin typeface="Menlo" panose="020B0609030804020204"/>
+                <a:ea typeface="Menlo" panose="020B0609030804020204"/>
+              </a:rPr>
+              <a:t>7 6 5 3</a:t>
+            </a:r>
+            <a:endParaRPr lang="en-US" altLang="zh-CN" sz="1200" b="0">
+              <a:solidFill>
+                <a:schemeClr val="tx1"/>
+              </a:solidFill>
+              <a:latin typeface="Menlo" panose="020B0609030804020204"/>
+              <a:ea typeface="Menlo" panose="020B0609030804020204"/>
+            </a:endParaRPr>
+          </a:p>
+          <a:p>
+            <a:pPr>
+              <a:lnSpc>
+                <a:spcPts val="2000"/>
+              </a:lnSpc>
+            </a:pPr>
+            <a:r>
+              <a:rPr lang="en-US" altLang="zh-CN" sz="1200" b="0">
+                <a:solidFill>
+                  <a:schemeClr val="tx1"/>
+                </a:solidFill>
+                <a:latin typeface="Menlo" panose="020B0609030804020204"/>
+                <a:ea typeface="Menlo" panose="020B0609030804020204"/>
+              </a:rPr>
+              <a:t>1 2 1 2</a:t>
+            </a:r>
+            <a:endParaRPr lang="en-US" altLang="zh-CN" sz="1200" b="0">
+              <a:solidFill>
+                <a:schemeClr val="tx1"/>
+              </a:solidFill>
+              <a:latin typeface="Menlo" panose="020B0609030804020204"/>
+              <a:ea typeface="Menlo" panose="020B0609030804020204"/>
+            </a:endParaRPr>
+          </a:p>
+          <a:p>
+            <a:pPr>
+              <a:lnSpc>
+                <a:spcPts val="2000"/>
+              </a:lnSpc>
+            </a:pPr>
+            <a:r>
+              <a:rPr lang="en-US" altLang="zh-CN" sz="1200" b="0">
+                <a:solidFill>
+                  <a:schemeClr val="tx1"/>
+                </a:solidFill>
+                <a:latin typeface="Menlo" panose="020B0609030804020204"/>
+                <a:ea typeface="Menlo" panose="020B0609030804020204"/>
+              </a:rPr>
+              <a:t>3 6 8 9</a:t>
+            </a:r>
+            <a:endParaRPr lang="en-US" altLang="zh-CN" sz="1200" b="0">
+              <a:solidFill>
+                <a:schemeClr val="tx1"/>
+              </a:solidFill>
+              <a:latin typeface="Menlo" panose="020B0609030804020204"/>
+              <a:ea typeface="Menlo" panose="020B0609030804020204"/>
+            </a:endParaRPr>
+          </a:p>
+          <a:p>
+            <a:pPr>
+              <a:lnSpc>
+                <a:spcPts val="2000"/>
+              </a:lnSpc>
+            </a:pPr>
+            <a:r>
+              <a:rPr lang="en-US" altLang="zh-CN" sz="1200" b="0">
+                <a:solidFill>
+                  <a:schemeClr val="tx1"/>
+                </a:solidFill>
+                <a:latin typeface="Menlo" panose="020B0609030804020204"/>
+                <a:ea typeface="Menlo" panose="020B0609030804020204"/>
+              </a:rPr>
+              <a:t>3 5 8 7</a:t>
+            </a:r>
+            <a:endParaRPr lang="en-US" altLang="zh-CN" sz="1200" b="0">
+              <a:solidFill>
+                <a:schemeClr val="tx1"/>
+              </a:solidFill>
+              <a:latin typeface="Menlo" panose="020B0609030804020204"/>
+              <a:ea typeface="Menlo" panose="020B0609030804020204"/>
+            </a:endParaRPr>
+          </a:p>
+        </p:txBody>
+      </p:sp>
+      <p:sp>
+        <p:nvSpPr>
+          <p:cNvPr id="6" name="Text Box 5"/>
+          <p:cNvSpPr txBox="1"/>
+          <p:nvPr>
+            <p:custDataLst>
+              <p:tags r:id="rId1"/>
+            </p:custDataLst>
+          </p:nvPr>
+        </p:nvSpPr>
+        <p:spPr>
+          <a:xfrm>
+            <a:off x="3923030" y="1217295"/>
+            <a:ext cx="1054735" cy="860425"/>
+          </a:xfrm>
+          <a:prstGeom prst="rect">
+            <a:avLst/>
+          </a:prstGeom>
+        </p:spPr>
+        <p:txBody>
+          <a:bodyPr wrap="square">
+            <a:spAutoFit/>
+          </a:bodyPr>
+          <a:p>
+            <a:pPr>
+              <a:lnSpc>
+                <a:spcPts val="2000"/>
+              </a:lnSpc>
+            </a:pPr>
+            <a:r>
+              <a:rPr lang="en-US" altLang="zh-CN" sz="1200" b="0">
+                <a:solidFill>
+                  <a:srgbClr val="CCCCCC"/>
+                </a:solidFill>
+                <a:latin typeface="Menlo" panose="020B0609030804020204"/>
+                <a:ea typeface="Menlo" panose="020B0609030804020204"/>
+              </a:rPr>
+              <a:t>  </a:t>
+            </a:r>
+            <a:r>
+              <a:rPr lang="en-US" altLang="zh-CN" sz="1200" b="0">
+                <a:solidFill>
+                  <a:schemeClr val="tx1"/>
+                </a:solidFill>
+                <a:latin typeface="Menlo" panose="020B0609030804020204"/>
+                <a:ea typeface="Menlo" panose="020B0609030804020204"/>
+              </a:rPr>
+              <a:t>  c d</a:t>
+            </a:r>
+            <a:endParaRPr lang="en-US" altLang="zh-CN" sz="1200" b="0">
+              <a:solidFill>
+                <a:schemeClr val="tx1"/>
+              </a:solidFill>
+              <a:latin typeface="Menlo" panose="020B0609030804020204"/>
+              <a:ea typeface="Menlo" panose="020B0609030804020204"/>
+            </a:endParaRPr>
+          </a:p>
+          <a:p>
+            <a:pPr>
+              <a:lnSpc>
+                <a:spcPts val="2000"/>
+              </a:lnSpc>
+            </a:pPr>
+            <a:r>
+              <a:rPr lang="en-US" altLang="zh-CN" sz="1200" b="0">
+                <a:solidFill>
+                  <a:schemeClr val="tx1"/>
+                </a:solidFill>
+                <a:latin typeface="Menlo" panose="020B0609030804020204"/>
+                <a:ea typeface="Menlo" panose="020B0609030804020204"/>
+              </a:rPr>
+              <a:t>x y </a:t>
+            </a:r>
+            <a:endParaRPr lang="en-US" altLang="zh-CN" sz="1200" b="0">
+              <a:solidFill>
+                <a:schemeClr val="tx1"/>
+              </a:solidFill>
+              <a:latin typeface="Menlo" panose="020B0609030804020204"/>
+              <a:ea typeface="Menlo" panose="020B0609030804020204"/>
+            </a:endParaRPr>
+          </a:p>
+          <a:p>
+            <a:pPr>
+              <a:lnSpc>
+                <a:spcPts val="2000"/>
+              </a:lnSpc>
+            </a:pPr>
+            <a:r>
+              <a:rPr lang="en-US" altLang="zh-CN" sz="1200" b="0">
+                <a:solidFill>
+                  <a:schemeClr val="tx1"/>
+                </a:solidFill>
+                <a:latin typeface="Menlo" panose="020B0609030804020204"/>
+                <a:ea typeface="Menlo" panose="020B0609030804020204"/>
+              </a:rPr>
+              <a:t>7 6 5 3</a:t>
+            </a:r>
+            <a:endParaRPr lang="en-US" altLang="zh-CN" sz="1200" b="0">
+              <a:solidFill>
+                <a:schemeClr val="tx1"/>
+              </a:solidFill>
+              <a:latin typeface="Menlo" panose="020B0609030804020204"/>
+              <a:ea typeface="Menlo" panose="020B0609030804020204"/>
+            </a:endParaRPr>
+          </a:p>
+        </p:txBody>
+      </p:sp>
+      <p:sp>
+        <p:nvSpPr>
+          <p:cNvPr id="7" name="Text Box 6"/>
+          <p:cNvSpPr txBox="1"/>
+          <p:nvPr>
+            <p:custDataLst>
+              <p:tags r:id="rId2"/>
+            </p:custDataLst>
+          </p:nvPr>
+        </p:nvSpPr>
+        <p:spPr>
+          <a:xfrm>
+            <a:off x="3923030" y="2482850"/>
+            <a:ext cx="1054735" cy="1116965"/>
+          </a:xfrm>
+          <a:prstGeom prst="rect">
+            <a:avLst/>
+          </a:prstGeom>
+        </p:spPr>
+        <p:txBody>
+          <a:bodyPr wrap="square">
+            <a:spAutoFit/>
+          </a:bodyPr>
+          <a:p>
+            <a:pPr>
+              <a:lnSpc>
+                <a:spcPts val="2000"/>
+              </a:lnSpc>
+            </a:pPr>
+            <a:r>
+              <a:rPr lang="en-US" altLang="zh-CN" sz="1200" b="0">
+                <a:solidFill>
+                  <a:srgbClr val="CCCCCC"/>
+                </a:solidFill>
+                <a:latin typeface="Menlo" panose="020B0609030804020204"/>
+                <a:ea typeface="Menlo" panose="020B0609030804020204"/>
+              </a:rPr>
+              <a:t>  </a:t>
+            </a:r>
+            <a:r>
+              <a:rPr lang="en-US" altLang="zh-CN" sz="1200" b="0">
+                <a:solidFill>
+                  <a:schemeClr val="tx1"/>
+                </a:solidFill>
+                <a:latin typeface="Menlo" panose="020B0609030804020204"/>
+                <a:ea typeface="Menlo" panose="020B0609030804020204"/>
+              </a:rPr>
+              <a:t>  c d</a:t>
+            </a:r>
+            <a:endParaRPr lang="en-US" altLang="zh-CN" sz="1200" b="0">
+              <a:solidFill>
+                <a:schemeClr val="tx1"/>
+              </a:solidFill>
+              <a:latin typeface="Menlo" panose="020B0609030804020204"/>
+              <a:ea typeface="Menlo" panose="020B0609030804020204"/>
+            </a:endParaRPr>
+          </a:p>
+          <a:p>
+            <a:pPr>
+              <a:lnSpc>
+                <a:spcPts val="2000"/>
+              </a:lnSpc>
+            </a:pPr>
+            <a:r>
+              <a:rPr lang="en-US" altLang="zh-CN" sz="1200" b="0">
+                <a:solidFill>
+                  <a:schemeClr val="tx1"/>
+                </a:solidFill>
+                <a:latin typeface="Menlo" panose="020B0609030804020204"/>
+                <a:ea typeface="Menlo" panose="020B0609030804020204"/>
+              </a:rPr>
+              <a:t>x y </a:t>
+            </a:r>
+            <a:endParaRPr lang="en-US" altLang="zh-CN" sz="1200" b="0">
+              <a:solidFill>
+                <a:schemeClr val="tx1"/>
+              </a:solidFill>
+              <a:latin typeface="Menlo" panose="020B0609030804020204"/>
+              <a:ea typeface="Menlo" panose="020B0609030804020204"/>
+            </a:endParaRPr>
+          </a:p>
+          <a:p>
+            <a:pPr>
+              <a:lnSpc>
+                <a:spcPts val="2000"/>
+              </a:lnSpc>
+            </a:pPr>
+            <a:r>
+              <a:rPr lang="en-US" altLang="zh-CN" sz="1200" b="0">
+                <a:solidFill>
+                  <a:schemeClr val="tx1"/>
+                </a:solidFill>
+                <a:latin typeface="Menlo" panose="020B0609030804020204"/>
+                <a:ea typeface="Menlo" panose="020B0609030804020204"/>
+              </a:rPr>
+              <a:t>3 6 8 9</a:t>
+            </a:r>
+            <a:endParaRPr lang="en-US" altLang="zh-CN" sz="1200" b="0">
+              <a:solidFill>
+                <a:schemeClr val="tx1"/>
+              </a:solidFill>
+              <a:latin typeface="Menlo" panose="020B0609030804020204"/>
+              <a:ea typeface="Menlo" panose="020B0609030804020204"/>
+            </a:endParaRPr>
+          </a:p>
+          <a:p>
+            <a:pPr>
+              <a:lnSpc>
+                <a:spcPts val="2000"/>
+              </a:lnSpc>
+            </a:pPr>
+            <a:r>
+              <a:rPr lang="en-US" altLang="zh-CN" sz="1200">
+                <a:latin typeface="Menlo" panose="020B0609030804020204"/>
+                <a:ea typeface="Menlo" panose="020B0609030804020204"/>
+                <a:sym typeface="+mn-ea"/>
+              </a:rPr>
+              <a:t>3 5 8 7</a:t>
+            </a:r>
+            <a:endParaRPr lang="en-US" altLang="zh-CN" sz="1200" b="0">
+              <a:solidFill>
+                <a:schemeClr val="tx1"/>
+              </a:solidFill>
+              <a:latin typeface="Menlo" panose="020B0609030804020204"/>
+              <a:ea typeface="Menlo" panose="020B0609030804020204"/>
+            </a:endParaRPr>
+          </a:p>
+        </p:txBody>
+      </p:sp>
+      <p:cxnSp>
+        <p:nvCxnSpPr>
+          <p:cNvPr id="8" name="Straight Connector 7"/>
+          <p:cNvCxnSpPr/>
+          <p:nvPr/>
+        </p:nvCxnSpPr>
+        <p:spPr>
+          <a:xfrm>
+            <a:off x="2583180" y="2480945"/>
+            <a:ext cx="889000" cy="0"/>
+          </a:xfrm>
+          <a:prstGeom prst="line">
+            <a:avLst/>
+          </a:prstGeom>
+          <a:ln w="19050"/>
+        </p:spPr>
+        <p:style>
+          <a:lnRef idx="2">
+            <a:schemeClr val="accent1"/>
+          </a:lnRef>
+          <a:fillRef idx="0">
+            <a:srgbClr val="FFFFFF"/>
+          </a:fillRef>
+          <a:effectRef idx="0">
+            <a:srgbClr val="FFFFFF"/>
+          </a:effectRef>
+          <a:fontRef idx="minor">
+            <a:schemeClr val="tx1"/>
+          </a:fontRef>
+        </p:style>
+      </p:cxnSp>
+      <p:cxnSp>
+        <p:nvCxnSpPr>
+          <p:cNvPr id="9" name="Straight Arrow Connector 8"/>
+          <p:cNvCxnSpPr/>
+          <p:nvPr/>
+        </p:nvCxnSpPr>
+        <p:spPr>
+          <a:xfrm flipV="1">
+            <a:off x="3461385" y="1941195"/>
+            <a:ext cx="419735" cy="541655"/>
+          </a:xfrm>
+          <a:prstGeom prst="straightConnector1">
+            <a:avLst/>
+          </a:prstGeom>
+          <a:ln>
+            <a:tailEnd type="arrow"/>
+          </a:ln>
+        </p:spPr>
+        <p:style>
+          <a:lnRef idx="2">
+            <a:schemeClr val="accent1"/>
+          </a:lnRef>
+          <a:fillRef idx="0">
+            <a:srgbClr val="FFFFFF"/>
+          </a:fillRef>
+          <a:effectRef idx="0">
+            <a:srgbClr val="FFFFFF"/>
+          </a:effectRef>
+          <a:fontRef idx="minor">
+            <a:schemeClr val="tx1"/>
+          </a:fontRef>
+        </p:style>
+      </p:cxnSp>
+      <p:cxnSp>
+        <p:nvCxnSpPr>
+          <p:cNvPr id="10" name="Straight Arrow Connector 9"/>
+          <p:cNvCxnSpPr/>
+          <p:nvPr>
+            <p:custDataLst>
+              <p:tags r:id="rId3"/>
+            </p:custDataLst>
+          </p:nvPr>
+        </p:nvCxnSpPr>
+        <p:spPr>
+          <a:xfrm>
+            <a:off x="3454400" y="2476500"/>
+            <a:ext cx="400685" cy="579120"/>
+          </a:xfrm>
+          <a:prstGeom prst="straightConnector1">
+            <a:avLst/>
+          </a:prstGeom>
+          <a:ln>
+            <a:tailEnd type="arrow"/>
+          </a:ln>
+        </p:spPr>
+        <p:style>
+          <a:lnRef idx="2">
+            <a:schemeClr val="accent1"/>
+          </a:lnRef>
+          <a:fillRef idx="0">
+            <a:srgbClr val="FFFFFF"/>
+          </a:fillRef>
+          <a:effectRef idx="0">
+            <a:srgbClr val="FFFFFF"/>
+          </a:effectRef>
+          <a:fontRef idx="minor">
+            <a:schemeClr val="tx1"/>
+          </a:fontRef>
+        </p:style>
+      </p:cxnSp>
+      <p:cxnSp>
+        <p:nvCxnSpPr>
+          <p:cNvPr id="11" name="Straight Arrow Connector 10"/>
+          <p:cNvCxnSpPr/>
+          <p:nvPr>
+            <p:custDataLst>
+              <p:tags r:id="rId4"/>
+            </p:custDataLst>
+          </p:nvPr>
+        </p:nvCxnSpPr>
+        <p:spPr>
+          <a:xfrm>
+            <a:off x="4870450" y="1786255"/>
+            <a:ext cx="759460" cy="0"/>
+          </a:xfrm>
+          <a:prstGeom prst="straightConnector1">
+            <a:avLst/>
+          </a:prstGeom>
+          <a:ln>
+            <a:tailEnd type="arrow"/>
+          </a:ln>
+        </p:spPr>
+        <p:style>
+          <a:lnRef idx="2">
+            <a:schemeClr val="accent1"/>
+          </a:lnRef>
+          <a:fillRef idx="0">
+            <a:srgbClr val="FFFFFF"/>
+          </a:fillRef>
+          <a:effectRef idx="0">
+            <a:srgbClr val="FFFFFF"/>
+          </a:effectRef>
+          <a:fontRef idx="minor">
+            <a:schemeClr val="tx1"/>
+          </a:fontRef>
+        </p:style>
+      </p:cxnSp>
+      <p:sp>
+        <p:nvSpPr>
+          <p:cNvPr id="12" name="Text Box 11"/>
+          <p:cNvSpPr txBox="1"/>
+          <p:nvPr>
+            <p:custDataLst>
+              <p:tags r:id="rId5"/>
+            </p:custDataLst>
+          </p:nvPr>
+        </p:nvSpPr>
+        <p:spPr>
+          <a:xfrm>
+            <a:off x="5751830" y="1192530"/>
+            <a:ext cx="1054735" cy="860425"/>
+          </a:xfrm>
+          <a:prstGeom prst="rect">
+            <a:avLst/>
+          </a:prstGeom>
+        </p:spPr>
+        <p:txBody>
+          <a:bodyPr wrap="square">
+            <a:spAutoFit/>
+          </a:bodyPr>
+          <a:p>
+            <a:pPr>
+              <a:lnSpc>
+                <a:spcPts val="2000"/>
+              </a:lnSpc>
+            </a:pPr>
+            <a:r>
+              <a:rPr lang="en-US" altLang="zh-CN" sz="1200" b="0">
+                <a:solidFill>
+                  <a:srgbClr val="CCCCCC"/>
+                </a:solidFill>
+                <a:latin typeface="Menlo" panose="020B0609030804020204"/>
+                <a:ea typeface="Menlo" panose="020B0609030804020204"/>
+              </a:rPr>
+              <a:t>  </a:t>
+            </a:r>
+            <a:r>
+              <a:rPr lang="en-US" altLang="zh-CN" sz="1200" b="0">
+                <a:solidFill>
+                  <a:schemeClr val="tx1"/>
+                </a:solidFill>
+                <a:latin typeface="Menlo" panose="020B0609030804020204"/>
+                <a:ea typeface="Menlo" panose="020B0609030804020204"/>
+              </a:rPr>
+              <a:t>  c d</a:t>
+            </a:r>
+            <a:endParaRPr lang="en-US" altLang="zh-CN" sz="1200" b="0">
+              <a:solidFill>
+                <a:schemeClr val="tx1"/>
+              </a:solidFill>
+              <a:latin typeface="Menlo" panose="020B0609030804020204"/>
+              <a:ea typeface="Menlo" panose="020B0609030804020204"/>
+            </a:endParaRPr>
+          </a:p>
+          <a:p>
+            <a:pPr>
+              <a:lnSpc>
+                <a:spcPts val="2000"/>
+              </a:lnSpc>
+            </a:pPr>
+            <a:r>
+              <a:rPr lang="en-US" altLang="zh-CN" sz="1200" b="0">
+                <a:solidFill>
+                  <a:schemeClr val="tx1"/>
+                </a:solidFill>
+                <a:latin typeface="Menlo" panose="020B0609030804020204"/>
+                <a:ea typeface="Menlo" panose="020B0609030804020204"/>
+              </a:rPr>
+              <a:t>x y </a:t>
+            </a:r>
+            <a:endParaRPr lang="en-US" altLang="zh-CN" sz="1200" b="0">
+              <a:solidFill>
+                <a:schemeClr val="tx1"/>
+              </a:solidFill>
+              <a:latin typeface="Menlo" panose="020B0609030804020204"/>
+              <a:ea typeface="Menlo" panose="020B0609030804020204"/>
+            </a:endParaRPr>
+          </a:p>
+          <a:p>
+            <a:pPr>
+              <a:lnSpc>
+                <a:spcPts val="2000"/>
+              </a:lnSpc>
+            </a:pPr>
+            <a:r>
+              <a:rPr lang="en-US" altLang="zh-CN" sz="1200" b="0">
+                <a:solidFill>
+                  <a:schemeClr val="tx1"/>
+                </a:solidFill>
+                <a:latin typeface="Menlo" panose="020B0609030804020204"/>
+                <a:ea typeface="Menlo" panose="020B0609030804020204"/>
+              </a:rPr>
+              <a:t>7 6 5 3</a:t>
+            </a:r>
+            <a:endParaRPr lang="en-US" altLang="zh-CN" sz="1200" b="0">
+              <a:solidFill>
+                <a:schemeClr val="tx1"/>
+              </a:solidFill>
+              <a:latin typeface="Menlo" panose="020B0609030804020204"/>
+              <a:ea typeface="Menlo" panose="020B0609030804020204"/>
+            </a:endParaRPr>
+          </a:p>
+        </p:txBody>
+      </p:sp>
+      <p:sp>
+        <p:nvSpPr>
+          <p:cNvPr id="13" name="Text Box 12"/>
+          <p:cNvSpPr txBox="1"/>
+          <p:nvPr>
+            <p:custDataLst>
+              <p:tags r:id="rId6"/>
+            </p:custDataLst>
+          </p:nvPr>
+        </p:nvSpPr>
+        <p:spPr>
+          <a:xfrm>
+            <a:off x="5780405" y="2717800"/>
+            <a:ext cx="1054735" cy="946150"/>
+          </a:xfrm>
+          <a:prstGeom prst="rect">
+            <a:avLst/>
+          </a:prstGeom>
+        </p:spPr>
+        <p:txBody>
+          <a:bodyPr wrap="square">
+            <a:noAutofit/>
+          </a:bodyPr>
+          <a:p>
+            <a:pPr>
+              <a:lnSpc>
+                <a:spcPts val="2000"/>
+              </a:lnSpc>
+            </a:pPr>
+            <a:r>
+              <a:rPr lang="en-US" altLang="zh-CN" sz="1200" b="0">
+                <a:solidFill>
+                  <a:srgbClr val="CCCCCC"/>
+                </a:solidFill>
+                <a:latin typeface="Menlo" panose="020B0609030804020204"/>
+                <a:ea typeface="Menlo" panose="020B0609030804020204"/>
+              </a:rPr>
+              <a:t>  </a:t>
+            </a:r>
+            <a:r>
+              <a:rPr lang="en-US" altLang="zh-CN" sz="1200" b="0">
+                <a:solidFill>
+                  <a:schemeClr val="tx1"/>
+                </a:solidFill>
+                <a:latin typeface="Menlo" panose="020B0609030804020204"/>
+                <a:ea typeface="Menlo" panose="020B0609030804020204"/>
+              </a:rPr>
+              <a:t>  c d</a:t>
+            </a:r>
+            <a:endParaRPr lang="en-US" altLang="zh-CN" sz="1200" b="0">
+              <a:solidFill>
+                <a:schemeClr val="tx1"/>
+              </a:solidFill>
+              <a:latin typeface="Menlo" panose="020B0609030804020204"/>
+              <a:ea typeface="Menlo" panose="020B0609030804020204"/>
+            </a:endParaRPr>
+          </a:p>
+          <a:p>
+            <a:pPr>
+              <a:lnSpc>
+                <a:spcPts val="2000"/>
+              </a:lnSpc>
+            </a:pPr>
+            <a:r>
+              <a:rPr lang="en-US" altLang="zh-CN" sz="1200" b="0">
+                <a:solidFill>
+                  <a:schemeClr val="tx1"/>
+                </a:solidFill>
+                <a:latin typeface="Menlo" panose="020B0609030804020204"/>
+                <a:ea typeface="Menlo" panose="020B0609030804020204"/>
+              </a:rPr>
+              <a:t>x y </a:t>
+            </a:r>
+            <a:endParaRPr lang="en-US" altLang="zh-CN" sz="1200" b="0">
+              <a:solidFill>
+                <a:schemeClr val="tx1"/>
+              </a:solidFill>
+              <a:latin typeface="Menlo" panose="020B0609030804020204"/>
+              <a:ea typeface="Menlo" panose="020B0609030804020204"/>
+            </a:endParaRPr>
+          </a:p>
+          <a:p>
+            <a:pPr>
+              <a:lnSpc>
+                <a:spcPts val="2000"/>
+              </a:lnSpc>
+            </a:pPr>
+            <a:r>
+              <a:rPr lang="en-US" altLang="zh-CN" sz="1200" b="0">
+                <a:solidFill>
+                  <a:schemeClr val="tx1"/>
+                </a:solidFill>
+                <a:latin typeface="Menlo" panose="020B0609030804020204"/>
+                <a:ea typeface="Menlo" panose="020B0609030804020204"/>
+              </a:rPr>
+              <a:t>3 6 8 9</a:t>
+            </a:r>
+            <a:endParaRPr lang="en-US" altLang="zh-CN" sz="1200" b="0">
+              <a:solidFill>
+                <a:schemeClr val="tx1"/>
+              </a:solidFill>
+              <a:latin typeface="Menlo" panose="020B0609030804020204"/>
+              <a:ea typeface="Menlo" panose="020B0609030804020204"/>
+            </a:endParaRPr>
+          </a:p>
+          <a:p>
+            <a:pPr>
+              <a:lnSpc>
+                <a:spcPts val="2000"/>
+              </a:lnSpc>
+            </a:pPr>
+            <a:endParaRPr lang="en-US" altLang="zh-CN" sz="1200" b="0">
+              <a:solidFill>
+                <a:schemeClr val="tx1"/>
+              </a:solidFill>
+              <a:latin typeface="Menlo" panose="020B0609030804020204"/>
+              <a:ea typeface="Menlo" panose="020B0609030804020204"/>
+            </a:endParaRPr>
+          </a:p>
+        </p:txBody>
+      </p:sp>
+      <p:cxnSp>
+        <p:nvCxnSpPr>
+          <p:cNvPr id="14" name="Straight Arrow Connector 13"/>
+          <p:cNvCxnSpPr/>
+          <p:nvPr>
+            <p:custDataLst>
+              <p:tags r:id="rId7"/>
+            </p:custDataLst>
+          </p:nvPr>
+        </p:nvCxnSpPr>
+        <p:spPr>
+          <a:xfrm>
+            <a:off x="4879340" y="3271520"/>
+            <a:ext cx="759460" cy="0"/>
+          </a:xfrm>
+          <a:prstGeom prst="straightConnector1">
+            <a:avLst/>
+          </a:prstGeom>
+          <a:ln>
+            <a:tailEnd type="arrow"/>
+          </a:ln>
+        </p:spPr>
+        <p:style>
+          <a:lnRef idx="2">
+            <a:schemeClr val="accent1"/>
+          </a:lnRef>
+          <a:fillRef idx="0">
+            <a:srgbClr val="FFFFFF"/>
+          </a:fillRef>
+          <a:effectRef idx="0">
+            <a:srgbClr val="FFFFFF"/>
+          </a:effectRef>
+          <a:fontRef idx="minor">
+            <a:schemeClr val="tx1"/>
+          </a:fontRef>
+        </p:style>
+      </p:cxnSp>
+      <p:cxnSp>
+        <p:nvCxnSpPr>
+          <p:cNvPr id="16" name="Straight Connector 15"/>
+          <p:cNvCxnSpPr/>
+          <p:nvPr/>
+        </p:nvCxnSpPr>
+        <p:spPr>
+          <a:xfrm>
+            <a:off x="6835140" y="1732280"/>
+            <a:ext cx="697230" cy="664845"/>
+          </a:xfrm>
+          <a:prstGeom prst="line">
+            <a:avLst/>
+          </a:prstGeom>
+        </p:spPr>
+        <p:style>
+          <a:lnRef idx="2">
+            <a:schemeClr val="accent1"/>
+          </a:lnRef>
+          <a:fillRef idx="0">
+            <a:srgbClr val="FFFFFF"/>
+          </a:fillRef>
+          <a:effectRef idx="0">
+            <a:srgbClr val="FFFFFF"/>
+          </a:effectRef>
+          <a:fontRef idx="minor">
+            <a:schemeClr val="tx1"/>
+          </a:fontRef>
+        </p:style>
+      </p:cxnSp>
+      <p:cxnSp>
+        <p:nvCxnSpPr>
+          <p:cNvPr id="17" name="Straight Connector 16"/>
+          <p:cNvCxnSpPr/>
+          <p:nvPr>
+            <p:custDataLst>
+              <p:tags r:id="rId8"/>
+            </p:custDataLst>
+          </p:nvPr>
+        </p:nvCxnSpPr>
+        <p:spPr>
+          <a:xfrm flipV="1">
+            <a:off x="6692265" y="2400935"/>
+            <a:ext cx="844550" cy="870585"/>
+          </a:xfrm>
+          <a:prstGeom prst="line">
+            <a:avLst/>
+          </a:prstGeom>
+        </p:spPr>
+        <p:style>
+          <a:lnRef idx="2">
+            <a:schemeClr val="accent1"/>
+          </a:lnRef>
+          <a:fillRef idx="0">
+            <a:srgbClr val="FFFFFF"/>
+          </a:fillRef>
+          <a:effectRef idx="0">
+            <a:srgbClr val="FFFFFF"/>
+          </a:effectRef>
+          <a:fontRef idx="minor">
+            <a:schemeClr val="tx1"/>
+          </a:fontRef>
+        </p:style>
+      </p:cxnSp>
+      <p:cxnSp>
+        <p:nvCxnSpPr>
+          <p:cNvPr id="20" name="Straight Arrow Connector 19"/>
+          <p:cNvCxnSpPr/>
+          <p:nvPr/>
+        </p:nvCxnSpPr>
+        <p:spPr>
+          <a:xfrm>
+            <a:off x="7529195" y="2399665"/>
+            <a:ext cx="752475" cy="0"/>
+          </a:xfrm>
+          <a:prstGeom prst="straightConnector1">
+            <a:avLst/>
+          </a:prstGeom>
+          <a:ln w="19050">
+            <a:solidFill>
+              <a:schemeClr val="accent1"/>
+            </a:solidFill>
+            <a:tailEnd type="arrow"/>
+          </a:ln>
+        </p:spPr>
+        <p:style>
+          <a:lnRef idx="2">
+            <a:schemeClr val="accent1"/>
+          </a:lnRef>
+          <a:fillRef idx="0">
+            <a:srgbClr val="FFFFFF"/>
+          </a:fillRef>
+          <a:effectRef idx="0">
+            <a:srgbClr val="FFFFFF"/>
+          </a:effectRef>
+          <a:fontRef idx="minor">
+            <a:schemeClr val="tx1"/>
+          </a:fontRef>
+        </p:style>
+      </p:cxnSp>
+      <p:sp>
+        <p:nvSpPr>
+          <p:cNvPr id="21" name="Text Box 20"/>
+          <p:cNvSpPr txBox="1"/>
+          <p:nvPr>
+            <p:custDataLst>
+              <p:tags r:id="rId9"/>
+            </p:custDataLst>
+          </p:nvPr>
+        </p:nvSpPr>
+        <p:spPr>
+          <a:xfrm>
+            <a:off x="8533765" y="1688465"/>
+            <a:ext cx="1054735" cy="1116965"/>
+          </a:xfrm>
+          <a:prstGeom prst="rect">
+            <a:avLst/>
+          </a:prstGeom>
+        </p:spPr>
+        <p:txBody>
+          <a:bodyPr wrap="square">
+            <a:spAutoFit/>
+          </a:bodyPr>
+          <a:p>
+            <a:pPr>
+              <a:lnSpc>
+                <a:spcPts val="2000"/>
+              </a:lnSpc>
+            </a:pPr>
+            <a:r>
+              <a:rPr lang="en-US" altLang="zh-CN" sz="1200" b="0">
+                <a:solidFill>
+                  <a:srgbClr val="CCCCCC"/>
+                </a:solidFill>
+                <a:latin typeface="Menlo" panose="020B0609030804020204"/>
+                <a:ea typeface="Menlo" panose="020B0609030804020204"/>
+              </a:rPr>
+              <a:t>  </a:t>
+            </a:r>
+            <a:r>
+              <a:rPr lang="en-US" altLang="zh-CN" sz="1200" b="0">
+                <a:solidFill>
+                  <a:schemeClr val="tx1"/>
+                </a:solidFill>
+                <a:latin typeface="Menlo" panose="020B0609030804020204"/>
+                <a:ea typeface="Menlo" panose="020B0609030804020204"/>
+              </a:rPr>
+              <a:t>  c d</a:t>
+            </a:r>
+            <a:endParaRPr lang="en-US" altLang="zh-CN" sz="1200" b="0">
+              <a:solidFill>
+                <a:schemeClr val="tx1"/>
+              </a:solidFill>
+              <a:latin typeface="Menlo" panose="020B0609030804020204"/>
+              <a:ea typeface="Menlo" panose="020B0609030804020204"/>
+            </a:endParaRPr>
+          </a:p>
+          <a:p>
+            <a:pPr>
+              <a:lnSpc>
+                <a:spcPts val="2000"/>
+              </a:lnSpc>
+            </a:pPr>
+            <a:r>
+              <a:rPr lang="en-US" altLang="zh-CN" sz="1200" b="0">
+                <a:solidFill>
+                  <a:schemeClr val="tx1"/>
+                </a:solidFill>
+                <a:latin typeface="Menlo" panose="020B0609030804020204"/>
+                <a:ea typeface="Menlo" panose="020B0609030804020204"/>
+              </a:rPr>
+              <a:t>x y </a:t>
+            </a:r>
+            <a:endParaRPr lang="en-US" altLang="zh-CN" sz="1200" b="0">
+              <a:solidFill>
+                <a:schemeClr val="tx1"/>
+              </a:solidFill>
+              <a:latin typeface="Menlo" panose="020B0609030804020204"/>
+              <a:ea typeface="Menlo" panose="020B0609030804020204"/>
+            </a:endParaRPr>
+          </a:p>
+          <a:p>
+            <a:pPr>
+              <a:lnSpc>
+                <a:spcPts val="2000"/>
+              </a:lnSpc>
+            </a:pPr>
+            <a:r>
+              <a:rPr lang="en-US" altLang="zh-CN" sz="1200" b="0">
+                <a:solidFill>
+                  <a:schemeClr val="tx1"/>
+                </a:solidFill>
+                <a:latin typeface="Menlo" panose="020B0609030804020204"/>
+                <a:ea typeface="Menlo" panose="020B0609030804020204"/>
+              </a:rPr>
+              <a:t>7 6 5 3</a:t>
+            </a:r>
+            <a:endParaRPr lang="en-US" altLang="zh-CN" sz="1200" b="0">
+              <a:solidFill>
+                <a:schemeClr val="tx1"/>
+              </a:solidFill>
+              <a:latin typeface="Menlo" panose="020B0609030804020204"/>
+              <a:ea typeface="Menlo" panose="020B0609030804020204"/>
+            </a:endParaRPr>
+          </a:p>
+          <a:p>
+            <a:pPr>
+              <a:lnSpc>
+                <a:spcPts val="2000"/>
+              </a:lnSpc>
+            </a:pPr>
+            <a:r>
+              <a:rPr lang="en-US" altLang="zh-CN" sz="1200" b="0">
+                <a:solidFill>
+                  <a:schemeClr val="tx1"/>
+                </a:solidFill>
+                <a:latin typeface="Menlo" panose="020B0609030804020204"/>
+                <a:ea typeface="Menlo" panose="020B0609030804020204"/>
+              </a:rPr>
+              <a:t>3 6 8 9</a:t>
+            </a:r>
+            <a:endParaRPr lang="en-US" altLang="zh-CN" sz="1200" b="0">
+              <a:solidFill>
+                <a:schemeClr val="tx1"/>
+              </a:solidFill>
+              <a:latin typeface="Menlo" panose="020B0609030804020204"/>
+              <a:ea typeface="Menlo" panose="020B0609030804020204"/>
+            </a:endParaRPr>
+          </a:p>
+        </p:txBody>
+      </p:sp>
+      <p:sp>
+        <p:nvSpPr>
+          <p:cNvPr id="22" name="Text Box 21"/>
+          <p:cNvSpPr txBox="1"/>
+          <p:nvPr/>
+        </p:nvSpPr>
+        <p:spPr>
+          <a:xfrm>
+            <a:off x="969645" y="2466340"/>
+            <a:ext cx="669290" cy="368300"/>
+          </a:xfrm>
+          <a:prstGeom prst="rect">
+            <a:avLst/>
+          </a:prstGeom>
+          <a:noFill/>
+        </p:spPr>
+        <p:txBody>
+          <a:bodyPr wrap="square" rtlCol="0">
+            <a:spAutoFit/>
+          </a:bodyPr>
+          <a:p>
+            <a:r>
+              <a:rPr lang="en-US"/>
+              <a:t>df  =</a:t>
+            </a:r>
+            <a:endParaRPr lang="en-US"/>
+          </a:p>
+        </p:txBody>
+      </p:sp>
+      <p:sp>
+        <p:nvSpPr>
+          <p:cNvPr id="23" name="Text Box 22"/>
+          <p:cNvSpPr txBox="1"/>
+          <p:nvPr>
+            <p:custDataLst>
+              <p:tags r:id="rId10"/>
+            </p:custDataLst>
+          </p:nvPr>
+        </p:nvSpPr>
+        <p:spPr>
+          <a:xfrm>
+            <a:off x="988695" y="3295650"/>
+            <a:ext cx="2057400" cy="337185"/>
+          </a:xfrm>
+          <a:prstGeom prst="rect">
+            <a:avLst/>
+          </a:prstGeom>
+          <a:noFill/>
+        </p:spPr>
+        <p:txBody>
+          <a:bodyPr wrap="square" rtlCol="0">
+            <a:spAutoFit/>
+          </a:bodyPr>
+          <a:p>
+            <a:r>
+              <a:rPr lang="en-US" sz="1600"/>
+              <a:t>(idx  = pd.IndexSlice)</a:t>
+            </a:r>
+            <a:endParaRPr lang="en-US" sz="1600"/>
+          </a:p>
+        </p:txBody>
+      </p:sp>
+      <p:sp>
+        <p:nvSpPr>
+          <p:cNvPr id="25" name="Text Box 24"/>
+          <p:cNvSpPr txBox="1"/>
+          <p:nvPr/>
+        </p:nvSpPr>
+        <p:spPr>
+          <a:xfrm>
+            <a:off x="2413635" y="2011680"/>
+            <a:ext cx="1442720" cy="275590"/>
+          </a:xfrm>
+          <a:prstGeom prst="rect">
+            <a:avLst/>
+          </a:prstGeom>
+          <a:noFill/>
+        </p:spPr>
+        <p:txBody>
+          <a:bodyPr wrap="square" rtlCol="0">
+            <a:spAutoFit/>
+          </a:bodyPr>
+          <a:p>
+            <a:r>
+              <a:rPr lang="en-US" sz="1200"/>
+              <a:t>df.loc[idx[[7,3],6]]</a:t>
+            </a:r>
+            <a:endParaRPr lang="en-US" sz="1200"/>
+          </a:p>
+        </p:txBody>
+      </p:sp>
+      <p:sp>
+        <p:nvSpPr>
+          <p:cNvPr id="26" name="Rectangles 25"/>
+          <p:cNvSpPr/>
+          <p:nvPr/>
+        </p:nvSpPr>
+        <p:spPr>
+          <a:xfrm>
+            <a:off x="3112135" y="2023110"/>
+            <a:ext cx="292735" cy="271145"/>
+          </a:xfrm>
+          <a:prstGeom prst="rect">
+            <a:avLst/>
+          </a:prstGeom>
+          <a:noFill/>
+          <a:ln w="19050">
+            <a:solidFill>
+              <a:srgbClr val="C00000"/>
+            </a:solidFill>
+          </a:ln>
+          <a:extLst>
+            <a:ext uri="{909E8E84-426E-40DD-AFC4-6F175D3DCCD1}">
+              <a14:hiddenFill xmlns:a14="http://schemas.microsoft.com/office/drawing/2010/main">
+                <a:solidFill>
+                  <a:schemeClr val="accent1"/>
+                </a:solidFill>
+              </a14:hiddenFill>
+            </a:ext>
+          </a:extLst>
+        </p:spPr>
+        <p:style>
+          <a:lnRef idx="2">
+            <a:schemeClr val="accent1">
+              <a:lumMod val="75000"/>
+            </a:schemeClr>
+          </a:lnRef>
+          <a:fillRef idx="1">
+            <a:schemeClr val="accent1"/>
+          </a:fillRef>
+          <a:effectRef idx="0">
+            <a:srgbClr val="FFFFFF"/>
+          </a:effectRef>
+          <a:fontRef idx="minor">
+            <a:schemeClr val="lt1"/>
+          </a:fontRef>
+        </p:style>
+        <p:txBody>
+          <a:bodyPr rtlCol="0" anchor="ctr"/>
+          <a:p>
+            <a:pPr algn="ctr"/>
+            <a:endParaRPr lang="en-US"/>
+          </a:p>
+        </p:txBody>
+      </p:sp>
+      <p:sp>
+        <p:nvSpPr>
+          <p:cNvPr id="27" name="Text Box 26"/>
+          <p:cNvSpPr txBox="1"/>
+          <p:nvPr>
+            <p:custDataLst>
+              <p:tags r:id="rId11"/>
+            </p:custDataLst>
+          </p:nvPr>
+        </p:nvSpPr>
+        <p:spPr>
+          <a:xfrm>
+            <a:off x="4666615" y="2245360"/>
+            <a:ext cx="1442720" cy="275590"/>
+          </a:xfrm>
+          <a:prstGeom prst="rect">
+            <a:avLst/>
+          </a:prstGeom>
+          <a:noFill/>
+        </p:spPr>
+        <p:txBody>
+          <a:bodyPr wrap="square" rtlCol="0">
+            <a:spAutoFit/>
+          </a:bodyPr>
+          <a:p>
+            <a:r>
+              <a:rPr lang="en-US" sz="1200"/>
+              <a:t>df.loc[idx[[7,3],6]]</a:t>
+            </a:r>
+            <a:endParaRPr lang="en-US" sz="1200"/>
+          </a:p>
+        </p:txBody>
+      </p:sp>
+      <p:sp>
+        <p:nvSpPr>
+          <p:cNvPr id="28" name="Rectangles 27"/>
+          <p:cNvSpPr/>
+          <p:nvPr>
+            <p:custDataLst>
+              <p:tags r:id="rId12"/>
+            </p:custDataLst>
+          </p:nvPr>
+        </p:nvSpPr>
+        <p:spPr>
+          <a:xfrm>
+            <a:off x="5665470" y="2237740"/>
+            <a:ext cx="137795" cy="271145"/>
+          </a:xfrm>
+          <a:prstGeom prst="rect">
+            <a:avLst/>
+          </a:prstGeom>
+          <a:noFill/>
+          <a:ln w="19050">
+            <a:solidFill>
+              <a:srgbClr val="C00000"/>
+            </a:solidFill>
+          </a:ln>
+          <a:extLst>
+            <a:ext uri="{909E8E84-426E-40DD-AFC4-6F175D3DCCD1}">
+              <a14:hiddenFill xmlns:a14="http://schemas.microsoft.com/office/drawing/2010/main">
+                <a:solidFill>
+                  <a:schemeClr val="accent1"/>
+                </a:solidFill>
+              </a14:hiddenFill>
+            </a:ext>
+          </a:extLst>
+        </p:spPr>
+        <p:style>
+          <a:lnRef idx="2">
+            <a:schemeClr val="accent1">
+              <a:lumMod val="75000"/>
+            </a:schemeClr>
+          </a:lnRef>
+          <a:fillRef idx="1">
+            <a:schemeClr val="accent1"/>
+          </a:fillRef>
+          <a:effectRef idx="0">
+            <a:srgbClr val="FFFFFF"/>
+          </a:effectRef>
+          <a:fontRef idx="minor">
+            <a:schemeClr val="lt1"/>
+          </a:fontRef>
+        </p:style>
+        <p:txBody>
+          <a:bodyPr rtlCol="0" anchor="ctr"/>
+          <a:p>
+            <a:pPr algn="ctr"/>
+            <a:endParaRPr lang="en-US"/>
+          </a:p>
+        </p:txBody>
+      </p:sp>
+      <p:sp>
+        <p:nvSpPr>
+          <p:cNvPr id="29" name="Text Box 28"/>
+          <p:cNvSpPr txBox="1"/>
+          <p:nvPr/>
+        </p:nvSpPr>
+        <p:spPr>
+          <a:xfrm>
+            <a:off x="7640955" y="2131060"/>
+            <a:ext cx="669290" cy="245110"/>
+          </a:xfrm>
+          <a:prstGeom prst="rect">
+            <a:avLst/>
+          </a:prstGeom>
+          <a:noFill/>
+        </p:spPr>
+        <p:txBody>
+          <a:bodyPr wrap="square" rtlCol="0">
+            <a:spAutoFit/>
+          </a:bodyPr>
+          <a:p>
+            <a:r>
+              <a:rPr lang="en-US" sz="1000"/>
+              <a:t>concat</a:t>
+            </a:r>
+            <a:endParaRPr lang="en-US" sz="1000"/>
+          </a:p>
+        </p:txBody>
+      </p:sp>
+      <p:sp>
+        <p:nvSpPr>
+          <p:cNvPr id="30" name="Text Box 29"/>
+          <p:cNvSpPr txBox="1"/>
+          <p:nvPr>
+            <p:custDataLst>
+              <p:tags r:id="rId13"/>
+            </p:custDataLst>
+          </p:nvPr>
+        </p:nvSpPr>
+        <p:spPr>
+          <a:xfrm>
+            <a:off x="1590675" y="4301490"/>
+            <a:ext cx="1725295" cy="1886585"/>
+          </a:xfrm>
+          <a:prstGeom prst="rect">
+            <a:avLst/>
+          </a:prstGeom>
+        </p:spPr>
+        <p:txBody>
+          <a:bodyPr wrap="square">
+            <a:spAutoFit/>
+          </a:bodyPr>
+          <a:p>
+            <a:pPr>
+              <a:lnSpc>
+                <a:spcPts val="2000"/>
+              </a:lnSpc>
+            </a:pPr>
+            <a:r>
+              <a:rPr lang="en-US" altLang="zh-CN" sz="1200" b="0">
+                <a:solidFill>
+                  <a:schemeClr val="tx1"/>
+                </a:solidFill>
+                <a:latin typeface="Menlo" panose="020B0609030804020204"/>
+                <a:ea typeface="Menlo" panose="020B0609030804020204"/>
+              </a:rPr>
+              <a:t>...   ...</a:t>
+            </a:r>
+            <a:endParaRPr lang="en-US" altLang="zh-CN" sz="1200" b="0">
+              <a:solidFill>
+                <a:schemeClr val="tx1"/>
+              </a:solidFill>
+              <a:latin typeface="Menlo" panose="020B0609030804020204"/>
+              <a:ea typeface="Menlo" panose="020B0609030804020204"/>
+            </a:endParaRPr>
+          </a:p>
+          <a:p>
+            <a:pPr>
+              <a:lnSpc>
+                <a:spcPts val="2000"/>
+              </a:lnSpc>
+            </a:pPr>
+            <a:r>
+              <a:rPr lang="en-US" altLang="zh-CN" sz="1200" b="0">
+                <a:solidFill>
+                  <a:schemeClr val="tx1"/>
+                </a:solidFill>
+                <a:latin typeface="Menlo" panose="020B0609030804020204"/>
+                <a:ea typeface="Menlo" panose="020B0609030804020204"/>
+              </a:rPr>
+              <a:t>----- -----</a:t>
+            </a:r>
+            <a:endParaRPr lang="en-US" altLang="zh-CN" sz="1200" b="0">
+              <a:solidFill>
+                <a:schemeClr val="tx1"/>
+              </a:solidFill>
+              <a:latin typeface="Menlo" panose="020B0609030804020204"/>
+              <a:ea typeface="Menlo" panose="020B0609030804020204"/>
+            </a:endParaRPr>
+          </a:p>
+          <a:p>
+            <a:pPr>
+              <a:lnSpc>
+                <a:spcPts val="2000"/>
+              </a:lnSpc>
+            </a:pPr>
+            <a:r>
+              <a:rPr lang="en-US" altLang="zh-CN" sz="1200" b="0">
+                <a:solidFill>
+                  <a:schemeClr val="tx1"/>
+                </a:solidFill>
+                <a:latin typeface="Menlo" panose="020B0609030804020204"/>
+                <a:ea typeface="Menlo" panose="020B0609030804020204"/>
+              </a:rPr>
+              <a:t>  x y   c d</a:t>
+            </a:r>
+            <a:endParaRPr lang="en-US" altLang="zh-CN" sz="1200" b="0">
+              <a:solidFill>
+                <a:schemeClr val="tx1"/>
+              </a:solidFill>
+              <a:latin typeface="Menlo" panose="020B0609030804020204"/>
+              <a:ea typeface="Menlo" panose="020B0609030804020204"/>
+            </a:endParaRPr>
+          </a:p>
+          <a:p>
+            <a:pPr>
+              <a:lnSpc>
+                <a:spcPts val="2000"/>
+              </a:lnSpc>
+            </a:pPr>
+            <a:r>
+              <a:rPr lang="en-US" altLang="zh-CN" sz="1200" b="0">
+                <a:solidFill>
+                  <a:schemeClr val="tx1"/>
+                </a:solidFill>
+                <a:latin typeface="Menlo" panose="020B0609030804020204"/>
+                <a:ea typeface="Menlo" panose="020B0609030804020204"/>
+              </a:rPr>
+              <a:t>a 7 6 a 5 3</a:t>
+            </a:r>
+            <a:endParaRPr lang="en-US" altLang="zh-CN" sz="1200" b="0">
+              <a:solidFill>
+                <a:schemeClr val="tx1"/>
+              </a:solidFill>
+              <a:latin typeface="Menlo" panose="020B0609030804020204"/>
+              <a:ea typeface="Menlo" panose="020B0609030804020204"/>
+            </a:endParaRPr>
+          </a:p>
+          <a:p>
+            <a:pPr>
+              <a:lnSpc>
+                <a:spcPts val="2000"/>
+              </a:lnSpc>
+            </a:pPr>
+            <a:r>
+              <a:rPr lang="en-US" altLang="zh-CN" sz="1200" b="0">
+                <a:solidFill>
+                  <a:schemeClr val="tx1"/>
+                </a:solidFill>
+                <a:latin typeface="Menlo" panose="020B0609030804020204"/>
+                <a:ea typeface="Menlo" panose="020B0609030804020204"/>
+              </a:rPr>
+              <a:t>b 1 2 b 1 2</a:t>
+            </a:r>
+            <a:endParaRPr lang="en-US" altLang="zh-CN" sz="1200" b="0">
+              <a:solidFill>
+                <a:schemeClr val="tx1"/>
+              </a:solidFill>
+              <a:latin typeface="Menlo" panose="020B0609030804020204"/>
+              <a:ea typeface="Menlo" panose="020B0609030804020204"/>
+            </a:endParaRPr>
+          </a:p>
+          <a:p>
+            <a:pPr>
+              <a:lnSpc>
+                <a:spcPts val="2000"/>
+              </a:lnSpc>
+            </a:pPr>
+            <a:r>
+              <a:rPr lang="en-US" altLang="zh-CN" sz="1200" b="0">
+                <a:solidFill>
+                  <a:schemeClr val="tx1"/>
+                </a:solidFill>
+                <a:latin typeface="Menlo" panose="020B0609030804020204"/>
+                <a:ea typeface="Menlo" panose="020B0609030804020204"/>
+              </a:rPr>
+              <a:t>c 3 6 c 8 9</a:t>
+            </a:r>
+            <a:endParaRPr lang="en-US" altLang="zh-CN" sz="1200" b="0">
+              <a:solidFill>
+                <a:schemeClr val="tx1"/>
+              </a:solidFill>
+              <a:latin typeface="Menlo" panose="020B0609030804020204"/>
+              <a:ea typeface="Menlo" panose="020B0609030804020204"/>
+            </a:endParaRPr>
+          </a:p>
+          <a:p>
+            <a:pPr>
+              <a:lnSpc>
+                <a:spcPts val="2000"/>
+              </a:lnSpc>
+            </a:pPr>
+            <a:r>
+              <a:rPr lang="en-US" altLang="zh-CN" sz="1200" b="0">
+                <a:solidFill>
+                  <a:schemeClr val="tx1"/>
+                </a:solidFill>
+                <a:latin typeface="Menlo" panose="020B0609030804020204"/>
+                <a:ea typeface="Menlo" panose="020B0609030804020204"/>
+              </a:rPr>
+              <a:t>d 3 5 d 8 7</a:t>
+            </a:r>
+            <a:endParaRPr lang="en-US" altLang="zh-CN" sz="1200" b="0">
+              <a:solidFill>
+                <a:schemeClr val="tx1"/>
+              </a:solidFill>
+              <a:latin typeface="Menlo" panose="020B0609030804020204"/>
+              <a:ea typeface="Menlo" panose="020B0609030804020204"/>
+            </a:endParaRPr>
+          </a:p>
+        </p:txBody>
+      </p:sp>
+      <p:sp>
+        <p:nvSpPr>
+          <p:cNvPr id="32" name="Text Box 31"/>
+          <p:cNvSpPr txBox="1"/>
+          <p:nvPr>
+            <p:custDataLst>
+              <p:tags r:id="rId14"/>
+            </p:custDataLst>
+          </p:nvPr>
+        </p:nvSpPr>
+        <p:spPr>
+          <a:xfrm>
+            <a:off x="1043305" y="5309235"/>
+            <a:ext cx="669290" cy="368300"/>
+          </a:xfrm>
+          <a:prstGeom prst="rect">
+            <a:avLst/>
+          </a:prstGeom>
+          <a:noFill/>
+        </p:spPr>
+        <p:txBody>
+          <a:bodyPr wrap="square" rtlCol="0">
+            <a:spAutoFit/>
+          </a:bodyPr>
+          <a:p>
+            <a:r>
+              <a:rPr lang="en-US"/>
+              <a:t>mf  =</a:t>
+            </a:r>
+            <a:endParaRPr lang="en-US"/>
+          </a:p>
+        </p:txBody>
+      </p:sp>
+      <p:cxnSp>
+        <p:nvCxnSpPr>
+          <p:cNvPr id="33" name="Straight Arrow Connector 32"/>
+          <p:cNvCxnSpPr/>
+          <p:nvPr>
+            <p:custDataLst>
+              <p:tags r:id="rId15"/>
+            </p:custDataLst>
+          </p:nvPr>
+        </p:nvCxnSpPr>
+        <p:spPr>
+          <a:xfrm>
+            <a:off x="2983230" y="5493385"/>
+            <a:ext cx="1597660" cy="0"/>
+          </a:xfrm>
+          <a:prstGeom prst="straightConnector1">
+            <a:avLst/>
+          </a:prstGeom>
+          <a:ln>
+            <a:tailEnd type="arrow"/>
+          </a:ln>
+        </p:spPr>
+        <p:style>
+          <a:lnRef idx="2">
+            <a:schemeClr val="accent1"/>
+          </a:lnRef>
+          <a:fillRef idx="0">
+            <a:srgbClr val="FFFFFF"/>
+          </a:fillRef>
+          <a:effectRef idx="0">
+            <a:srgbClr val="FFFFFF"/>
+          </a:effectRef>
+          <a:fontRef idx="minor">
+            <a:schemeClr val="tx1"/>
+          </a:fontRef>
+        </p:style>
+      </p:cxnSp>
+      <p:sp>
+        <p:nvSpPr>
+          <p:cNvPr id="34" name="Text Box 33"/>
+          <p:cNvSpPr txBox="1"/>
+          <p:nvPr>
+            <p:custDataLst>
+              <p:tags r:id="rId16"/>
+            </p:custDataLst>
+          </p:nvPr>
+        </p:nvSpPr>
+        <p:spPr>
+          <a:xfrm>
+            <a:off x="3172460" y="5204460"/>
+            <a:ext cx="1442720" cy="275590"/>
+          </a:xfrm>
+          <a:prstGeom prst="rect">
+            <a:avLst/>
+          </a:prstGeom>
+          <a:noFill/>
+        </p:spPr>
+        <p:txBody>
+          <a:bodyPr wrap="square" rtlCol="0">
+            <a:spAutoFit/>
+          </a:bodyPr>
+          <a:p>
+            <a:r>
+              <a:rPr lang="en-US" sz="1200"/>
+              <a:t>mf.mloc[[[7,3],6]]</a:t>
+            </a:r>
+            <a:endParaRPr lang="en-US" sz="1200"/>
+          </a:p>
+        </p:txBody>
+      </p:sp>
+      <p:sp>
+        <p:nvSpPr>
+          <p:cNvPr id="35" name="Text Box 34"/>
+          <p:cNvSpPr txBox="1"/>
+          <p:nvPr>
+            <p:custDataLst>
+              <p:tags r:id="rId17"/>
+            </p:custDataLst>
+          </p:nvPr>
+        </p:nvSpPr>
+        <p:spPr>
+          <a:xfrm>
+            <a:off x="4776470" y="4464685"/>
+            <a:ext cx="1725295" cy="1630045"/>
+          </a:xfrm>
+          <a:prstGeom prst="rect">
+            <a:avLst/>
+          </a:prstGeom>
+        </p:spPr>
+        <p:txBody>
+          <a:bodyPr wrap="square">
+            <a:spAutoFit/>
+          </a:bodyPr>
+          <a:p>
+            <a:pPr>
+              <a:lnSpc>
+                <a:spcPts val="2000"/>
+              </a:lnSpc>
+            </a:pPr>
+            <a:r>
+              <a:rPr lang="en-US" altLang="zh-CN" sz="1200" b="0">
+                <a:solidFill>
+                  <a:schemeClr val="tx1"/>
+                </a:solidFill>
+                <a:latin typeface="Menlo" panose="020B0609030804020204"/>
+                <a:ea typeface="Menlo" panose="020B0609030804020204"/>
+              </a:rPr>
+              <a:t>...   ...</a:t>
+            </a:r>
+            <a:endParaRPr lang="en-US" altLang="zh-CN" sz="1200" b="0">
+              <a:solidFill>
+                <a:schemeClr val="tx1"/>
+              </a:solidFill>
+              <a:latin typeface="Menlo" panose="020B0609030804020204"/>
+              <a:ea typeface="Menlo" panose="020B0609030804020204"/>
+            </a:endParaRPr>
+          </a:p>
+          <a:p>
+            <a:pPr>
+              <a:lnSpc>
+                <a:spcPts val="2000"/>
+              </a:lnSpc>
+            </a:pPr>
+            <a:r>
+              <a:rPr lang="en-US" altLang="zh-CN" sz="1200" b="0">
+                <a:solidFill>
+                  <a:schemeClr val="tx1"/>
+                </a:solidFill>
+                <a:latin typeface="Menlo" panose="020B0609030804020204"/>
+                <a:ea typeface="Menlo" panose="020B0609030804020204"/>
+              </a:rPr>
+              <a:t>----- -----</a:t>
+            </a:r>
+            <a:endParaRPr lang="en-US" altLang="zh-CN" sz="1200" b="0">
+              <a:solidFill>
+                <a:schemeClr val="tx1"/>
+              </a:solidFill>
+              <a:latin typeface="Menlo" panose="020B0609030804020204"/>
+              <a:ea typeface="Menlo" panose="020B0609030804020204"/>
+            </a:endParaRPr>
+          </a:p>
+          <a:p>
+            <a:pPr>
+              <a:lnSpc>
+                <a:spcPts val="2000"/>
+              </a:lnSpc>
+            </a:pPr>
+            <a:r>
+              <a:rPr lang="en-US" altLang="zh-CN" sz="1200" b="0">
+                <a:solidFill>
+                  <a:schemeClr val="tx1"/>
+                </a:solidFill>
+                <a:latin typeface="Menlo" panose="020B0609030804020204"/>
+                <a:ea typeface="Menlo" panose="020B0609030804020204"/>
+              </a:rPr>
+              <a:t>  x y   c d</a:t>
+            </a:r>
+            <a:endParaRPr lang="en-US" altLang="zh-CN" sz="1200" b="0">
+              <a:solidFill>
+                <a:schemeClr val="tx1"/>
+              </a:solidFill>
+              <a:latin typeface="Menlo" panose="020B0609030804020204"/>
+              <a:ea typeface="Menlo" panose="020B0609030804020204"/>
+            </a:endParaRPr>
+          </a:p>
+          <a:p>
+            <a:pPr>
+              <a:lnSpc>
+                <a:spcPts val="2000"/>
+              </a:lnSpc>
+            </a:pPr>
+            <a:r>
+              <a:rPr lang="en-US" altLang="zh-CN" sz="1200" b="0">
+                <a:solidFill>
+                  <a:schemeClr val="tx1"/>
+                </a:solidFill>
+                <a:latin typeface="Menlo" panose="020B0609030804020204"/>
+                <a:ea typeface="Menlo" panose="020B0609030804020204"/>
+              </a:rPr>
+              <a:t>a 7 6 a 5 3</a:t>
+            </a:r>
+            <a:endParaRPr lang="en-US" altLang="zh-CN" sz="1200" b="0">
+              <a:solidFill>
+                <a:schemeClr val="tx1"/>
+              </a:solidFill>
+              <a:latin typeface="Menlo" panose="020B0609030804020204"/>
+              <a:ea typeface="Menlo" panose="020B0609030804020204"/>
+            </a:endParaRPr>
+          </a:p>
+          <a:p>
+            <a:pPr>
+              <a:lnSpc>
+                <a:spcPts val="2000"/>
+              </a:lnSpc>
+            </a:pPr>
+            <a:r>
+              <a:rPr lang="en-US" altLang="zh-CN" sz="1200" b="0">
+                <a:solidFill>
+                  <a:schemeClr val="tx1"/>
+                </a:solidFill>
+                <a:latin typeface="Menlo" panose="020B0609030804020204"/>
+                <a:ea typeface="Menlo" panose="020B0609030804020204"/>
+              </a:rPr>
+              <a:t>c 3 6 c 8 9</a:t>
+            </a:r>
+            <a:endParaRPr lang="en-US" altLang="zh-CN" sz="1200" b="0">
+              <a:solidFill>
+                <a:schemeClr val="tx1"/>
+              </a:solidFill>
+              <a:latin typeface="Menlo" panose="020B0609030804020204"/>
+              <a:ea typeface="Menlo" panose="020B0609030804020204"/>
+            </a:endParaRPr>
+          </a:p>
+          <a:p>
+            <a:pPr>
+              <a:lnSpc>
+                <a:spcPts val="2000"/>
+              </a:lnSpc>
+            </a:pPr>
+            <a:r>
+              <a:rPr lang="en-US" altLang="zh-CN" sz="1200">
+                <a:latin typeface="Menlo" panose="020B0609030804020204"/>
+                <a:ea typeface="Menlo" panose="020B0609030804020204"/>
+                <a:sym typeface="+mn-ea"/>
+              </a:rPr>
+              <a:t>d 3 5 d 8 7</a:t>
+            </a:r>
+            <a:endParaRPr lang="en-US" altLang="zh-CN" sz="1200" b="0">
+              <a:solidFill>
+                <a:schemeClr val="tx1"/>
+              </a:solidFill>
+              <a:latin typeface="Menlo" panose="020B0609030804020204"/>
+              <a:ea typeface="Menlo" panose="020B0609030804020204"/>
+            </a:endParaRPr>
+          </a:p>
+        </p:txBody>
+      </p:sp>
+      <p:sp>
+        <p:nvSpPr>
+          <p:cNvPr id="36" name="Text Box 35"/>
+          <p:cNvSpPr txBox="1"/>
+          <p:nvPr>
+            <p:custDataLst>
+              <p:tags r:id="rId18"/>
+            </p:custDataLst>
+          </p:nvPr>
+        </p:nvSpPr>
+        <p:spPr>
+          <a:xfrm>
+            <a:off x="6322060" y="5190490"/>
+            <a:ext cx="1442720" cy="275590"/>
+          </a:xfrm>
+          <a:prstGeom prst="rect">
+            <a:avLst/>
+          </a:prstGeom>
+          <a:noFill/>
+        </p:spPr>
+        <p:txBody>
+          <a:bodyPr wrap="square" rtlCol="0">
+            <a:spAutoFit/>
+          </a:bodyPr>
+          <a:p>
+            <a:r>
+              <a:rPr lang="en-US" sz="1200"/>
+              <a:t>mf.mloc[[[7,3],6]]</a:t>
+            </a:r>
+            <a:endParaRPr lang="en-US" sz="1200"/>
+          </a:p>
+        </p:txBody>
+      </p:sp>
+      <p:cxnSp>
+        <p:nvCxnSpPr>
+          <p:cNvPr id="37" name="Straight Arrow Connector 36"/>
+          <p:cNvCxnSpPr/>
+          <p:nvPr>
+            <p:custDataLst>
+              <p:tags r:id="rId19"/>
+            </p:custDataLst>
+          </p:nvPr>
+        </p:nvCxnSpPr>
+        <p:spPr>
+          <a:xfrm>
+            <a:off x="6189980" y="5474335"/>
+            <a:ext cx="1597660" cy="0"/>
+          </a:xfrm>
+          <a:prstGeom prst="straightConnector1">
+            <a:avLst/>
+          </a:prstGeom>
+          <a:ln>
+            <a:tailEnd type="arrow"/>
+          </a:ln>
+        </p:spPr>
+        <p:style>
+          <a:lnRef idx="2">
+            <a:schemeClr val="accent1"/>
+          </a:lnRef>
+          <a:fillRef idx="0">
+            <a:srgbClr val="FFFFFF"/>
+          </a:fillRef>
+          <a:effectRef idx="0">
+            <a:srgbClr val="FFFFFF"/>
+          </a:effectRef>
+          <a:fontRef idx="minor">
+            <a:schemeClr val="tx1"/>
+          </a:fontRef>
+        </p:style>
+      </p:cxnSp>
+      <p:sp>
+        <p:nvSpPr>
+          <p:cNvPr id="38" name="Text Box 37"/>
+          <p:cNvSpPr txBox="1"/>
+          <p:nvPr>
+            <p:custDataLst>
+              <p:tags r:id="rId20"/>
+            </p:custDataLst>
+          </p:nvPr>
+        </p:nvSpPr>
+        <p:spPr>
+          <a:xfrm>
+            <a:off x="7962265" y="4569460"/>
+            <a:ext cx="1725295" cy="1630045"/>
+          </a:xfrm>
+          <a:prstGeom prst="rect">
+            <a:avLst/>
+          </a:prstGeom>
+        </p:spPr>
+        <p:txBody>
+          <a:bodyPr wrap="square">
+            <a:spAutoFit/>
+          </a:bodyPr>
+          <a:p>
+            <a:pPr>
+              <a:lnSpc>
+                <a:spcPts val="2000"/>
+              </a:lnSpc>
+            </a:pPr>
+            <a:r>
+              <a:rPr lang="en-US" altLang="zh-CN" sz="1200" b="0">
+                <a:solidFill>
+                  <a:schemeClr val="tx1"/>
+                </a:solidFill>
+                <a:latin typeface="Menlo" panose="020B0609030804020204"/>
+                <a:ea typeface="Menlo" panose="020B0609030804020204"/>
+              </a:rPr>
+              <a:t>...   ...</a:t>
+            </a:r>
+            <a:endParaRPr lang="en-US" altLang="zh-CN" sz="1200" b="0">
+              <a:solidFill>
+                <a:schemeClr val="tx1"/>
+              </a:solidFill>
+              <a:latin typeface="Menlo" panose="020B0609030804020204"/>
+              <a:ea typeface="Menlo" panose="020B0609030804020204"/>
+            </a:endParaRPr>
+          </a:p>
+          <a:p>
+            <a:pPr>
+              <a:lnSpc>
+                <a:spcPts val="2000"/>
+              </a:lnSpc>
+            </a:pPr>
+            <a:r>
+              <a:rPr lang="en-US" altLang="zh-CN" sz="1200" b="0">
+                <a:solidFill>
+                  <a:schemeClr val="tx1"/>
+                </a:solidFill>
+                <a:latin typeface="Menlo" panose="020B0609030804020204"/>
+                <a:ea typeface="Menlo" panose="020B0609030804020204"/>
+              </a:rPr>
+              <a:t>----- -----</a:t>
+            </a:r>
+            <a:endParaRPr lang="en-US" altLang="zh-CN" sz="1200" b="0">
+              <a:solidFill>
+                <a:schemeClr val="tx1"/>
+              </a:solidFill>
+              <a:latin typeface="Menlo" panose="020B0609030804020204"/>
+              <a:ea typeface="Menlo" panose="020B0609030804020204"/>
+            </a:endParaRPr>
+          </a:p>
+          <a:p>
+            <a:pPr>
+              <a:lnSpc>
+                <a:spcPts val="2000"/>
+              </a:lnSpc>
+            </a:pPr>
+            <a:r>
+              <a:rPr lang="en-US" altLang="zh-CN" sz="1200" b="0">
+                <a:solidFill>
+                  <a:schemeClr val="tx1"/>
+                </a:solidFill>
+                <a:latin typeface="Menlo" panose="020B0609030804020204"/>
+                <a:ea typeface="Menlo" panose="020B0609030804020204"/>
+              </a:rPr>
+              <a:t>  x y   c d</a:t>
+            </a:r>
+            <a:endParaRPr lang="en-US" altLang="zh-CN" sz="1200" b="0">
+              <a:solidFill>
+                <a:schemeClr val="tx1"/>
+              </a:solidFill>
+              <a:latin typeface="Menlo" panose="020B0609030804020204"/>
+              <a:ea typeface="Menlo" panose="020B0609030804020204"/>
+            </a:endParaRPr>
+          </a:p>
+          <a:p>
+            <a:pPr>
+              <a:lnSpc>
+                <a:spcPts val="2000"/>
+              </a:lnSpc>
+            </a:pPr>
+            <a:r>
+              <a:rPr lang="en-US" altLang="zh-CN" sz="1200" b="0">
+                <a:solidFill>
+                  <a:schemeClr val="tx1"/>
+                </a:solidFill>
+                <a:latin typeface="Menlo" panose="020B0609030804020204"/>
+                <a:ea typeface="Menlo" panose="020B0609030804020204"/>
+              </a:rPr>
+              <a:t>a 7 6 a 5 3</a:t>
+            </a:r>
+            <a:endParaRPr lang="en-US" altLang="zh-CN" sz="1200" b="0">
+              <a:solidFill>
+                <a:schemeClr val="tx1"/>
+              </a:solidFill>
+              <a:latin typeface="Menlo" panose="020B0609030804020204"/>
+              <a:ea typeface="Menlo" panose="020B0609030804020204"/>
+            </a:endParaRPr>
+          </a:p>
+          <a:p>
+            <a:pPr>
+              <a:lnSpc>
+                <a:spcPts val="2000"/>
+              </a:lnSpc>
+            </a:pPr>
+            <a:r>
+              <a:rPr lang="en-US" altLang="zh-CN" sz="1200" b="0">
+                <a:solidFill>
+                  <a:schemeClr val="tx1"/>
+                </a:solidFill>
+                <a:latin typeface="Menlo" panose="020B0609030804020204"/>
+                <a:ea typeface="Menlo" panose="020B0609030804020204"/>
+              </a:rPr>
+              <a:t>c 3 6 c 8 9</a:t>
+            </a:r>
+            <a:endParaRPr lang="en-US" altLang="zh-CN" sz="1200" b="0">
+              <a:solidFill>
+                <a:schemeClr val="tx1"/>
+              </a:solidFill>
+              <a:latin typeface="Menlo" panose="020B0609030804020204"/>
+              <a:ea typeface="Menlo" panose="020B0609030804020204"/>
+            </a:endParaRPr>
+          </a:p>
+          <a:p>
+            <a:pPr>
+              <a:lnSpc>
+                <a:spcPts val="2000"/>
+              </a:lnSpc>
+            </a:pPr>
+            <a:endParaRPr lang="en-US" altLang="zh-CN" sz="1200" b="0">
+              <a:solidFill>
+                <a:schemeClr val="tx1"/>
+              </a:solidFill>
+              <a:latin typeface="Menlo" panose="020B0609030804020204"/>
+              <a:ea typeface="Menlo" panose="020B0609030804020204"/>
+            </a:endParaRPr>
+          </a:p>
+        </p:txBody>
+      </p:sp>
+      <p:sp>
+        <p:nvSpPr>
+          <p:cNvPr id="39" name="Rectangles 38"/>
+          <p:cNvSpPr/>
+          <p:nvPr>
+            <p:custDataLst>
+              <p:tags r:id="rId21"/>
+            </p:custDataLst>
+          </p:nvPr>
+        </p:nvSpPr>
+        <p:spPr>
+          <a:xfrm>
+            <a:off x="3851910" y="5204460"/>
+            <a:ext cx="292735" cy="271145"/>
+          </a:xfrm>
+          <a:prstGeom prst="rect">
+            <a:avLst/>
+          </a:prstGeom>
+          <a:noFill/>
+          <a:ln w="19050">
+            <a:solidFill>
+              <a:srgbClr val="C00000"/>
+            </a:solidFill>
+          </a:ln>
+          <a:extLst>
+            <a:ext uri="{909E8E84-426E-40DD-AFC4-6F175D3DCCD1}">
+              <a14:hiddenFill xmlns:a14="http://schemas.microsoft.com/office/drawing/2010/main">
+                <a:solidFill>
+                  <a:schemeClr val="accent1"/>
+                </a:solidFill>
+              </a14:hiddenFill>
+            </a:ext>
+          </a:extLst>
+        </p:spPr>
+        <p:style>
+          <a:lnRef idx="2">
+            <a:schemeClr val="accent1">
+              <a:lumMod val="75000"/>
+            </a:schemeClr>
+          </a:lnRef>
+          <a:fillRef idx="1">
+            <a:schemeClr val="accent1"/>
+          </a:fillRef>
+          <a:effectRef idx="0">
+            <a:srgbClr val="FFFFFF"/>
+          </a:effectRef>
+          <a:fontRef idx="minor">
+            <a:schemeClr val="lt1"/>
+          </a:fontRef>
+        </p:style>
+        <p:txBody>
+          <a:bodyPr rtlCol="0" anchor="ctr"/>
+          <a:p>
+            <a:pPr algn="ctr"/>
+            <a:endParaRPr lang="en-US"/>
+          </a:p>
+        </p:txBody>
+      </p:sp>
+      <p:sp>
+        <p:nvSpPr>
+          <p:cNvPr id="41" name="Rectangles 40"/>
+          <p:cNvSpPr/>
+          <p:nvPr>
+            <p:custDataLst>
+              <p:tags r:id="rId22"/>
+            </p:custDataLst>
+          </p:nvPr>
+        </p:nvSpPr>
+        <p:spPr>
+          <a:xfrm>
+            <a:off x="7305040" y="5180965"/>
+            <a:ext cx="137795" cy="271145"/>
+          </a:xfrm>
+          <a:prstGeom prst="rect">
+            <a:avLst/>
+          </a:prstGeom>
+          <a:noFill/>
+          <a:ln w="19050">
+            <a:solidFill>
+              <a:srgbClr val="C00000"/>
+            </a:solidFill>
+          </a:ln>
+          <a:extLst>
+            <a:ext uri="{909E8E84-426E-40DD-AFC4-6F175D3DCCD1}">
+              <a14:hiddenFill xmlns:a14="http://schemas.microsoft.com/office/drawing/2010/main">
+                <a:solidFill>
+                  <a:schemeClr val="accent1"/>
+                </a:solidFill>
+              </a14:hiddenFill>
+            </a:ext>
+          </a:extLst>
+        </p:spPr>
+        <p:style>
+          <a:lnRef idx="2">
+            <a:schemeClr val="accent1">
+              <a:lumMod val="75000"/>
+            </a:schemeClr>
+          </a:lnRef>
+          <a:fillRef idx="1">
+            <a:schemeClr val="accent1"/>
+          </a:fillRef>
+          <a:effectRef idx="0">
+            <a:srgbClr val="FFFFFF"/>
+          </a:effectRef>
+          <a:fontRef idx="minor">
+            <a:schemeClr val="lt1"/>
+          </a:fontRef>
+        </p:style>
+        <p:txBody>
+          <a:bodyPr rtlCol="0" anchor="ctr"/>
+          <a:p>
+            <a:pPr algn="ctr"/>
+            <a:endParaRPr lang="en-US"/>
+          </a:p>
+        </p:txBody>
+      </p:sp>
+      <p:sp>
+        <p:nvSpPr>
+          <p:cNvPr id="43" name="Text Box 42"/>
+          <p:cNvSpPr txBox="1"/>
+          <p:nvPr/>
+        </p:nvSpPr>
+        <p:spPr>
+          <a:xfrm>
+            <a:off x="237490" y="795020"/>
+            <a:ext cx="1475105" cy="368300"/>
+          </a:xfrm>
+          <a:prstGeom prst="rect">
+            <a:avLst/>
+          </a:prstGeom>
+          <a:noFill/>
+        </p:spPr>
+        <p:txBody>
+          <a:bodyPr wrap="square" rtlCol="0">
+            <a:spAutoFit/>
+          </a:bodyPr>
+          <a:p>
+            <a:r>
+              <a:rPr lang="en-US"/>
+              <a:t>Example 1</a:t>
+            </a:r>
+            <a:endParaRPr lang="en-US"/>
+          </a:p>
+        </p:txBody>
+      </p:sp>
+      <p:sp>
+        <p:nvSpPr>
+          <p:cNvPr id="44" name="Text Box 43"/>
+          <p:cNvSpPr txBox="1"/>
+          <p:nvPr>
+            <p:custDataLst>
+              <p:tags r:id="rId23"/>
+            </p:custDataLst>
+          </p:nvPr>
+        </p:nvSpPr>
+        <p:spPr>
+          <a:xfrm>
+            <a:off x="348615" y="1417955"/>
+            <a:ext cx="1475105" cy="337185"/>
+          </a:xfrm>
+          <a:prstGeom prst="rect">
+            <a:avLst/>
+          </a:prstGeom>
+          <a:noFill/>
+        </p:spPr>
+        <p:txBody>
+          <a:bodyPr wrap="square" rtlCol="0">
+            <a:spAutoFit/>
+          </a:bodyPr>
+          <a:p>
+            <a:r>
+              <a:rPr lang="en-US" sz="1600" i="1">
+                <a:latin typeface="Calibri Italic" panose="020F0702030404030204" charset="0"/>
+                <a:cs typeface="Calibri Italic" panose="020F0702030404030204" charset="0"/>
+              </a:rPr>
+              <a:t>Pandas</a:t>
+            </a:r>
+            <a:endParaRPr lang="en-US" sz="1600" i="1">
+              <a:latin typeface="Calibri Italic" panose="020F0702030404030204" charset="0"/>
+              <a:cs typeface="Calibri Italic" panose="020F0702030404030204" charset="0"/>
+            </a:endParaRPr>
+          </a:p>
+        </p:txBody>
+      </p:sp>
+      <p:sp>
+        <p:nvSpPr>
+          <p:cNvPr id="45" name="Text Box 44"/>
+          <p:cNvSpPr txBox="1"/>
+          <p:nvPr>
+            <p:custDataLst>
+              <p:tags r:id="rId24"/>
+            </p:custDataLst>
+          </p:nvPr>
+        </p:nvSpPr>
+        <p:spPr>
+          <a:xfrm>
+            <a:off x="325120" y="3968115"/>
+            <a:ext cx="1725930" cy="337185"/>
+          </a:xfrm>
+          <a:prstGeom prst="rect">
+            <a:avLst/>
+          </a:prstGeom>
+          <a:noFill/>
+        </p:spPr>
+        <p:txBody>
+          <a:bodyPr wrap="square" rtlCol="0">
+            <a:spAutoFit/>
+          </a:bodyPr>
+          <a:p>
+            <a:r>
+              <a:rPr lang="en-US" sz="1600" i="1">
+                <a:latin typeface="Calibri Italic" panose="020F0702030404030204" charset="0"/>
+                <a:cs typeface="Calibri Italic" panose="020F0702030404030204" charset="0"/>
+              </a:rPr>
+              <a:t>MulDataFrame</a:t>
+            </a:r>
+            <a:endParaRPr lang="en-US" sz="1600" i="1">
+              <a:latin typeface="Calibri Italic" panose="020F0702030404030204" charset="0"/>
+              <a:cs typeface="Calibri Italic" panose="020F0702030404030204" charset="0"/>
+            </a:endParaRPr>
+          </a:p>
+        </p:txBody>
+      </p:sp>
+    </p:spTree>
+  </p:cSld>
+  <p:clrMapOvr>
+    <a:masterClrMapping/>
+  </p:clrMapOvr>
+</p:sld>
+</file>
+
+<file path=ppt/slides/slide3.xml><?xml version="1.0" encoding="utf-8"?>
+<p:sld xmlns:a="http://schemas.openxmlformats.org/drawingml/2006/main" xmlns:r="http://schemas.openxmlformats.org/officeDocument/2006/relationships" xmlns:p="http://schemas.openxmlformats.org/presentationml/2006/main">
+  <p:cSld>
+    <p:spTree>
+      <p:nvGrpSpPr>
+        <p:cNvPr id="1" name=""/>
+        <p:cNvGrpSpPr/>
+        <p:nvPr/>
+      </p:nvGrpSpPr>
+      <p:grpSpPr/>
+      <p:sp>
+        <p:nvSpPr>
+          <p:cNvPr id="2" name="Text Box 1"/>
+          <p:cNvSpPr txBox="1"/>
+          <p:nvPr>
+            <p:custDataLst>
+              <p:tags r:id="rId1"/>
+            </p:custDataLst>
+          </p:nvPr>
+        </p:nvSpPr>
+        <p:spPr>
+          <a:xfrm>
+            <a:off x="1518920" y="1610995"/>
+            <a:ext cx="1054735" cy="1373505"/>
+          </a:xfrm>
+          <a:prstGeom prst="rect">
+            <a:avLst/>
+          </a:prstGeom>
+        </p:spPr>
+        <p:txBody>
+          <a:bodyPr wrap="square">
+            <a:spAutoFit/>
+          </a:bodyPr>
+          <a:p>
+            <a:pPr>
+              <a:lnSpc>
+                <a:spcPts val="2000"/>
+              </a:lnSpc>
+            </a:pPr>
+            <a:r>
+              <a:rPr lang="en-US" altLang="zh-CN" sz="1200" b="0">
+                <a:solidFill>
+                  <a:srgbClr val="CCCCCC"/>
+                </a:solidFill>
+                <a:latin typeface="Menlo" panose="020B0609030804020204"/>
+                <a:ea typeface="Menlo" panose="020B0609030804020204"/>
+              </a:rPr>
+              <a:t>  </a:t>
+            </a:r>
+            <a:r>
+              <a:rPr lang="en-US" altLang="zh-CN" sz="1200" b="0">
+                <a:solidFill>
+                  <a:schemeClr val="tx1"/>
+                </a:solidFill>
+                <a:latin typeface="Menlo" panose="020B0609030804020204"/>
+                <a:ea typeface="Menlo" panose="020B0609030804020204"/>
+              </a:rPr>
+              <a:t>  c d</a:t>
+            </a:r>
+            <a:endParaRPr lang="en-US" altLang="zh-CN" sz="1200" b="0">
+              <a:solidFill>
+                <a:schemeClr val="tx1"/>
+              </a:solidFill>
+              <a:latin typeface="Menlo" panose="020B0609030804020204"/>
+              <a:ea typeface="Menlo" panose="020B0609030804020204"/>
+            </a:endParaRPr>
+          </a:p>
+          <a:p>
+            <a:pPr>
+              <a:lnSpc>
+                <a:spcPts val="2000"/>
+              </a:lnSpc>
+            </a:pPr>
+            <a:r>
+              <a:rPr lang="en-US" altLang="zh-CN" sz="1200" b="0">
+                <a:solidFill>
+                  <a:schemeClr val="tx1"/>
+                </a:solidFill>
+                <a:latin typeface="Menlo" panose="020B0609030804020204"/>
+                <a:ea typeface="Menlo" panose="020B0609030804020204"/>
+              </a:rPr>
+              <a:t>x y </a:t>
+            </a:r>
+            <a:endParaRPr lang="en-US" altLang="zh-CN" sz="1200" b="0">
+              <a:solidFill>
+                <a:schemeClr val="tx1"/>
+              </a:solidFill>
+              <a:latin typeface="Menlo" panose="020B0609030804020204"/>
+              <a:ea typeface="Menlo" panose="020B0609030804020204"/>
+            </a:endParaRPr>
+          </a:p>
+          <a:p>
+            <a:pPr>
+              <a:lnSpc>
+                <a:spcPts val="2000"/>
+              </a:lnSpc>
+            </a:pPr>
+            <a:r>
+              <a:rPr lang="en-US" altLang="zh-CN" sz="1200" b="0">
+                <a:solidFill>
+                  <a:schemeClr val="tx1"/>
+                </a:solidFill>
+                <a:latin typeface="Menlo" panose="020B0609030804020204"/>
+                <a:ea typeface="Menlo" panose="020B0609030804020204"/>
+              </a:rPr>
+              <a:t>1 2 1 2</a:t>
+            </a:r>
+            <a:endParaRPr lang="en-US" altLang="zh-CN" sz="1200" b="0">
+              <a:solidFill>
+                <a:schemeClr val="tx1"/>
+              </a:solidFill>
+              <a:latin typeface="Menlo" panose="020B0609030804020204"/>
+              <a:ea typeface="Menlo" panose="020B0609030804020204"/>
+            </a:endParaRPr>
+          </a:p>
+          <a:p>
+            <a:pPr>
+              <a:lnSpc>
+                <a:spcPts val="2000"/>
+              </a:lnSpc>
+            </a:pPr>
+            <a:r>
+              <a:rPr lang="en-US" altLang="zh-CN" sz="1200" b="0">
+                <a:solidFill>
+                  <a:schemeClr val="tx1"/>
+                </a:solidFill>
+                <a:latin typeface="Menlo" panose="020B0609030804020204"/>
+                <a:ea typeface="Menlo" panose="020B0609030804020204"/>
+              </a:rPr>
+              <a:t>3 6 8 9</a:t>
+            </a:r>
+            <a:endParaRPr lang="en-US" altLang="zh-CN" sz="1200" b="0">
+              <a:solidFill>
+                <a:schemeClr val="tx1"/>
+              </a:solidFill>
+              <a:latin typeface="Menlo" panose="020B0609030804020204"/>
+              <a:ea typeface="Menlo" panose="020B0609030804020204"/>
+            </a:endParaRPr>
+          </a:p>
+          <a:p>
+            <a:pPr>
+              <a:lnSpc>
+                <a:spcPts val="2000"/>
+              </a:lnSpc>
+            </a:pPr>
+            <a:r>
+              <a:rPr lang="en-US" altLang="zh-CN" sz="1200" b="0">
+                <a:solidFill>
+                  <a:schemeClr val="tx1"/>
+                </a:solidFill>
+                <a:latin typeface="Menlo" panose="020B0609030804020204"/>
+                <a:ea typeface="Menlo" panose="020B0609030804020204"/>
+              </a:rPr>
+              <a:t>3 5 8 7</a:t>
+            </a:r>
+            <a:endParaRPr lang="en-US" altLang="zh-CN" sz="1200" b="0">
+              <a:solidFill>
+                <a:schemeClr val="tx1"/>
+              </a:solidFill>
+              <a:latin typeface="Menlo" panose="020B0609030804020204"/>
+              <a:ea typeface="Menlo" panose="020B0609030804020204"/>
+            </a:endParaRPr>
+          </a:p>
+        </p:txBody>
+      </p:sp>
+      <p:sp>
+        <p:nvSpPr>
+          <p:cNvPr id="6" name="Text Box 5"/>
+          <p:cNvSpPr txBox="1"/>
+          <p:nvPr>
+            <p:custDataLst>
+              <p:tags r:id="rId2"/>
+            </p:custDataLst>
+          </p:nvPr>
+        </p:nvSpPr>
+        <p:spPr>
+          <a:xfrm>
+            <a:off x="3909060" y="1205865"/>
+            <a:ext cx="1054735" cy="860425"/>
+          </a:xfrm>
+          <a:prstGeom prst="rect">
+            <a:avLst/>
+          </a:prstGeom>
+        </p:spPr>
+        <p:txBody>
+          <a:bodyPr wrap="square">
+            <a:spAutoFit/>
+          </a:bodyPr>
+          <a:p>
+            <a:pPr>
+              <a:lnSpc>
+                <a:spcPts val="2000"/>
+              </a:lnSpc>
+            </a:pPr>
+            <a:r>
+              <a:rPr lang="en-US" altLang="zh-CN" sz="1200" b="0">
+                <a:solidFill>
+                  <a:srgbClr val="CCCCCC"/>
+                </a:solidFill>
+                <a:latin typeface="Menlo" panose="020B0609030804020204"/>
+                <a:ea typeface="Menlo" panose="020B0609030804020204"/>
+              </a:rPr>
+              <a:t>  </a:t>
+            </a:r>
+            <a:r>
+              <a:rPr lang="en-US" altLang="zh-CN" sz="1200" b="0">
+                <a:solidFill>
+                  <a:schemeClr val="tx1"/>
+                </a:solidFill>
+                <a:latin typeface="Menlo" panose="020B0609030804020204"/>
+                <a:ea typeface="Menlo" panose="020B0609030804020204"/>
+              </a:rPr>
+              <a:t>  c d</a:t>
+            </a:r>
+            <a:endParaRPr lang="en-US" altLang="zh-CN" sz="1200" b="0">
+              <a:solidFill>
+                <a:schemeClr val="tx1"/>
+              </a:solidFill>
+              <a:latin typeface="Menlo" panose="020B0609030804020204"/>
+              <a:ea typeface="Menlo" panose="020B0609030804020204"/>
+            </a:endParaRPr>
+          </a:p>
+          <a:p>
+            <a:pPr>
+              <a:lnSpc>
+                <a:spcPts val="2000"/>
+              </a:lnSpc>
+            </a:pPr>
+            <a:r>
+              <a:rPr lang="en-US" altLang="zh-CN" sz="1200" b="0">
+                <a:solidFill>
+                  <a:schemeClr val="tx1"/>
+                </a:solidFill>
+                <a:latin typeface="Menlo" panose="020B0609030804020204"/>
+                <a:ea typeface="Menlo" panose="020B0609030804020204"/>
+              </a:rPr>
+              <a:t>x y </a:t>
+            </a:r>
+            <a:endParaRPr lang="en-US" altLang="zh-CN" sz="1200" b="0">
+              <a:solidFill>
+                <a:schemeClr val="tx1"/>
+              </a:solidFill>
+              <a:latin typeface="Menlo" panose="020B0609030804020204"/>
+              <a:ea typeface="Menlo" panose="020B0609030804020204"/>
+            </a:endParaRPr>
+          </a:p>
+          <a:p>
+            <a:pPr>
+              <a:lnSpc>
+                <a:spcPts val="2000"/>
+              </a:lnSpc>
+            </a:pPr>
+            <a:r>
+              <a:rPr lang="en-US" altLang="zh-CN" sz="1200" b="0">
+                <a:solidFill>
+                  <a:schemeClr val="tx1"/>
+                </a:solidFill>
+                <a:latin typeface="Menlo" panose="020B0609030804020204"/>
+                <a:ea typeface="Menlo" panose="020B0609030804020204"/>
+              </a:rPr>
+              <a:t>1 2 1 2</a:t>
+            </a:r>
+            <a:endParaRPr lang="en-US" altLang="zh-CN" sz="1200" b="0">
+              <a:solidFill>
+                <a:schemeClr val="tx1"/>
+              </a:solidFill>
+              <a:latin typeface="Menlo" panose="020B0609030804020204"/>
+              <a:ea typeface="Menlo" panose="020B0609030804020204"/>
+            </a:endParaRPr>
+          </a:p>
+        </p:txBody>
+      </p:sp>
+      <p:sp>
+        <p:nvSpPr>
+          <p:cNvPr id="3" name="Text Box 2"/>
+          <p:cNvSpPr txBox="1"/>
+          <p:nvPr>
+            <p:custDataLst>
+              <p:tags r:id="rId3"/>
+            </p:custDataLst>
+          </p:nvPr>
+        </p:nvSpPr>
+        <p:spPr>
+          <a:xfrm>
+            <a:off x="3909060" y="2452370"/>
+            <a:ext cx="1054735" cy="1116965"/>
+          </a:xfrm>
+          <a:prstGeom prst="rect">
+            <a:avLst/>
+          </a:prstGeom>
+        </p:spPr>
+        <p:txBody>
+          <a:bodyPr wrap="square">
+            <a:spAutoFit/>
+          </a:bodyPr>
+          <a:p>
+            <a:pPr>
+              <a:lnSpc>
+                <a:spcPts val="2000"/>
+              </a:lnSpc>
+            </a:pPr>
+            <a:r>
+              <a:rPr lang="en-US" altLang="zh-CN" sz="1200" b="0">
+                <a:solidFill>
+                  <a:srgbClr val="CCCCCC"/>
+                </a:solidFill>
+                <a:latin typeface="Menlo" panose="020B0609030804020204"/>
+                <a:ea typeface="Menlo" panose="020B0609030804020204"/>
+              </a:rPr>
+              <a:t>  </a:t>
+            </a:r>
+            <a:r>
+              <a:rPr lang="en-US" altLang="zh-CN" sz="1200" b="0">
+                <a:solidFill>
+                  <a:schemeClr val="tx1"/>
+                </a:solidFill>
+                <a:latin typeface="Menlo" panose="020B0609030804020204"/>
+                <a:ea typeface="Menlo" panose="020B0609030804020204"/>
+              </a:rPr>
+              <a:t>  c d</a:t>
+            </a:r>
+            <a:endParaRPr lang="en-US" altLang="zh-CN" sz="1200" b="0">
+              <a:solidFill>
+                <a:schemeClr val="tx1"/>
+              </a:solidFill>
+              <a:latin typeface="Menlo" panose="020B0609030804020204"/>
+              <a:ea typeface="Menlo" panose="020B0609030804020204"/>
+            </a:endParaRPr>
+          </a:p>
+          <a:p>
+            <a:pPr>
+              <a:lnSpc>
+                <a:spcPts val="2000"/>
+              </a:lnSpc>
+            </a:pPr>
+            <a:r>
+              <a:rPr lang="en-US" altLang="zh-CN" sz="1200" b="0">
+                <a:solidFill>
+                  <a:schemeClr val="tx1"/>
+                </a:solidFill>
+                <a:latin typeface="Menlo" panose="020B0609030804020204"/>
+                <a:ea typeface="Menlo" panose="020B0609030804020204"/>
+              </a:rPr>
+              <a:t>x y </a:t>
+            </a:r>
+            <a:endParaRPr lang="en-US" altLang="zh-CN" sz="1200" b="0">
+              <a:solidFill>
+                <a:schemeClr val="tx1"/>
+              </a:solidFill>
+              <a:latin typeface="Menlo" panose="020B0609030804020204"/>
+              <a:ea typeface="Menlo" panose="020B0609030804020204"/>
+            </a:endParaRPr>
+          </a:p>
+          <a:p>
+            <a:pPr>
+              <a:lnSpc>
+                <a:spcPts val="2000"/>
+              </a:lnSpc>
+            </a:pPr>
+            <a:r>
+              <a:rPr lang="en-US" altLang="zh-CN" sz="1200" b="0">
+                <a:solidFill>
+                  <a:schemeClr val="tx1"/>
+                </a:solidFill>
+                <a:latin typeface="Menlo" panose="020B0609030804020204"/>
+                <a:ea typeface="Menlo" panose="020B0609030804020204"/>
+              </a:rPr>
+              <a:t>3 6 8 9</a:t>
+            </a:r>
+            <a:endParaRPr lang="en-US" altLang="zh-CN" sz="1200" b="0">
+              <a:solidFill>
+                <a:schemeClr val="tx1"/>
+              </a:solidFill>
+              <a:latin typeface="Menlo" panose="020B0609030804020204"/>
+              <a:ea typeface="Menlo" panose="020B0609030804020204"/>
+            </a:endParaRPr>
+          </a:p>
+          <a:p>
+            <a:pPr>
+              <a:lnSpc>
+                <a:spcPts val="2000"/>
+              </a:lnSpc>
+            </a:pPr>
+            <a:r>
+              <a:rPr lang="en-US" altLang="zh-CN" sz="1200">
+                <a:latin typeface="Menlo" panose="020B0609030804020204"/>
+                <a:ea typeface="Menlo" panose="020B0609030804020204"/>
+                <a:sym typeface="+mn-ea"/>
+              </a:rPr>
+              <a:t>3 5 8 7</a:t>
+            </a:r>
+            <a:endParaRPr lang="en-US" altLang="zh-CN" sz="1200" b="0">
+              <a:solidFill>
+                <a:schemeClr val="tx1"/>
+              </a:solidFill>
+              <a:latin typeface="Menlo" panose="020B0609030804020204"/>
+              <a:ea typeface="Menlo" panose="020B0609030804020204"/>
+            </a:endParaRPr>
+          </a:p>
+        </p:txBody>
+      </p:sp>
+      <p:cxnSp>
+        <p:nvCxnSpPr>
+          <p:cNvPr id="4" name="Straight Connector 3"/>
+          <p:cNvCxnSpPr/>
+          <p:nvPr>
+            <p:custDataLst>
+              <p:tags r:id="rId4"/>
+            </p:custDataLst>
+          </p:nvPr>
+        </p:nvCxnSpPr>
+        <p:spPr>
+          <a:xfrm>
+            <a:off x="2569210" y="2450465"/>
+            <a:ext cx="889000" cy="0"/>
+          </a:xfrm>
+          <a:prstGeom prst="line">
+            <a:avLst/>
+          </a:prstGeom>
+          <a:ln w="19050"/>
+        </p:spPr>
+        <p:style>
+          <a:lnRef idx="2">
+            <a:schemeClr val="accent1"/>
+          </a:lnRef>
+          <a:fillRef idx="0">
+            <a:srgbClr val="FFFFFF"/>
+          </a:fillRef>
+          <a:effectRef idx="0">
+            <a:srgbClr val="FFFFFF"/>
+          </a:effectRef>
+          <a:fontRef idx="minor">
+            <a:schemeClr val="tx1"/>
+          </a:fontRef>
+        </p:style>
+      </p:cxnSp>
+      <p:cxnSp>
+        <p:nvCxnSpPr>
+          <p:cNvPr id="12" name="Straight Arrow Connector 11"/>
+          <p:cNvCxnSpPr/>
+          <p:nvPr>
+            <p:custDataLst>
+              <p:tags r:id="rId5"/>
+            </p:custDataLst>
+          </p:nvPr>
+        </p:nvCxnSpPr>
+        <p:spPr>
+          <a:xfrm flipV="1">
+            <a:off x="3447415" y="1991360"/>
+            <a:ext cx="329565" cy="461010"/>
+          </a:xfrm>
+          <a:prstGeom prst="straightConnector1">
+            <a:avLst/>
+          </a:prstGeom>
+          <a:ln>
+            <a:tailEnd type="arrow"/>
+          </a:ln>
+        </p:spPr>
+        <p:style>
+          <a:lnRef idx="2">
+            <a:schemeClr val="accent1"/>
+          </a:lnRef>
+          <a:fillRef idx="0">
+            <a:srgbClr val="FFFFFF"/>
+          </a:fillRef>
+          <a:effectRef idx="0">
+            <a:srgbClr val="FFFFFF"/>
+          </a:effectRef>
+          <a:fontRef idx="minor">
+            <a:schemeClr val="tx1"/>
+          </a:fontRef>
+        </p:style>
+      </p:cxnSp>
+      <p:cxnSp>
+        <p:nvCxnSpPr>
+          <p:cNvPr id="15" name="Straight Arrow Connector 14"/>
+          <p:cNvCxnSpPr/>
+          <p:nvPr>
+            <p:custDataLst>
+              <p:tags r:id="rId6"/>
+            </p:custDataLst>
+          </p:nvPr>
+        </p:nvCxnSpPr>
+        <p:spPr>
+          <a:xfrm>
+            <a:off x="3440430" y="2446020"/>
+            <a:ext cx="400685" cy="579120"/>
+          </a:xfrm>
+          <a:prstGeom prst="straightConnector1">
+            <a:avLst/>
+          </a:prstGeom>
+          <a:ln>
+            <a:tailEnd type="arrow"/>
+          </a:ln>
+        </p:spPr>
+        <p:style>
+          <a:lnRef idx="2">
+            <a:schemeClr val="accent1"/>
+          </a:lnRef>
+          <a:fillRef idx="0">
+            <a:srgbClr val="FFFFFF"/>
+          </a:fillRef>
+          <a:effectRef idx="0">
+            <a:srgbClr val="FFFFFF"/>
+          </a:effectRef>
+          <a:fontRef idx="minor">
+            <a:schemeClr val="tx1"/>
+          </a:fontRef>
+        </p:style>
+      </p:cxnSp>
+      <p:cxnSp>
+        <p:nvCxnSpPr>
+          <p:cNvPr id="18" name="Straight Arrow Connector 17"/>
+          <p:cNvCxnSpPr/>
+          <p:nvPr>
+            <p:custDataLst>
+              <p:tags r:id="rId7"/>
+            </p:custDataLst>
+          </p:nvPr>
+        </p:nvCxnSpPr>
+        <p:spPr>
+          <a:xfrm>
+            <a:off x="4856480" y="1755775"/>
+            <a:ext cx="759460" cy="0"/>
+          </a:xfrm>
+          <a:prstGeom prst="straightConnector1">
+            <a:avLst/>
+          </a:prstGeom>
+          <a:ln>
+            <a:tailEnd type="arrow"/>
+          </a:ln>
+        </p:spPr>
+        <p:style>
+          <a:lnRef idx="2">
+            <a:schemeClr val="accent1"/>
+          </a:lnRef>
+          <a:fillRef idx="0">
+            <a:srgbClr val="FFFFFF"/>
+          </a:fillRef>
+          <a:effectRef idx="0">
+            <a:srgbClr val="FFFFFF"/>
+          </a:effectRef>
+          <a:fontRef idx="minor">
+            <a:schemeClr val="tx1"/>
+          </a:fontRef>
+        </p:style>
+      </p:cxnSp>
+      <p:sp>
+        <p:nvSpPr>
+          <p:cNvPr id="19" name="Text Box 18"/>
+          <p:cNvSpPr txBox="1"/>
+          <p:nvPr>
+            <p:custDataLst>
+              <p:tags r:id="rId8"/>
+            </p:custDataLst>
+          </p:nvPr>
+        </p:nvSpPr>
+        <p:spPr>
+          <a:xfrm>
+            <a:off x="5812155" y="1267460"/>
+            <a:ext cx="753110" cy="271145"/>
+          </a:xfrm>
+          <a:prstGeom prst="rect">
+            <a:avLst/>
+          </a:prstGeom>
+        </p:spPr>
+        <p:txBody>
+          <a:bodyPr wrap="square">
+            <a:noAutofit/>
+          </a:bodyPr>
+          <a:p>
+            <a:pPr>
+              <a:lnSpc>
+                <a:spcPts val="2000"/>
+              </a:lnSpc>
+            </a:pPr>
+            <a:r>
+              <a:rPr lang="en-US" altLang="zh-CN" sz="1200" b="1">
+                <a:solidFill>
+                  <a:srgbClr val="CCCCCC"/>
+                </a:solidFill>
+                <a:latin typeface="Menlo Bold" panose="020B0609030804020204" charset="0"/>
+                <a:ea typeface="Menlo" panose="020B0609030804020204"/>
+                <a:cs typeface="Menlo Bold" panose="020B0609030804020204" charset="0"/>
+              </a:rPr>
+              <a:t>  </a:t>
+            </a:r>
+            <a:r>
+              <a:rPr lang="en-US" altLang="zh-CN" sz="1200" b="1">
+                <a:solidFill>
+                  <a:schemeClr val="tx1"/>
+                </a:solidFill>
+                <a:latin typeface="Menlo Bold" panose="020B0609030804020204" charset="0"/>
+                <a:ea typeface="Menlo" panose="020B0609030804020204"/>
+                <a:cs typeface="Menlo Bold" panose="020B0609030804020204" charset="0"/>
+              </a:rPr>
+              <a:t>  Error</a:t>
+            </a:r>
+            <a:endParaRPr lang="en-US" altLang="zh-CN" sz="1200" b="1">
+              <a:solidFill>
+                <a:schemeClr val="tx1"/>
+              </a:solidFill>
+              <a:latin typeface="Menlo Bold" panose="020B0609030804020204" charset="0"/>
+              <a:ea typeface="Menlo" panose="020B0609030804020204"/>
+              <a:cs typeface="Menlo Bold" panose="020B0609030804020204" charset="0"/>
+            </a:endParaRPr>
+          </a:p>
+        </p:txBody>
+      </p:sp>
+      <p:sp>
+        <p:nvSpPr>
+          <p:cNvPr id="24" name="Text Box 23"/>
+          <p:cNvSpPr txBox="1"/>
+          <p:nvPr>
+            <p:custDataLst>
+              <p:tags r:id="rId9"/>
+            </p:custDataLst>
+          </p:nvPr>
+        </p:nvSpPr>
+        <p:spPr>
+          <a:xfrm>
+            <a:off x="5766435" y="2687320"/>
+            <a:ext cx="1054735" cy="946150"/>
+          </a:xfrm>
+          <a:prstGeom prst="rect">
+            <a:avLst/>
+          </a:prstGeom>
+        </p:spPr>
+        <p:txBody>
+          <a:bodyPr wrap="square">
+            <a:noAutofit/>
+          </a:bodyPr>
+          <a:p>
+            <a:pPr>
+              <a:lnSpc>
+                <a:spcPts val="2000"/>
+              </a:lnSpc>
+            </a:pPr>
+            <a:r>
+              <a:rPr lang="en-US" altLang="zh-CN" sz="1200" b="0">
+                <a:solidFill>
+                  <a:srgbClr val="CCCCCC"/>
+                </a:solidFill>
+                <a:latin typeface="Menlo" panose="020B0609030804020204"/>
+                <a:ea typeface="Menlo" panose="020B0609030804020204"/>
+              </a:rPr>
+              <a:t>  </a:t>
+            </a:r>
+            <a:r>
+              <a:rPr lang="en-US" altLang="zh-CN" sz="1200" b="0">
+                <a:solidFill>
+                  <a:schemeClr val="tx1"/>
+                </a:solidFill>
+                <a:latin typeface="Menlo" panose="020B0609030804020204"/>
+                <a:ea typeface="Menlo" panose="020B0609030804020204"/>
+              </a:rPr>
+              <a:t>  c d</a:t>
+            </a:r>
+            <a:endParaRPr lang="en-US" altLang="zh-CN" sz="1200" b="0">
+              <a:solidFill>
+                <a:schemeClr val="tx1"/>
+              </a:solidFill>
+              <a:latin typeface="Menlo" panose="020B0609030804020204"/>
+              <a:ea typeface="Menlo" panose="020B0609030804020204"/>
+            </a:endParaRPr>
+          </a:p>
+          <a:p>
+            <a:pPr>
+              <a:lnSpc>
+                <a:spcPts val="2000"/>
+              </a:lnSpc>
+            </a:pPr>
+            <a:r>
+              <a:rPr lang="en-US" altLang="zh-CN" sz="1200" b="0">
+                <a:solidFill>
+                  <a:schemeClr val="tx1"/>
+                </a:solidFill>
+                <a:latin typeface="Menlo" panose="020B0609030804020204"/>
+                <a:ea typeface="Menlo" panose="020B0609030804020204"/>
+              </a:rPr>
+              <a:t>x y </a:t>
+            </a:r>
+            <a:endParaRPr lang="en-US" altLang="zh-CN" sz="1200" b="0">
+              <a:solidFill>
+                <a:schemeClr val="tx1"/>
+              </a:solidFill>
+              <a:latin typeface="Menlo" panose="020B0609030804020204"/>
+              <a:ea typeface="Menlo" panose="020B0609030804020204"/>
+            </a:endParaRPr>
+          </a:p>
+          <a:p>
+            <a:pPr>
+              <a:lnSpc>
+                <a:spcPts val="2000"/>
+              </a:lnSpc>
+            </a:pPr>
+            <a:r>
+              <a:rPr lang="en-US" altLang="zh-CN" sz="1200" b="0">
+                <a:solidFill>
+                  <a:schemeClr val="tx1"/>
+                </a:solidFill>
+                <a:latin typeface="Menlo" panose="020B0609030804020204"/>
+                <a:ea typeface="Menlo" panose="020B0609030804020204"/>
+              </a:rPr>
+              <a:t>3 6 8 9</a:t>
+            </a:r>
+            <a:endParaRPr lang="en-US" altLang="zh-CN" sz="1200" b="0">
+              <a:solidFill>
+                <a:schemeClr val="tx1"/>
+              </a:solidFill>
+              <a:latin typeface="Menlo" panose="020B0609030804020204"/>
+              <a:ea typeface="Menlo" panose="020B0609030804020204"/>
+            </a:endParaRPr>
+          </a:p>
+          <a:p>
+            <a:pPr>
+              <a:lnSpc>
+                <a:spcPts val="2000"/>
+              </a:lnSpc>
+            </a:pPr>
+            <a:endParaRPr lang="en-US" altLang="zh-CN" sz="1200" b="0">
+              <a:solidFill>
+                <a:schemeClr val="tx1"/>
+              </a:solidFill>
+              <a:latin typeface="Menlo" panose="020B0609030804020204"/>
+              <a:ea typeface="Menlo" panose="020B0609030804020204"/>
+            </a:endParaRPr>
+          </a:p>
+        </p:txBody>
+      </p:sp>
+      <p:cxnSp>
+        <p:nvCxnSpPr>
+          <p:cNvPr id="30" name="Straight Arrow Connector 29"/>
+          <p:cNvCxnSpPr/>
+          <p:nvPr>
+            <p:custDataLst>
+              <p:tags r:id="rId10"/>
+            </p:custDataLst>
+          </p:nvPr>
+        </p:nvCxnSpPr>
+        <p:spPr>
+          <a:xfrm>
+            <a:off x="4865370" y="3241040"/>
+            <a:ext cx="759460" cy="0"/>
+          </a:xfrm>
+          <a:prstGeom prst="straightConnector1">
+            <a:avLst/>
+          </a:prstGeom>
+          <a:ln>
+            <a:tailEnd type="arrow"/>
+          </a:ln>
+        </p:spPr>
+        <p:style>
+          <a:lnRef idx="2">
+            <a:schemeClr val="accent1"/>
+          </a:lnRef>
+          <a:fillRef idx="0">
+            <a:srgbClr val="FFFFFF"/>
+          </a:fillRef>
+          <a:effectRef idx="0">
+            <a:srgbClr val="FFFFFF"/>
+          </a:effectRef>
+          <a:fontRef idx="minor">
+            <a:schemeClr val="tx1"/>
+          </a:fontRef>
+        </p:style>
+      </p:cxnSp>
+      <p:sp>
+        <p:nvSpPr>
+          <p:cNvPr id="35" name="Text Box 34"/>
+          <p:cNvSpPr txBox="1"/>
+          <p:nvPr>
+            <p:custDataLst>
+              <p:tags r:id="rId11"/>
+            </p:custDataLst>
+          </p:nvPr>
+        </p:nvSpPr>
+        <p:spPr>
+          <a:xfrm>
+            <a:off x="955675" y="2435860"/>
+            <a:ext cx="669290" cy="368300"/>
+          </a:xfrm>
+          <a:prstGeom prst="rect">
+            <a:avLst/>
+          </a:prstGeom>
+          <a:noFill/>
+        </p:spPr>
+        <p:txBody>
+          <a:bodyPr wrap="square" rtlCol="0">
+            <a:spAutoFit/>
+          </a:bodyPr>
+          <a:p>
+            <a:r>
+              <a:rPr lang="en-US"/>
+              <a:t>df  =</a:t>
+            </a:r>
+            <a:endParaRPr lang="en-US"/>
+          </a:p>
+        </p:txBody>
+      </p:sp>
+      <p:sp>
+        <p:nvSpPr>
+          <p:cNvPr id="36" name="Text Box 35"/>
+          <p:cNvSpPr txBox="1"/>
+          <p:nvPr>
+            <p:custDataLst>
+              <p:tags r:id="rId12"/>
+            </p:custDataLst>
+          </p:nvPr>
+        </p:nvSpPr>
+        <p:spPr>
+          <a:xfrm>
+            <a:off x="974725" y="3265170"/>
+            <a:ext cx="2132330" cy="337185"/>
+          </a:xfrm>
+          <a:prstGeom prst="rect">
+            <a:avLst/>
+          </a:prstGeom>
+          <a:noFill/>
+        </p:spPr>
+        <p:txBody>
+          <a:bodyPr wrap="square" rtlCol="0">
+            <a:spAutoFit/>
+          </a:bodyPr>
+          <a:p>
+            <a:r>
+              <a:rPr lang="en-US" sz="1600"/>
+              <a:t>(idx  = pd.IndexSlice)</a:t>
+            </a:r>
+            <a:endParaRPr lang="en-US" sz="1600"/>
+          </a:p>
+        </p:txBody>
+      </p:sp>
+      <p:sp>
+        <p:nvSpPr>
+          <p:cNvPr id="37" name="Text Box 36"/>
+          <p:cNvSpPr txBox="1"/>
+          <p:nvPr>
+            <p:custDataLst>
+              <p:tags r:id="rId13"/>
+            </p:custDataLst>
+          </p:nvPr>
+        </p:nvSpPr>
+        <p:spPr>
+          <a:xfrm>
+            <a:off x="2451100" y="2124075"/>
+            <a:ext cx="1442720" cy="245110"/>
+          </a:xfrm>
+          <a:prstGeom prst="rect">
+            <a:avLst/>
+          </a:prstGeom>
+          <a:noFill/>
+        </p:spPr>
+        <p:txBody>
+          <a:bodyPr wrap="square" rtlCol="0">
+            <a:spAutoFit/>
+          </a:bodyPr>
+          <a:p>
+            <a:r>
+              <a:rPr lang="en-US" sz="1000"/>
+              <a:t>df.loc[idx[[1,3],[6]]]</a:t>
+            </a:r>
+            <a:endParaRPr lang="en-US" sz="1000"/>
+          </a:p>
+        </p:txBody>
+      </p:sp>
+      <p:sp>
+        <p:nvSpPr>
+          <p:cNvPr id="38" name="Rectangles 37"/>
+          <p:cNvSpPr/>
+          <p:nvPr>
+            <p:custDataLst>
+              <p:tags r:id="rId14"/>
+            </p:custDataLst>
+          </p:nvPr>
+        </p:nvSpPr>
+        <p:spPr>
+          <a:xfrm>
+            <a:off x="3031490" y="2116455"/>
+            <a:ext cx="292735" cy="271145"/>
+          </a:xfrm>
+          <a:prstGeom prst="rect">
+            <a:avLst/>
+          </a:prstGeom>
+          <a:noFill/>
+          <a:ln w="19050">
+            <a:solidFill>
+              <a:srgbClr val="C00000"/>
+            </a:solidFill>
+          </a:ln>
+          <a:extLst>
+            <a:ext uri="{909E8E84-426E-40DD-AFC4-6F175D3DCCD1}">
+              <a14:hiddenFill xmlns:a14="http://schemas.microsoft.com/office/drawing/2010/main">
+                <a:solidFill>
+                  <a:schemeClr val="accent1"/>
+                </a:solidFill>
+              </a14:hiddenFill>
+            </a:ext>
+          </a:extLst>
+        </p:spPr>
+        <p:style>
+          <a:lnRef idx="2">
+            <a:schemeClr val="accent1">
+              <a:lumMod val="75000"/>
+            </a:schemeClr>
+          </a:lnRef>
+          <a:fillRef idx="1">
+            <a:schemeClr val="accent1"/>
+          </a:fillRef>
+          <a:effectRef idx="0">
+            <a:srgbClr val="FFFFFF"/>
+          </a:effectRef>
+          <a:fontRef idx="minor">
+            <a:schemeClr val="lt1"/>
+          </a:fontRef>
+        </p:style>
+        <p:txBody>
+          <a:bodyPr rtlCol="0" anchor="ctr"/>
+          <a:p>
+            <a:pPr algn="ctr"/>
+            <a:endParaRPr lang="en-US"/>
+          </a:p>
+        </p:txBody>
+      </p:sp>
+      <p:sp>
+        <p:nvSpPr>
+          <p:cNvPr id="39" name="Text Box 38"/>
+          <p:cNvSpPr txBox="1"/>
+          <p:nvPr>
+            <p:custDataLst>
+              <p:tags r:id="rId15"/>
+            </p:custDataLst>
+          </p:nvPr>
+        </p:nvSpPr>
+        <p:spPr>
+          <a:xfrm>
+            <a:off x="4652645" y="2214880"/>
+            <a:ext cx="1442720" cy="245110"/>
+          </a:xfrm>
+          <a:prstGeom prst="rect">
+            <a:avLst/>
+          </a:prstGeom>
+          <a:noFill/>
+        </p:spPr>
+        <p:txBody>
+          <a:bodyPr wrap="square" rtlCol="0">
+            <a:spAutoFit/>
+          </a:bodyPr>
+          <a:p>
+            <a:r>
+              <a:rPr lang="en-US" sz="1000"/>
+              <a:t>df.loc[idx[[1,3],[6]]]</a:t>
+            </a:r>
+            <a:endParaRPr lang="en-US" sz="1000"/>
+          </a:p>
+        </p:txBody>
+      </p:sp>
+      <p:sp>
+        <p:nvSpPr>
+          <p:cNvPr id="40" name="Rectangles 39"/>
+          <p:cNvSpPr/>
+          <p:nvPr>
+            <p:custDataLst>
+              <p:tags r:id="rId16"/>
+            </p:custDataLst>
+          </p:nvPr>
+        </p:nvSpPr>
+        <p:spPr>
+          <a:xfrm>
+            <a:off x="5497195" y="2207260"/>
+            <a:ext cx="188595" cy="271145"/>
+          </a:xfrm>
+          <a:prstGeom prst="rect">
+            <a:avLst/>
+          </a:prstGeom>
+          <a:noFill/>
+          <a:ln w="19050">
+            <a:solidFill>
+              <a:srgbClr val="C00000"/>
+            </a:solidFill>
+          </a:ln>
+          <a:extLst>
+            <a:ext uri="{909E8E84-426E-40DD-AFC4-6F175D3DCCD1}">
+              <a14:hiddenFill xmlns:a14="http://schemas.microsoft.com/office/drawing/2010/main">
+                <a:solidFill>
+                  <a:schemeClr val="accent1"/>
+                </a:solidFill>
+              </a14:hiddenFill>
+            </a:ext>
+          </a:extLst>
+        </p:spPr>
+        <p:style>
+          <a:lnRef idx="2">
+            <a:schemeClr val="accent1">
+              <a:lumMod val="75000"/>
+            </a:schemeClr>
+          </a:lnRef>
+          <a:fillRef idx="1">
+            <a:schemeClr val="accent1"/>
+          </a:fillRef>
+          <a:effectRef idx="0">
+            <a:srgbClr val="FFFFFF"/>
+          </a:effectRef>
+          <a:fontRef idx="minor">
+            <a:schemeClr val="lt1"/>
+          </a:fontRef>
+        </p:style>
+        <p:txBody>
+          <a:bodyPr rtlCol="0" anchor="ctr"/>
+          <a:p>
+            <a:pPr algn="ctr"/>
+            <a:endParaRPr lang="en-US"/>
+          </a:p>
+        </p:txBody>
+      </p:sp>
+      <p:sp>
+        <p:nvSpPr>
+          <p:cNvPr id="42" name="Text Box 41"/>
+          <p:cNvSpPr txBox="1"/>
+          <p:nvPr>
+            <p:custDataLst>
+              <p:tags r:id="rId17"/>
+            </p:custDataLst>
+          </p:nvPr>
+        </p:nvSpPr>
+        <p:spPr>
+          <a:xfrm>
+            <a:off x="1590675" y="4301490"/>
+            <a:ext cx="1725295" cy="1630045"/>
+          </a:xfrm>
+          <a:prstGeom prst="rect">
+            <a:avLst/>
+          </a:prstGeom>
+        </p:spPr>
+        <p:txBody>
+          <a:bodyPr wrap="square">
+            <a:spAutoFit/>
+          </a:bodyPr>
+          <a:p>
+            <a:pPr>
+              <a:lnSpc>
+                <a:spcPts val="2000"/>
+              </a:lnSpc>
+            </a:pPr>
+            <a:r>
+              <a:rPr lang="en-US" altLang="zh-CN" sz="1200" b="0">
+                <a:solidFill>
+                  <a:schemeClr val="tx1"/>
+                </a:solidFill>
+                <a:latin typeface="Menlo" panose="020B0609030804020204"/>
+                <a:ea typeface="Menlo" panose="020B0609030804020204"/>
+              </a:rPr>
+              <a:t>...   ...</a:t>
+            </a:r>
+            <a:endParaRPr lang="en-US" altLang="zh-CN" sz="1200" b="0">
+              <a:solidFill>
+                <a:schemeClr val="tx1"/>
+              </a:solidFill>
+              <a:latin typeface="Menlo" panose="020B0609030804020204"/>
+              <a:ea typeface="Menlo" panose="020B0609030804020204"/>
+            </a:endParaRPr>
+          </a:p>
+          <a:p>
+            <a:pPr>
+              <a:lnSpc>
+                <a:spcPts val="2000"/>
+              </a:lnSpc>
+            </a:pPr>
+            <a:r>
+              <a:rPr lang="en-US" altLang="zh-CN" sz="1200" b="0">
+                <a:solidFill>
+                  <a:schemeClr val="tx1"/>
+                </a:solidFill>
+                <a:latin typeface="Menlo" panose="020B0609030804020204"/>
+                <a:ea typeface="Menlo" panose="020B0609030804020204"/>
+              </a:rPr>
+              <a:t>----- -----</a:t>
+            </a:r>
+            <a:endParaRPr lang="en-US" altLang="zh-CN" sz="1200" b="0">
+              <a:solidFill>
+                <a:schemeClr val="tx1"/>
+              </a:solidFill>
+              <a:latin typeface="Menlo" panose="020B0609030804020204"/>
+              <a:ea typeface="Menlo" panose="020B0609030804020204"/>
+            </a:endParaRPr>
+          </a:p>
+          <a:p>
+            <a:pPr>
+              <a:lnSpc>
+                <a:spcPts val="2000"/>
+              </a:lnSpc>
+            </a:pPr>
+            <a:r>
+              <a:rPr lang="en-US" altLang="zh-CN" sz="1200" b="0">
+                <a:solidFill>
+                  <a:schemeClr val="tx1"/>
+                </a:solidFill>
+                <a:latin typeface="Menlo" panose="020B0609030804020204"/>
+                <a:ea typeface="Menlo" panose="020B0609030804020204"/>
+              </a:rPr>
+              <a:t>  x y   c d</a:t>
+            </a:r>
+            <a:endParaRPr lang="en-US" altLang="zh-CN" sz="1200" b="0">
+              <a:solidFill>
+                <a:schemeClr val="tx1"/>
+              </a:solidFill>
+              <a:latin typeface="Menlo" panose="020B0609030804020204"/>
+              <a:ea typeface="Menlo" panose="020B0609030804020204"/>
+            </a:endParaRPr>
+          </a:p>
+          <a:p>
+            <a:pPr>
+              <a:lnSpc>
+                <a:spcPts val="2000"/>
+              </a:lnSpc>
+            </a:pPr>
+            <a:r>
+              <a:rPr lang="en-US" altLang="zh-CN" sz="1200" b="0">
+                <a:solidFill>
+                  <a:schemeClr val="tx1"/>
+                </a:solidFill>
+                <a:latin typeface="Menlo" panose="020B0609030804020204"/>
+                <a:ea typeface="Menlo" panose="020B0609030804020204"/>
+              </a:rPr>
+              <a:t>b 1 2 b 1 2</a:t>
+            </a:r>
+            <a:endParaRPr lang="en-US" altLang="zh-CN" sz="1200" b="0">
+              <a:solidFill>
+                <a:schemeClr val="tx1"/>
+              </a:solidFill>
+              <a:latin typeface="Menlo" panose="020B0609030804020204"/>
+              <a:ea typeface="Menlo" panose="020B0609030804020204"/>
+            </a:endParaRPr>
+          </a:p>
+          <a:p>
+            <a:pPr>
+              <a:lnSpc>
+                <a:spcPts val="2000"/>
+              </a:lnSpc>
+            </a:pPr>
+            <a:r>
+              <a:rPr lang="en-US" altLang="zh-CN" sz="1200" b="0">
+                <a:solidFill>
+                  <a:schemeClr val="tx1"/>
+                </a:solidFill>
+                <a:latin typeface="Menlo" panose="020B0609030804020204"/>
+                <a:ea typeface="Menlo" panose="020B0609030804020204"/>
+              </a:rPr>
+              <a:t>c 3 6 c 8 9</a:t>
+            </a:r>
+            <a:endParaRPr lang="en-US" altLang="zh-CN" sz="1200" b="0">
+              <a:solidFill>
+                <a:schemeClr val="tx1"/>
+              </a:solidFill>
+              <a:latin typeface="Menlo" panose="020B0609030804020204"/>
+              <a:ea typeface="Menlo" panose="020B0609030804020204"/>
+            </a:endParaRPr>
+          </a:p>
+          <a:p>
+            <a:pPr>
+              <a:lnSpc>
+                <a:spcPts val="2000"/>
+              </a:lnSpc>
+            </a:pPr>
+            <a:r>
+              <a:rPr lang="en-US" altLang="zh-CN" sz="1200" b="0">
+                <a:solidFill>
+                  <a:schemeClr val="tx1"/>
+                </a:solidFill>
+                <a:latin typeface="Menlo" panose="020B0609030804020204"/>
+                <a:ea typeface="Menlo" panose="020B0609030804020204"/>
+              </a:rPr>
+              <a:t>d 3 5 d 8 7</a:t>
+            </a:r>
+            <a:endParaRPr lang="en-US" altLang="zh-CN" sz="1200" b="0">
+              <a:solidFill>
+                <a:schemeClr val="tx1"/>
+              </a:solidFill>
+              <a:latin typeface="Menlo" panose="020B0609030804020204"/>
+              <a:ea typeface="Menlo" panose="020B0609030804020204"/>
+            </a:endParaRPr>
+          </a:p>
+        </p:txBody>
+      </p:sp>
+      <p:sp>
+        <p:nvSpPr>
+          <p:cNvPr id="43" name="Text Box 42"/>
+          <p:cNvSpPr txBox="1"/>
+          <p:nvPr>
+            <p:custDataLst>
+              <p:tags r:id="rId18"/>
+            </p:custDataLst>
+          </p:nvPr>
+        </p:nvSpPr>
+        <p:spPr>
+          <a:xfrm>
+            <a:off x="1043305" y="5309235"/>
+            <a:ext cx="669290" cy="368300"/>
+          </a:xfrm>
+          <a:prstGeom prst="rect">
+            <a:avLst/>
+          </a:prstGeom>
+          <a:noFill/>
+        </p:spPr>
+        <p:txBody>
+          <a:bodyPr wrap="square" rtlCol="0">
+            <a:spAutoFit/>
+          </a:bodyPr>
+          <a:p>
+            <a:r>
+              <a:rPr lang="en-US"/>
+              <a:t>mf  =</a:t>
+            </a:r>
+            <a:endParaRPr lang="en-US"/>
+          </a:p>
+        </p:txBody>
+      </p:sp>
+      <p:cxnSp>
+        <p:nvCxnSpPr>
+          <p:cNvPr id="44" name="Straight Arrow Connector 43"/>
+          <p:cNvCxnSpPr/>
+          <p:nvPr>
+            <p:custDataLst>
+              <p:tags r:id="rId19"/>
+            </p:custDataLst>
+          </p:nvPr>
+        </p:nvCxnSpPr>
+        <p:spPr>
+          <a:xfrm>
+            <a:off x="2983230" y="5493385"/>
+            <a:ext cx="1597660" cy="0"/>
+          </a:xfrm>
+          <a:prstGeom prst="straightConnector1">
+            <a:avLst/>
+          </a:prstGeom>
+          <a:ln>
+            <a:tailEnd type="arrow"/>
+          </a:ln>
+        </p:spPr>
+        <p:style>
+          <a:lnRef idx="2">
+            <a:schemeClr val="accent1"/>
+          </a:lnRef>
+          <a:fillRef idx="0">
+            <a:srgbClr val="FFFFFF"/>
+          </a:fillRef>
+          <a:effectRef idx="0">
+            <a:srgbClr val="FFFFFF"/>
+          </a:effectRef>
+          <a:fontRef idx="minor">
+            <a:schemeClr val="tx1"/>
+          </a:fontRef>
+        </p:style>
+      </p:cxnSp>
+      <p:sp>
+        <p:nvSpPr>
+          <p:cNvPr id="45" name="Text Box 44"/>
+          <p:cNvSpPr txBox="1"/>
+          <p:nvPr>
+            <p:custDataLst>
+              <p:tags r:id="rId20"/>
+            </p:custDataLst>
+          </p:nvPr>
+        </p:nvSpPr>
+        <p:spPr>
+          <a:xfrm>
+            <a:off x="3172460" y="5204460"/>
+            <a:ext cx="1442720" cy="275590"/>
+          </a:xfrm>
+          <a:prstGeom prst="rect">
+            <a:avLst/>
+          </a:prstGeom>
+          <a:noFill/>
+        </p:spPr>
+        <p:txBody>
+          <a:bodyPr wrap="square" rtlCol="0">
+            <a:spAutoFit/>
+          </a:bodyPr>
+          <a:p>
+            <a:r>
+              <a:rPr lang="en-US" sz="1200"/>
+              <a:t>mf.mloc[[[1,3],[6]]]</a:t>
+            </a:r>
+            <a:endParaRPr lang="en-US" sz="1200"/>
+          </a:p>
+        </p:txBody>
+      </p:sp>
+      <p:sp>
+        <p:nvSpPr>
+          <p:cNvPr id="46" name="Text Box 45"/>
+          <p:cNvSpPr txBox="1"/>
+          <p:nvPr>
+            <p:custDataLst>
+              <p:tags r:id="rId21"/>
+            </p:custDataLst>
+          </p:nvPr>
+        </p:nvSpPr>
+        <p:spPr>
+          <a:xfrm>
+            <a:off x="4776470" y="4464685"/>
+            <a:ext cx="1725295" cy="1630045"/>
+          </a:xfrm>
+          <a:prstGeom prst="rect">
+            <a:avLst/>
+          </a:prstGeom>
+        </p:spPr>
+        <p:txBody>
+          <a:bodyPr wrap="square">
+            <a:spAutoFit/>
+          </a:bodyPr>
+          <a:p>
+            <a:pPr>
+              <a:lnSpc>
+                <a:spcPts val="2000"/>
+              </a:lnSpc>
+            </a:pPr>
+            <a:r>
+              <a:rPr lang="en-US" altLang="zh-CN" sz="1200" b="0">
+                <a:solidFill>
+                  <a:schemeClr val="tx1"/>
+                </a:solidFill>
+                <a:latin typeface="Menlo" panose="020B0609030804020204"/>
+                <a:ea typeface="Menlo" panose="020B0609030804020204"/>
+              </a:rPr>
+              <a:t>...   ...</a:t>
+            </a:r>
+            <a:endParaRPr lang="en-US" altLang="zh-CN" sz="1200" b="0">
+              <a:solidFill>
+                <a:schemeClr val="tx1"/>
+              </a:solidFill>
+              <a:latin typeface="Menlo" panose="020B0609030804020204"/>
+              <a:ea typeface="Menlo" panose="020B0609030804020204"/>
+            </a:endParaRPr>
+          </a:p>
+          <a:p>
+            <a:pPr>
+              <a:lnSpc>
+                <a:spcPts val="2000"/>
+              </a:lnSpc>
+            </a:pPr>
+            <a:r>
+              <a:rPr lang="en-US" altLang="zh-CN" sz="1200" b="0">
+                <a:solidFill>
+                  <a:schemeClr val="tx1"/>
+                </a:solidFill>
+                <a:latin typeface="Menlo" panose="020B0609030804020204"/>
+                <a:ea typeface="Menlo" panose="020B0609030804020204"/>
+              </a:rPr>
+              <a:t>----- -----</a:t>
+            </a:r>
+            <a:endParaRPr lang="en-US" altLang="zh-CN" sz="1200" b="0">
+              <a:solidFill>
+                <a:schemeClr val="tx1"/>
+              </a:solidFill>
+              <a:latin typeface="Menlo" panose="020B0609030804020204"/>
+              <a:ea typeface="Menlo" panose="020B0609030804020204"/>
+            </a:endParaRPr>
+          </a:p>
+          <a:p>
+            <a:pPr>
+              <a:lnSpc>
+                <a:spcPts val="2000"/>
+              </a:lnSpc>
+            </a:pPr>
+            <a:r>
+              <a:rPr lang="en-US" altLang="zh-CN" sz="1200" b="0">
+                <a:solidFill>
+                  <a:schemeClr val="tx1"/>
+                </a:solidFill>
+                <a:latin typeface="Menlo" panose="020B0609030804020204"/>
+                <a:ea typeface="Menlo" panose="020B0609030804020204"/>
+              </a:rPr>
+              <a:t>  x y   c d</a:t>
+            </a:r>
+            <a:endParaRPr lang="en-US" altLang="zh-CN" sz="1200" b="0">
+              <a:solidFill>
+                <a:schemeClr val="tx1"/>
+              </a:solidFill>
+              <a:latin typeface="Menlo" panose="020B0609030804020204"/>
+              <a:ea typeface="Menlo" panose="020B0609030804020204"/>
+            </a:endParaRPr>
+          </a:p>
+          <a:p>
+            <a:pPr>
+              <a:lnSpc>
+                <a:spcPts val="2000"/>
+              </a:lnSpc>
+            </a:pPr>
+            <a:r>
+              <a:rPr lang="en-US" altLang="zh-CN" sz="1200" b="0">
+                <a:solidFill>
+                  <a:schemeClr val="tx1"/>
+                </a:solidFill>
+                <a:latin typeface="Menlo" panose="020B0609030804020204"/>
+                <a:ea typeface="Menlo" panose="020B0609030804020204"/>
+              </a:rPr>
+              <a:t>b 1 2 a 1 2</a:t>
+            </a:r>
+            <a:endParaRPr lang="en-US" altLang="zh-CN" sz="1200" b="0">
+              <a:solidFill>
+                <a:schemeClr val="tx1"/>
+              </a:solidFill>
+              <a:latin typeface="Menlo" panose="020B0609030804020204"/>
+              <a:ea typeface="Menlo" panose="020B0609030804020204"/>
+            </a:endParaRPr>
+          </a:p>
+          <a:p>
+            <a:pPr>
+              <a:lnSpc>
+                <a:spcPts val="2000"/>
+              </a:lnSpc>
+            </a:pPr>
+            <a:r>
+              <a:rPr lang="en-US" altLang="zh-CN" sz="1200" b="0">
+                <a:solidFill>
+                  <a:schemeClr val="tx1"/>
+                </a:solidFill>
+                <a:latin typeface="Menlo" panose="020B0609030804020204"/>
+                <a:ea typeface="Menlo" panose="020B0609030804020204"/>
+              </a:rPr>
+              <a:t>c 3 6 c 8 9</a:t>
+            </a:r>
+            <a:endParaRPr lang="en-US" altLang="zh-CN" sz="1200" b="0">
+              <a:solidFill>
+                <a:schemeClr val="tx1"/>
+              </a:solidFill>
+              <a:latin typeface="Menlo" panose="020B0609030804020204"/>
+              <a:ea typeface="Menlo" panose="020B0609030804020204"/>
+            </a:endParaRPr>
+          </a:p>
+          <a:p>
+            <a:pPr>
+              <a:lnSpc>
+                <a:spcPts val="2000"/>
+              </a:lnSpc>
+            </a:pPr>
+            <a:r>
+              <a:rPr lang="en-US" altLang="zh-CN" sz="1200">
+                <a:latin typeface="Menlo" panose="020B0609030804020204"/>
+                <a:ea typeface="Menlo" panose="020B0609030804020204"/>
+                <a:sym typeface="+mn-ea"/>
+              </a:rPr>
+              <a:t>d 3 5 d 8 7</a:t>
+            </a:r>
+            <a:endParaRPr lang="en-US" altLang="zh-CN" sz="1200" b="0">
+              <a:solidFill>
+                <a:schemeClr val="tx1"/>
+              </a:solidFill>
+              <a:latin typeface="Menlo" panose="020B0609030804020204"/>
+              <a:ea typeface="Menlo" panose="020B0609030804020204"/>
+            </a:endParaRPr>
+          </a:p>
+        </p:txBody>
+      </p:sp>
+      <p:sp>
+        <p:nvSpPr>
+          <p:cNvPr id="47" name="Text Box 46"/>
+          <p:cNvSpPr txBox="1"/>
+          <p:nvPr>
+            <p:custDataLst>
+              <p:tags r:id="rId22"/>
+            </p:custDataLst>
+          </p:nvPr>
+        </p:nvSpPr>
+        <p:spPr>
+          <a:xfrm>
+            <a:off x="6322060" y="5190490"/>
+            <a:ext cx="1442720" cy="275590"/>
+          </a:xfrm>
+          <a:prstGeom prst="rect">
+            <a:avLst/>
+          </a:prstGeom>
+          <a:noFill/>
+        </p:spPr>
+        <p:txBody>
+          <a:bodyPr wrap="square" rtlCol="0">
+            <a:spAutoFit/>
+          </a:bodyPr>
+          <a:p>
+            <a:r>
+              <a:rPr lang="en-US" sz="1200"/>
+              <a:t>mf.mloc[[[1,3],[6]]]</a:t>
+            </a:r>
+            <a:endParaRPr lang="en-US" sz="1200"/>
+          </a:p>
+        </p:txBody>
+      </p:sp>
+      <p:cxnSp>
+        <p:nvCxnSpPr>
+          <p:cNvPr id="48" name="Straight Arrow Connector 47"/>
+          <p:cNvCxnSpPr/>
+          <p:nvPr>
+            <p:custDataLst>
+              <p:tags r:id="rId23"/>
+            </p:custDataLst>
+          </p:nvPr>
+        </p:nvCxnSpPr>
+        <p:spPr>
+          <a:xfrm>
+            <a:off x="6189980" y="5474335"/>
+            <a:ext cx="1597660" cy="0"/>
+          </a:xfrm>
+          <a:prstGeom prst="straightConnector1">
+            <a:avLst/>
+          </a:prstGeom>
+          <a:ln>
+            <a:tailEnd type="arrow"/>
+          </a:ln>
+        </p:spPr>
+        <p:style>
+          <a:lnRef idx="2">
+            <a:schemeClr val="accent1"/>
+          </a:lnRef>
+          <a:fillRef idx="0">
+            <a:srgbClr val="FFFFFF"/>
+          </a:fillRef>
+          <a:effectRef idx="0">
+            <a:srgbClr val="FFFFFF"/>
+          </a:effectRef>
+          <a:fontRef idx="minor">
+            <a:schemeClr val="tx1"/>
+          </a:fontRef>
+        </p:style>
+      </p:cxnSp>
+      <p:sp>
+        <p:nvSpPr>
+          <p:cNvPr id="49" name="Text Box 48"/>
+          <p:cNvSpPr txBox="1"/>
+          <p:nvPr>
+            <p:custDataLst>
+              <p:tags r:id="rId24"/>
+            </p:custDataLst>
+          </p:nvPr>
+        </p:nvSpPr>
+        <p:spPr>
+          <a:xfrm>
+            <a:off x="7962265" y="4569460"/>
+            <a:ext cx="1725295" cy="1373505"/>
+          </a:xfrm>
+          <a:prstGeom prst="rect">
+            <a:avLst/>
+          </a:prstGeom>
+        </p:spPr>
+        <p:txBody>
+          <a:bodyPr wrap="square">
+            <a:spAutoFit/>
+          </a:bodyPr>
+          <a:p>
+            <a:pPr>
+              <a:lnSpc>
+                <a:spcPts val="2000"/>
+              </a:lnSpc>
+            </a:pPr>
+            <a:r>
+              <a:rPr lang="en-US" altLang="zh-CN" sz="1200" b="0">
+                <a:solidFill>
+                  <a:schemeClr val="tx1"/>
+                </a:solidFill>
+                <a:latin typeface="Menlo" panose="020B0609030804020204"/>
+                <a:ea typeface="Menlo" panose="020B0609030804020204"/>
+              </a:rPr>
+              <a:t>...   ...</a:t>
+            </a:r>
+            <a:endParaRPr lang="en-US" altLang="zh-CN" sz="1200" b="0">
+              <a:solidFill>
+                <a:schemeClr val="tx1"/>
+              </a:solidFill>
+              <a:latin typeface="Menlo" panose="020B0609030804020204"/>
+              <a:ea typeface="Menlo" panose="020B0609030804020204"/>
+            </a:endParaRPr>
+          </a:p>
+          <a:p>
+            <a:pPr>
+              <a:lnSpc>
+                <a:spcPts val="2000"/>
+              </a:lnSpc>
+            </a:pPr>
+            <a:r>
+              <a:rPr lang="en-US" altLang="zh-CN" sz="1200" b="0">
+                <a:solidFill>
+                  <a:schemeClr val="tx1"/>
+                </a:solidFill>
+                <a:latin typeface="Menlo" panose="020B0609030804020204"/>
+                <a:ea typeface="Menlo" panose="020B0609030804020204"/>
+              </a:rPr>
+              <a:t>----- -----</a:t>
+            </a:r>
+            <a:endParaRPr lang="en-US" altLang="zh-CN" sz="1200" b="0">
+              <a:solidFill>
+                <a:schemeClr val="tx1"/>
+              </a:solidFill>
+              <a:latin typeface="Menlo" panose="020B0609030804020204"/>
+              <a:ea typeface="Menlo" panose="020B0609030804020204"/>
+            </a:endParaRPr>
+          </a:p>
+          <a:p>
+            <a:pPr>
+              <a:lnSpc>
+                <a:spcPts val="2000"/>
+              </a:lnSpc>
+            </a:pPr>
+            <a:r>
+              <a:rPr lang="en-US" altLang="zh-CN" sz="1200" b="0">
+                <a:solidFill>
+                  <a:schemeClr val="tx1"/>
+                </a:solidFill>
+                <a:latin typeface="Menlo" panose="020B0609030804020204"/>
+                <a:ea typeface="Menlo" panose="020B0609030804020204"/>
+              </a:rPr>
+              <a:t>  x y   c d</a:t>
+            </a:r>
+            <a:endParaRPr lang="en-US" altLang="zh-CN" sz="1200" b="0">
+              <a:solidFill>
+                <a:schemeClr val="tx1"/>
+              </a:solidFill>
+              <a:latin typeface="Menlo" panose="020B0609030804020204"/>
+              <a:ea typeface="Menlo" panose="020B0609030804020204"/>
+            </a:endParaRPr>
+          </a:p>
+          <a:p>
+            <a:pPr>
+              <a:lnSpc>
+                <a:spcPts val="2000"/>
+              </a:lnSpc>
+            </a:pPr>
+            <a:r>
+              <a:rPr lang="en-US" altLang="zh-CN" sz="1200" b="0">
+                <a:solidFill>
+                  <a:schemeClr val="tx1"/>
+                </a:solidFill>
+                <a:latin typeface="Menlo" panose="020B0609030804020204"/>
+                <a:ea typeface="Menlo" panose="020B0609030804020204"/>
+              </a:rPr>
+              <a:t>c 3 6 c 8 9</a:t>
+            </a:r>
+            <a:endParaRPr lang="en-US" altLang="zh-CN" sz="1200" b="0">
+              <a:solidFill>
+                <a:schemeClr val="tx1"/>
+              </a:solidFill>
+              <a:latin typeface="Menlo" panose="020B0609030804020204"/>
+              <a:ea typeface="Menlo" panose="020B0609030804020204"/>
+            </a:endParaRPr>
+          </a:p>
+          <a:p>
+            <a:pPr>
+              <a:lnSpc>
+                <a:spcPts val="2000"/>
+              </a:lnSpc>
+            </a:pPr>
+            <a:endParaRPr lang="en-US" altLang="zh-CN" sz="1200" b="0">
+              <a:solidFill>
+                <a:schemeClr val="tx1"/>
+              </a:solidFill>
+              <a:latin typeface="Menlo" panose="020B0609030804020204"/>
+              <a:ea typeface="Menlo" panose="020B0609030804020204"/>
+            </a:endParaRPr>
+          </a:p>
+        </p:txBody>
+      </p:sp>
+      <p:sp>
+        <p:nvSpPr>
+          <p:cNvPr id="50" name="Rectangles 49"/>
+          <p:cNvSpPr/>
+          <p:nvPr>
+            <p:custDataLst>
+              <p:tags r:id="rId25"/>
+            </p:custDataLst>
+          </p:nvPr>
+        </p:nvSpPr>
+        <p:spPr>
+          <a:xfrm>
+            <a:off x="3851910" y="5196205"/>
+            <a:ext cx="292735" cy="271145"/>
+          </a:xfrm>
+          <a:prstGeom prst="rect">
+            <a:avLst/>
+          </a:prstGeom>
+          <a:noFill/>
+          <a:ln w="19050">
+            <a:solidFill>
+              <a:srgbClr val="C00000"/>
+            </a:solidFill>
+          </a:ln>
+          <a:extLst>
+            <a:ext uri="{909E8E84-426E-40DD-AFC4-6F175D3DCCD1}">
+              <a14:hiddenFill xmlns:a14="http://schemas.microsoft.com/office/drawing/2010/main">
+                <a:solidFill>
+                  <a:schemeClr val="accent1"/>
+                </a:solidFill>
+              </a14:hiddenFill>
+            </a:ext>
+          </a:extLst>
+        </p:spPr>
+        <p:style>
+          <a:lnRef idx="2">
+            <a:schemeClr val="accent1">
+              <a:lumMod val="75000"/>
+            </a:schemeClr>
+          </a:lnRef>
+          <a:fillRef idx="1">
+            <a:schemeClr val="accent1"/>
+          </a:fillRef>
+          <a:effectRef idx="0">
+            <a:srgbClr val="FFFFFF"/>
+          </a:effectRef>
+          <a:fontRef idx="minor">
+            <a:schemeClr val="lt1"/>
+          </a:fontRef>
+        </p:style>
+        <p:txBody>
+          <a:bodyPr rtlCol="0" anchor="ctr"/>
+          <a:p>
+            <a:pPr algn="ctr"/>
+            <a:endParaRPr lang="en-US"/>
+          </a:p>
+        </p:txBody>
+      </p:sp>
+      <p:sp>
+        <p:nvSpPr>
+          <p:cNvPr id="51" name="Rectangles 50"/>
+          <p:cNvSpPr/>
+          <p:nvPr>
+            <p:custDataLst>
+              <p:tags r:id="rId26"/>
+            </p:custDataLst>
+          </p:nvPr>
+        </p:nvSpPr>
+        <p:spPr>
+          <a:xfrm>
+            <a:off x="7326630" y="5173345"/>
+            <a:ext cx="189230" cy="271145"/>
+          </a:xfrm>
+          <a:prstGeom prst="rect">
+            <a:avLst/>
+          </a:prstGeom>
+          <a:noFill/>
+          <a:ln w="19050">
+            <a:solidFill>
+              <a:srgbClr val="C00000"/>
+            </a:solidFill>
+          </a:ln>
+          <a:extLst>
+            <a:ext uri="{909E8E84-426E-40DD-AFC4-6F175D3DCCD1}">
+              <a14:hiddenFill xmlns:a14="http://schemas.microsoft.com/office/drawing/2010/main">
+                <a:solidFill>
+                  <a:schemeClr val="accent1"/>
+                </a:solidFill>
+              </a14:hiddenFill>
+            </a:ext>
+          </a:extLst>
+        </p:spPr>
+        <p:style>
+          <a:lnRef idx="2">
+            <a:schemeClr val="accent1">
+              <a:lumMod val="75000"/>
+            </a:schemeClr>
+          </a:lnRef>
+          <a:fillRef idx="1">
+            <a:schemeClr val="accent1"/>
+          </a:fillRef>
+          <a:effectRef idx="0">
+            <a:srgbClr val="FFFFFF"/>
+          </a:effectRef>
+          <a:fontRef idx="minor">
+            <a:schemeClr val="lt1"/>
+          </a:fontRef>
+        </p:style>
+        <p:txBody>
+          <a:bodyPr rtlCol="0" anchor="ctr"/>
+          <a:p>
+            <a:pPr algn="ctr"/>
+            <a:endParaRPr lang="en-US"/>
+          </a:p>
+        </p:txBody>
+      </p:sp>
+      <p:sp>
+        <p:nvSpPr>
+          <p:cNvPr id="52" name="Text Box 51"/>
+          <p:cNvSpPr txBox="1"/>
+          <p:nvPr>
+            <p:custDataLst>
+              <p:tags r:id="rId27"/>
+            </p:custDataLst>
+          </p:nvPr>
+        </p:nvSpPr>
+        <p:spPr>
+          <a:xfrm>
+            <a:off x="237490" y="720725"/>
+            <a:ext cx="1475105" cy="368300"/>
+          </a:xfrm>
+          <a:prstGeom prst="rect">
+            <a:avLst/>
+          </a:prstGeom>
+          <a:noFill/>
+        </p:spPr>
+        <p:txBody>
+          <a:bodyPr wrap="square" rtlCol="0">
+            <a:spAutoFit/>
+          </a:bodyPr>
+          <a:p>
+            <a:r>
+              <a:rPr lang="en-US"/>
+              <a:t>Example 2</a:t>
+            </a:r>
+            <a:endParaRPr lang="en-US"/>
+          </a:p>
+        </p:txBody>
+      </p:sp>
+      <p:sp>
+        <p:nvSpPr>
+          <p:cNvPr id="53" name="Text Box 52"/>
+          <p:cNvSpPr txBox="1"/>
+          <p:nvPr>
+            <p:custDataLst>
+              <p:tags r:id="rId28"/>
+            </p:custDataLst>
+          </p:nvPr>
+        </p:nvSpPr>
+        <p:spPr>
+          <a:xfrm>
+            <a:off x="348615" y="1370330"/>
+            <a:ext cx="1475105" cy="337185"/>
+          </a:xfrm>
+          <a:prstGeom prst="rect">
+            <a:avLst/>
+          </a:prstGeom>
+          <a:noFill/>
+        </p:spPr>
+        <p:txBody>
+          <a:bodyPr wrap="square" rtlCol="0">
+            <a:spAutoFit/>
+          </a:bodyPr>
+          <a:p>
+            <a:r>
+              <a:rPr lang="en-US" sz="1600" i="1">
+                <a:latin typeface="Calibri Italic" panose="020F0702030404030204" charset="0"/>
+                <a:cs typeface="Calibri Italic" panose="020F0702030404030204" charset="0"/>
+              </a:rPr>
+              <a:t>Pandas</a:t>
+            </a:r>
+            <a:endParaRPr lang="en-US" sz="1600" i="1">
+              <a:latin typeface="Calibri Italic" panose="020F0702030404030204" charset="0"/>
+              <a:cs typeface="Calibri Italic" panose="020F0702030404030204" charset="0"/>
+            </a:endParaRPr>
+          </a:p>
+        </p:txBody>
+      </p:sp>
+      <p:sp>
+        <p:nvSpPr>
+          <p:cNvPr id="54" name="Text Box 53"/>
+          <p:cNvSpPr txBox="1"/>
+          <p:nvPr>
+            <p:custDataLst>
+              <p:tags r:id="rId29"/>
+            </p:custDataLst>
+          </p:nvPr>
+        </p:nvSpPr>
+        <p:spPr>
+          <a:xfrm>
+            <a:off x="325120" y="3968115"/>
+            <a:ext cx="1725930" cy="337185"/>
+          </a:xfrm>
+          <a:prstGeom prst="rect">
+            <a:avLst/>
+          </a:prstGeom>
+          <a:noFill/>
+        </p:spPr>
+        <p:txBody>
+          <a:bodyPr wrap="square" rtlCol="0">
+            <a:spAutoFit/>
+          </a:bodyPr>
+          <a:p>
+            <a:r>
+              <a:rPr lang="en-US" sz="1600" i="1">
+                <a:latin typeface="Calibri Italic" panose="020F0702030404030204" charset="0"/>
+                <a:cs typeface="Calibri Italic" panose="020F0702030404030204" charset="0"/>
+              </a:rPr>
+              <a:t>MulDataFrame</a:t>
+            </a:r>
+            <a:endParaRPr lang="en-US" sz="1600" i="1">
+              <a:latin typeface="Calibri Italic" panose="020F0702030404030204" charset="0"/>
+              <a:cs typeface="Calibri Italic" panose="020F0702030404030204" charset="0"/>
+            </a:endParaRPr>
+          </a:p>
+        </p:txBody>
+      </p:sp>
+    </p:spTree>
+  </p:cSld>
+  <p:clrMapOvr>
+    <a:masterClrMapping/>
+  </p:clrMapOvr>
+</p:sld>
+</file>
+
 <file path=ppt/tags/tag1.xml><?xml version="1.0" encoding="utf-8"?>
+<p:tagLst xmlns:p="http://schemas.openxmlformats.org/presentationml/2006/main">
+  <p:tag name="KSO_WM_BEAUTIFY_FLAG" val=""/>
+</p:tagLst>
+</file>
+
+<file path=ppt/tags/tag10.xml><?xml version="1.0" encoding="utf-8"?>
+<p:tagLst xmlns:p="http://schemas.openxmlformats.org/presentationml/2006/main">
+  <p:tag name="KSO_WM_BEAUTIFY_FLAG" val=""/>
+</p:tagLst>
+</file>
+
+<file path=ppt/tags/tag11.xml><?xml version="1.0" encoding="utf-8"?>
+<p:tagLst xmlns:p="http://schemas.openxmlformats.org/presentationml/2006/main">
+  <p:tag name="KSO_WM_BEAUTIFY_FLAG" val=""/>
+</p:tagLst>
+</file>
+
+<file path=ppt/tags/tag12.xml><?xml version="1.0" encoding="utf-8"?>
+<p:tagLst xmlns:p="http://schemas.openxmlformats.org/presentationml/2006/main">
+  <p:tag name="KSO_WM_BEAUTIFY_FLAG" val=""/>
+</p:tagLst>
+</file>
+
+<file path=ppt/tags/tag13.xml><?xml version="1.0" encoding="utf-8"?>
+<p:tagLst xmlns:p="http://schemas.openxmlformats.org/presentationml/2006/main">
+  <p:tag name="KSO_WM_BEAUTIFY_FLAG" val=""/>
+</p:tagLst>
+</file>
+
+<file path=ppt/tags/tag14.xml><?xml version="1.0" encoding="utf-8"?>
+<p:tagLst xmlns:p="http://schemas.openxmlformats.org/presentationml/2006/main">
+  <p:tag name="KSO_WM_BEAUTIFY_FLAG" val=""/>
+</p:tagLst>
+</file>
+
+<file path=ppt/tags/tag15.xml><?xml version="1.0" encoding="utf-8"?>
+<p:tagLst xmlns:p="http://schemas.openxmlformats.org/presentationml/2006/main">
+  <p:tag name="KSO_WM_BEAUTIFY_FLAG" val=""/>
+</p:tagLst>
+</file>
+
+<file path=ppt/tags/tag16.xml><?xml version="1.0" encoding="utf-8"?>
+<p:tagLst xmlns:p="http://schemas.openxmlformats.org/presentationml/2006/main">
+  <p:tag name="KSO_WM_BEAUTIFY_FLAG" val=""/>
+</p:tagLst>
+</file>
+
+<file path=ppt/tags/tag17.xml><?xml version="1.0" encoding="utf-8"?>
+<p:tagLst xmlns:p="http://schemas.openxmlformats.org/presentationml/2006/main">
+  <p:tag name="KSO_WM_BEAUTIFY_FLAG" val=""/>
+</p:tagLst>
+</file>
+
+<file path=ppt/tags/tag18.xml><?xml version="1.0" encoding="utf-8"?>
+<p:tagLst xmlns:p="http://schemas.openxmlformats.org/presentationml/2006/main">
+  <p:tag name="KSO_WM_BEAUTIFY_FLAG" val=""/>
+</p:tagLst>
+</file>
+
+<file path=ppt/tags/tag19.xml><?xml version="1.0" encoding="utf-8"?>
 <p:tagLst xmlns:p="http://schemas.openxmlformats.org/presentationml/2006/main">
   <p:tag name="KSO_WM_BEAUTIFY_FLAG" val=""/>
 </p:tagLst>
@@ -9506,7 +13705,127 @@
 </p:tagLst>
 </file>
 
+<file path=ppt/tags/tag20.xml><?xml version="1.0" encoding="utf-8"?>
+<p:tagLst xmlns:p="http://schemas.openxmlformats.org/presentationml/2006/main">
+  <p:tag name="KSO_WM_BEAUTIFY_FLAG" val=""/>
+</p:tagLst>
+</file>
+
+<file path=ppt/tags/tag21.xml><?xml version="1.0" encoding="utf-8"?>
+<p:tagLst xmlns:p="http://schemas.openxmlformats.org/presentationml/2006/main">
+  <p:tag name="KSO_WM_BEAUTIFY_FLAG" val=""/>
+</p:tagLst>
+</file>
+
+<file path=ppt/tags/tag22.xml><?xml version="1.0" encoding="utf-8"?>
+<p:tagLst xmlns:p="http://schemas.openxmlformats.org/presentationml/2006/main">
+  <p:tag name="KSO_WM_BEAUTIFY_FLAG" val=""/>
+</p:tagLst>
+</file>
+
+<file path=ppt/tags/tag23.xml><?xml version="1.0" encoding="utf-8"?>
+<p:tagLst xmlns:p="http://schemas.openxmlformats.org/presentationml/2006/main">
+  <p:tag name="KSO_WM_BEAUTIFY_FLAG" val=""/>
+</p:tagLst>
+</file>
+
+<file path=ppt/tags/tag24.xml><?xml version="1.0" encoding="utf-8"?>
+<p:tagLst xmlns:p="http://schemas.openxmlformats.org/presentationml/2006/main">
+  <p:tag name="KSO_WM_BEAUTIFY_FLAG" val=""/>
+</p:tagLst>
+</file>
+
+<file path=ppt/tags/tag25.xml><?xml version="1.0" encoding="utf-8"?>
+<p:tagLst xmlns:p="http://schemas.openxmlformats.org/presentationml/2006/main">
+  <p:tag name="KSO_WM_BEAUTIFY_FLAG" val=""/>
+</p:tagLst>
+</file>
+
+<file path=ppt/tags/tag26.xml><?xml version="1.0" encoding="utf-8"?>
+<p:tagLst xmlns:p="http://schemas.openxmlformats.org/presentationml/2006/main">
+  <p:tag name="KSO_WM_BEAUTIFY_FLAG" val=""/>
+</p:tagLst>
+</file>
+
+<file path=ppt/tags/tag27.xml><?xml version="1.0" encoding="utf-8"?>
+<p:tagLst xmlns:p="http://schemas.openxmlformats.org/presentationml/2006/main">
+  <p:tag name="KSO_WM_BEAUTIFY_FLAG" val=""/>
+</p:tagLst>
+</file>
+
+<file path=ppt/tags/tag28.xml><?xml version="1.0" encoding="utf-8"?>
+<p:tagLst xmlns:p="http://schemas.openxmlformats.org/presentationml/2006/main">
+  <p:tag name="KSO_WM_BEAUTIFY_FLAG" val=""/>
+</p:tagLst>
+</file>
+
+<file path=ppt/tags/tag29.xml><?xml version="1.0" encoding="utf-8"?>
+<p:tagLst xmlns:p="http://schemas.openxmlformats.org/presentationml/2006/main">
+  <p:tag name="KSO_WM_BEAUTIFY_FLAG" val=""/>
+</p:tagLst>
+</file>
+
 <file path=ppt/tags/tag3.xml><?xml version="1.0" encoding="utf-8"?>
+<p:tagLst xmlns:p="http://schemas.openxmlformats.org/presentationml/2006/main">
+  <p:tag name="KSO_WM_BEAUTIFY_FLAG" val=""/>
+</p:tagLst>
+</file>
+
+<file path=ppt/tags/tag30.xml><?xml version="1.0" encoding="utf-8"?>
+<p:tagLst xmlns:p="http://schemas.openxmlformats.org/presentationml/2006/main">
+  <p:tag name="KSO_WM_BEAUTIFY_FLAG" val=""/>
+</p:tagLst>
+</file>
+
+<file path=ppt/tags/tag31.xml><?xml version="1.0" encoding="utf-8"?>
+<p:tagLst xmlns:p="http://schemas.openxmlformats.org/presentationml/2006/main">
+  <p:tag name="KSO_WM_BEAUTIFY_FLAG" val=""/>
+</p:tagLst>
+</file>
+
+<file path=ppt/tags/tag32.xml><?xml version="1.0" encoding="utf-8"?>
+<p:tagLst xmlns:p="http://schemas.openxmlformats.org/presentationml/2006/main">
+  <p:tag name="KSO_WM_BEAUTIFY_FLAG" val=""/>
+</p:tagLst>
+</file>
+
+<file path=ppt/tags/tag33.xml><?xml version="1.0" encoding="utf-8"?>
+<p:tagLst xmlns:p="http://schemas.openxmlformats.org/presentationml/2006/main">
+  <p:tag name="KSO_WM_BEAUTIFY_FLAG" val=""/>
+</p:tagLst>
+</file>
+
+<file path=ppt/tags/tag34.xml><?xml version="1.0" encoding="utf-8"?>
+<p:tagLst xmlns:p="http://schemas.openxmlformats.org/presentationml/2006/main">
+  <p:tag name="KSO_WM_BEAUTIFY_FLAG" val=""/>
+</p:tagLst>
+</file>
+
+<file path=ppt/tags/tag35.xml><?xml version="1.0" encoding="utf-8"?>
+<p:tagLst xmlns:p="http://schemas.openxmlformats.org/presentationml/2006/main">
+  <p:tag name="KSO_WM_BEAUTIFY_FLAG" val=""/>
+</p:tagLst>
+</file>
+
+<file path=ppt/tags/tag36.xml><?xml version="1.0" encoding="utf-8"?>
+<p:tagLst xmlns:p="http://schemas.openxmlformats.org/presentationml/2006/main">
+  <p:tag name="KSO_WM_BEAUTIFY_FLAG" val=""/>
+</p:tagLst>
+</file>
+
+<file path=ppt/tags/tag37.xml><?xml version="1.0" encoding="utf-8"?>
+<p:tagLst xmlns:p="http://schemas.openxmlformats.org/presentationml/2006/main">
+  <p:tag name="KSO_WM_BEAUTIFY_FLAG" val=""/>
+</p:tagLst>
+</file>
+
+<file path=ppt/tags/tag38.xml><?xml version="1.0" encoding="utf-8"?>
+<p:tagLst xmlns:p="http://schemas.openxmlformats.org/presentationml/2006/main">
+  <p:tag name="KSO_WM_BEAUTIFY_FLAG" val=""/>
+</p:tagLst>
+</file>
+
+<file path=ppt/tags/tag39.xml><?xml version="1.0" encoding="utf-8"?>
 <p:tagLst xmlns:p="http://schemas.openxmlformats.org/presentationml/2006/main">
   <p:tag name="KSO_WM_BEAUTIFY_FLAG" val=""/>
 </p:tagLst>
@@ -9518,13 +13837,151 @@
 </p:tagLst>
 </file>
 
+<file path=ppt/tags/tag40.xml><?xml version="1.0" encoding="utf-8"?>
+<p:tagLst xmlns:p="http://schemas.openxmlformats.org/presentationml/2006/main">
+  <p:tag name="KSO_WM_BEAUTIFY_FLAG" val=""/>
+</p:tagLst>
+</file>
+
+<file path=ppt/tags/tag41.xml><?xml version="1.0" encoding="utf-8"?>
+<p:tagLst xmlns:p="http://schemas.openxmlformats.org/presentationml/2006/main">
+  <p:tag name="KSO_WM_BEAUTIFY_FLAG" val=""/>
+</p:tagLst>
+</file>
+
+<file path=ppt/tags/tag42.xml><?xml version="1.0" encoding="utf-8"?>
+<p:tagLst xmlns:p="http://schemas.openxmlformats.org/presentationml/2006/main">
+  <p:tag name="KSO_WM_BEAUTIFY_FLAG" val=""/>
+</p:tagLst>
+</file>
+
+<file path=ppt/tags/tag43.xml><?xml version="1.0" encoding="utf-8"?>
+<p:tagLst xmlns:p="http://schemas.openxmlformats.org/presentationml/2006/main">
+  <p:tag name="KSO_WM_BEAUTIFY_FLAG" val=""/>
+</p:tagLst>
+</file>
+
+<file path=ppt/tags/tag44.xml><?xml version="1.0" encoding="utf-8"?>
+<p:tagLst xmlns:p="http://schemas.openxmlformats.org/presentationml/2006/main">
+  <p:tag name="KSO_WM_BEAUTIFY_FLAG" val=""/>
+</p:tagLst>
+</file>
+
+<file path=ppt/tags/tag45.xml><?xml version="1.0" encoding="utf-8"?>
+<p:tagLst xmlns:p="http://schemas.openxmlformats.org/presentationml/2006/main">
+  <p:tag name="KSO_WM_BEAUTIFY_FLAG" val=""/>
+</p:tagLst>
+</file>
+
+<file path=ppt/tags/tag46.xml><?xml version="1.0" encoding="utf-8"?>
+<p:tagLst xmlns:p="http://schemas.openxmlformats.org/presentationml/2006/main">
+  <p:tag name="KSO_WM_BEAUTIFY_FLAG" val=""/>
+</p:tagLst>
+</file>
+
+<file path=ppt/tags/tag47.xml><?xml version="1.0" encoding="utf-8"?>
+<p:tagLst xmlns:p="http://schemas.openxmlformats.org/presentationml/2006/main">
+  <p:tag name="KSO_WM_BEAUTIFY_FLAG" val=""/>
+</p:tagLst>
+</file>
+
+<file path=ppt/tags/tag48.xml><?xml version="1.0" encoding="utf-8"?>
+<p:tagLst xmlns:p="http://schemas.openxmlformats.org/presentationml/2006/main">
+  <p:tag name="KSO_WM_BEAUTIFY_FLAG" val=""/>
+</p:tagLst>
+</file>
+
+<file path=ppt/tags/tag49.xml><?xml version="1.0" encoding="utf-8"?>
+<p:tagLst xmlns:p="http://schemas.openxmlformats.org/presentationml/2006/main">
+  <p:tag name="KSO_WM_BEAUTIFY_FLAG" val=""/>
+</p:tagLst>
+</file>
+
 <file path=ppt/tags/tag5.xml><?xml version="1.0" encoding="utf-8"?>
 <p:tagLst xmlns:p="http://schemas.openxmlformats.org/presentationml/2006/main">
   <p:tag name="KSO_WM_BEAUTIFY_FLAG" val=""/>
 </p:tagLst>
 </file>
 
+<file path=ppt/tags/tag50.xml><?xml version="1.0" encoding="utf-8"?>
+<p:tagLst xmlns:p="http://schemas.openxmlformats.org/presentationml/2006/main">
+  <p:tag name="KSO_WM_BEAUTIFY_FLAG" val=""/>
+</p:tagLst>
+</file>
+
+<file path=ppt/tags/tag51.xml><?xml version="1.0" encoding="utf-8"?>
+<p:tagLst xmlns:p="http://schemas.openxmlformats.org/presentationml/2006/main">
+  <p:tag name="KSO_WM_BEAUTIFY_FLAG" val=""/>
+</p:tagLst>
+</file>
+
+<file path=ppt/tags/tag52.xml><?xml version="1.0" encoding="utf-8"?>
+<p:tagLst xmlns:p="http://schemas.openxmlformats.org/presentationml/2006/main">
+  <p:tag name="KSO_WM_BEAUTIFY_FLAG" val=""/>
+</p:tagLst>
+</file>
+
+<file path=ppt/tags/tag53.xml><?xml version="1.0" encoding="utf-8"?>
+<p:tagLst xmlns:p="http://schemas.openxmlformats.org/presentationml/2006/main">
+  <p:tag name="KSO_WM_BEAUTIFY_FLAG" val=""/>
+</p:tagLst>
+</file>
+
+<file path=ppt/tags/tag54.xml><?xml version="1.0" encoding="utf-8"?>
+<p:tagLst xmlns:p="http://schemas.openxmlformats.org/presentationml/2006/main">
+  <p:tag name="KSO_WM_BEAUTIFY_FLAG" val=""/>
+</p:tagLst>
+</file>
+
+<file path=ppt/tags/tag55.xml><?xml version="1.0" encoding="utf-8"?>
+<p:tagLst xmlns:p="http://schemas.openxmlformats.org/presentationml/2006/main">
+  <p:tag name="KSO_WM_BEAUTIFY_FLAG" val=""/>
+</p:tagLst>
+</file>
+
+<file path=ppt/tags/tag56.xml><?xml version="1.0" encoding="utf-8"?>
+<p:tagLst xmlns:p="http://schemas.openxmlformats.org/presentationml/2006/main">
+  <p:tag name="KSO_WM_BEAUTIFY_FLAG" val=""/>
+</p:tagLst>
+</file>
+
+<file path=ppt/tags/tag57.xml><?xml version="1.0" encoding="utf-8"?>
+<p:tagLst xmlns:p="http://schemas.openxmlformats.org/presentationml/2006/main">
+  <p:tag name="KSO_WM_BEAUTIFY_FLAG" val=""/>
+</p:tagLst>
+</file>
+
+<file path=ppt/tags/tag58.xml><?xml version="1.0" encoding="utf-8"?>
+<p:tagLst xmlns:p="http://schemas.openxmlformats.org/presentationml/2006/main">
+  <p:tag name="KSO_WM_BEAUTIFY_FLAG" val=""/>
+</p:tagLst>
+</file>
+
+<file path=ppt/tags/tag59.xml><?xml version="1.0" encoding="utf-8"?>
+<p:tagLst xmlns:p="http://schemas.openxmlformats.org/presentationml/2006/main">
+  <p:tag name="KSO_WM_BEAUTIFY_FLAG" val=""/>
+</p:tagLst>
+</file>
+
 <file path=ppt/tags/tag6.xml><?xml version="1.0" encoding="utf-8"?>
+<p:tagLst xmlns:p="http://schemas.openxmlformats.org/presentationml/2006/main">
+  <p:tag name="KSO_WM_BEAUTIFY_FLAG" val=""/>
+</p:tagLst>
+</file>
+
+<file path=ppt/tags/tag7.xml><?xml version="1.0" encoding="utf-8"?>
+<p:tagLst xmlns:p="http://schemas.openxmlformats.org/presentationml/2006/main">
+  <p:tag name="KSO_WM_BEAUTIFY_FLAG" val=""/>
+</p:tagLst>
+</file>
+
+<file path=ppt/tags/tag8.xml><?xml version="1.0" encoding="utf-8"?>
+<p:tagLst xmlns:p="http://schemas.openxmlformats.org/presentationml/2006/main">
+  <p:tag name="KSO_WM_BEAUTIFY_FLAG" val=""/>
+</p:tagLst>
+</file>
+
+<file path=ppt/tags/tag9.xml><?xml version="1.0" encoding="utf-8"?>
 <p:tagLst xmlns:p="http://schemas.openxmlformats.org/presentationml/2006/main">
   <p:tag name="KSO_WM_BEAUTIFY_FLAG" val=""/>
 </p:tagLst>

--- a/legacy/Presentation1.pptx
+++ b/legacy/Presentation1.pptx
@@ -8,12 +8,16 @@
     <p:notesMasterId r:id="rId4"/>
   </p:notesMasterIdLst>
   <p:handoutMasterIdLst>
-    <p:handoutMasterId r:id="rId7"/>
+    <p:handoutMasterId r:id="rId11"/>
   </p:handoutMasterIdLst>
   <p:sldIdLst>
     <p:sldId id="256" r:id="rId3"/>
-    <p:sldId id="257" r:id="rId5"/>
-    <p:sldId id="258" r:id="rId6"/>
+    <p:sldId id="261" r:id="rId5"/>
+    <p:sldId id="262" r:id="rId6"/>
+    <p:sldId id="259" r:id="rId7"/>
+    <p:sldId id="260" r:id="rId8"/>
+    <p:sldId id="257" r:id="rId9"/>
+    <p:sldId id="258" r:id="rId10"/>
   </p:sldIdLst>
   <p:sldSz cx="12192000" cy="6858000"/>
   <p:notesSz cx="7103745" cy="10234295"/>
@@ -115,12 +119,12 @@
   <p:extLst>
     <p:ext uri="{EFAFB233-063F-42B5-8137-9DF3F51BA10A}">
       <p15:sldGuideLst xmlns:p15="http://schemas.microsoft.com/office/powerpoint/2012/main">
-        <p15:guide id="1" orient="horz" pos="2155" userDrawn="1">
+        <p15:guide id="1" orient="horz" pos="2120" userDrawn="1">
           <p15:clr>
             <a:srgbClr val="A4A3A4"/>
           </p15:clr>
         </p15:guide>
-        <p15:guide id="2" pos="3839" userDrawn="1">
+        <p15:guide id="2" pos="3868" userDrawn="1">
           <p15:clr>
             <a:srgbClr val="A4A3A4"/>
           </p15:clr>
@@ -9506,6 +9510,3012 @@
         <p:nvPr/>
       </p:nvGrpSpPr>
       <p:grpSpPr/>
+      <p:graphicFrame>
+        <p:nvGraphicFramePr>
+          <p:cNvPr id="7" name="Table 6"/>
+          <p:cNvGraphicFramePr/>
+          <p:nvPr>
+            <p:custDataLst>
+              <p:tags r:id="rId1"/>
+            </p:custDataLst>
+          </p:nvPr>
+        </p:nvGraphicFramePr>
+        <p:xfrm>
+          <a:off x="4211320" y="3806825"/>
+          <a:ext cx="457200" cy="2194560"/>
+        </p:xfrm>
+        <a:graphic>
+          <a:graphicData uri="http://schemas.openxmlformats.org/drawingml/2006/table">
+            <a:tbl>
+              <a:tblPr firstRow="1" bandRow="1">
+                <a:tableStyleId>{2D5ABB26-0587-4C30-8999-92F81FD0307C}</a:tableStyleId>
+              </a:tblPr>
+              <a:tblGrid>
+                <a:gridCol w="457200"/>
+              </a:tblGrid>
+              <a:tr h="365760">
+                <a:tc>
+                  <a:txBody>
+                    <a:bodyPr/>
+                    <a:p>
+                      <a:pPr>
+                        <a:buNone/>
+                      </a:pPr>
+                      <a:endParaRPr lang="en-US"/>
+                    </a:p>
+                  </a:txBody>
+                  <a:tcPr>
+                    <a:lnL w="12700">
+                      <a:solidFill>
+                        <a:schemeClr val="tx1"/>
+                      </a:solidFill>
+                      <a:prstDash val="solid"/>
+                    </a:lnL>
+                    <a:lnR w="12700">
+                      <a:solidFill>
+                        <a:schemeClr val="tx1"/>
+                      </a:solidFill>
+                      <a:prstDash val="solid"/>
+                    </a:lnR>
+                    <a:lnT w="12700">
+                      <a:solidFill>
+                        <a:schemeClr val="tx1"/>
+                      </a:solidFill>
+                      <a:prstDash val="solid"/>
+                    </a:lnT>
+                    <a:lnB w="12700">
+                      <a:solidFill>
+                        <a:schemeClr val="tx1"/>
+                      </a:solidFill>
+                      <a:prstDash val="solid"/>
+                    </a:lnB>
+                    <a:solidFill>
+                      <a:schemeClr val="accent2">
+                        <a:lumMod val="60000"/>
+                        <a:lumOff val="40000"/>
+                      </a:schemeClr>
+                    </a:solidFill>
+                  </a:tcPr>
+                </a:tc>
+              </a:tr>
+              <a:tr h="365760">
+                <a:tc>
+                  <a:txBody>
+                    <a:bodyPr/>
+                    <a:p>
+                      <a:pPr>
+                        <a:buNone/>
+                      </a:pPr>
+                      <a:endParaRPr lang="en-US"/>
+                    </a:p>
+                  </a:txBody>
+                  <a:tcPr>
+                    <a:lnL w="12700">
+                      <a:solidFill>
+                        <a:schemeClr val="tx1"/>
+                      </a:solidFill>
+                      <a:prstDash val="solid"/>
+                    </a:lnL>
+                    <a:lnR w="12700">
+                      <a:solidFill>
+                        <a:schemeClr val="tx1"/>
+                      </a:solidFill>
+                      <a:prstDash val="solid"/>
+                    </a:lnR>
+                    <a:lnT w="12700">
+                      <a:solidFill>
+                        <a:schemeClr val="tx1"/>
+                      </a:solidFill>
+                      <a:prstDash val="solid"/>
+                    </a:lnT>
+                    <a:lnB w="12700">
+                      <a:solidFill>
+                        <a:schemeClr val="tx1"/>
+                      </a:solidFill>
+                      <a:prstDash val="solid"/>
+                    </a:lnB>
+                    <a:solidFill>
+                      <a:schemeClr val="accent2">
+                        <a:lumMod val="60000"/>
+                        <a:lumOff val="40000"/>
+                      </a:schemeClr>
+                    </a:solidFill>
+                  </a:tcPr>
+                </a:tc>
+              </a:tr>
+              <a:tr h="365760">
+                <a:tc>
+                  <a:txBody>
+                    <a:bodyPr/>
+                    <a:p>
+                      <a:pPr>
+                        <a:buNone/>
+                      </a:pPr>
+                      <a:endParaRPr lang="en-US"/>
+                    </a:p>
+                  </a:txBody>
+                  <a:tcPr>
+                    <a:lnL w="12700">
+                      <a:solidFill>
+                        <a:schemeClr val="tx1"/>
+                      </a:solidFill>
+                      <a:prstDash val="solid"/>
+                    </a:lnL>
+                    <a:lnR w="12700">
+                      <a:solidFill>
+                        <a:schemeClr val="tx1"/>
+                      </a:solidFill>
+                      <a:prstDash val="solid"/>
+                    </a:lnR>
+                    <a:lnT w="12700">
+                      <a:solidFill>
+                        <a:schemeClr val="tx1"/>
+                      </a:solidFill>
+                      <a:prstDash val="solid"/>
+                    </a:lnT>
+                    <a:lnB w="12700">
+                      <a:solidFill>
+                        <a:schemeClr val="tx1"/>
+                      </a:solidFill>
+                      <a:prstDash val="solid"/>
+                    </a:lnB>
+                    <a:solidFill>
+                      <a:schemeClr val="accent2">
+                        <a:lumMod val="60000"/>
+                        <a:lumOff val="40000"/>
+                      </a:schemeClr>
+                    </a:solidFill>
+                  </a:tcPr>
+                </a:tc>
+              </a:tr>
+            </a:tbl>
+          </a:graphicData>
+        </a:graphic>
+      </p:graphicFrame>
+      <p:graphicFrame>
+        <p:nvGraphicFramePr>
+          <p:cNvPr id="8" name="Table 7"/>
+          <p:cNvGraphicFramePr/>
+          <p:nvPr>
+            <p:custDataLst>
+              <p:tags r:id="rId2"/>
+            </p:custDataLst>
+          </p:nvPr>
+        </p:nvGraphicFramePr>
+        <p:xfrm>
+          <a:off x="4223385" y="1644650"/>
+          <a:ext cx="457200" cy="1097280"/>
+        </p:xfrm>
+        <a:graphic>
+          <a:graphicData uri="http://schemas.openxmlformats.org/drawingml/2006/table">
+            <a:tbl>
+              <a:tblPr firstRow="1" bandRow="1">
+                <a:tableStyleId>{2D5ABB26-0587-4C30-8999-92F81FD0307C}</a:tableStyleId>
+              </a:tblPr>
+              <a:tblGrid>
+                <a:gridCol w="457200"/>
+              </a:tblGrid>
+              <a:tr h="365760">
+                <a:tc>
+                  <a:txBody>
+                    <a:bodyPr/>
+                    <a:p>
+                      <a:pPr>
+                        <a:buNone/>
+                      </a:pPr>
+                      <a:endParaRPr lang="en-US"/>
+                    </a:p>
+                  </a:txBody>
+                  <a:tcPr>
+                    <a:lnL w="12700">
+                      <a:solidFill>
+                        <a:schemeClr val="tx1"/>
+                      </a:solidFill>
+                      <a:prstDash val="solid"/>
+                    </a:lnL>
+                    <a:lnR w="12700">
+                      <a:solidFill>
+                        <a:schemeClr val="tx1"/>
+                      </a:solidFill>
+                      <a:prstDash val="solid"/>
+                    </a:lnR>
+                    <a:lnT w="12700">
+                      <a:solidFill>
+                        <a:schemeClr val="tx1"/>
+                      </a:solidFill>
+                      <a:prstDash val="solid"/>
+                    </a:lnT>
+                    <a:lnB w="12700">
+                      <a:solidFill>
+                        <a:schemeClr val="tx1"/>
+                      </a:solidFill>
+                      <a:prstDash val="solid"/>
+                    </a:lnB>
+                    <a:solidFill>
+                      <a:schemeClr val="accent1">
+                        <a:lumMod val="60000"/>
+                        <a:lumOff val="40000"/>
+                      </a:schemeClr>
+                    </a:solidFill>
+                  </a:tcPr>
+                </a:tc>
+              </a:tr>
+              <a:tr h="365760">
+                <a:tc>
+                  <a:txBody>
+                    <a:bodyPr/>
+                    <a:p>
+                      <a:pPr>
+                        <a:buNone/>
+                      </a:pPr>
+                      <a:endParaRPr lang="en-US"/>
+                    </a:p>
+                  </a:txBody>
+                  <a:tcPr>
+                    <a:lnL w="12700">
+                      <a:solidFill>
+                        <a:schemeClr val="tx1"/>
+                      </a:solidFill>
+                      <a:prstDash val="solid"/>
+                    </a:lnL>
+                    <a:lnR w="12700">
+                      <a:solidFill>
+                        <a:schemeClr val="tx1"/>
+                      </a:solidFill>
+                      <a:prstDash val="solid"/>
+                    </a:lnR>
+                    <a:lnT w="12700">
+                      <a:solidFill>
+                        <a:schemeClr val="tx1"/>
+                      </a:solidFill>
+                      <a:prstDash val="solid"/>
+                    </a:lnT>
+                    <a:lnB w="12700">
+                      <a:solidFill>
+                        <a:schemeClr val="tx1"/>
+                      </a:solidFill>
+                      <a:prstDash val="solid"/>
+                    </a:lnB>
+                    <a:solidFill>
+                      <a:schemeClr val="accent1">
+                        <a:lumMod val="60000"/>
+                        <a:lumOff val="40000"/>
+                      </a:schemeClr>
+                    </a:solidFill>
+                  </a:tcPr>
+                </a:tc>
+              </a:tr>
+              <a:tr h="365760">
+                <a:tc>
+                  <a:txBody>
+                    <a:bodyPr/>
+                    <a:p>
+                      <a:pPr>
+                        <a:buNone/>
+                      </a:pPr>
+                      <a:endParaRPr lang="en-US"/>
+                    </a:p>
+                  </a:txBody>
+                  <a:tcPr>
+                    <a:lnL w="12700">
+                      <a:solidFill>
+                        <a:schemeClr val="tx1"/>
+                      </a:solidFill>
+                      <a:prstDash val="solid"/>
+                    </a:lnL>
+                    <a:lnR w="12700">
+                      <a:solidFill>
+                        <a:schemeClr val="tx1"/>
+                      </a:solidFill>
+                      <a:prstDash val="solid"/>
+                    </a:lnR>
+                    <a:lnT w="12700">
+                      <a:solidFill>
+                        <a:schemeClr val="tx1"/>
+                      </a:solidFill>
+                      <a:prstDash val="solid"/>
+                    </a:lnT>
+                    <a:lnB w="12700">
+                      <a:solidFill>
+                        <a:schemeClr val="tx1"/>
+                      </a:solidFill>
+                      <a:prstDash val="solid"/>
+                    </a:lnB>
+                    <a:solidFill>
+                      <a:schemeClr val="accent1">
+                        <a:lumMod val="60000"/>
+                        <a:lumOff val="40000"/>
+                      </a:schemeClr>
+                    </a:solidFill>
+                  </a:tcPr>
+                </a:tc>
+              </a:tr>
+            </a:tbl>
+          </a:graphicData>
+        </a:graphic>
+      </p:graphicFrame>
+      <p:graphicFrame>
+        <p:nvGraphicFramePr>
+          <p:cNvPr id="10" name="Table 9"/>
+          <p:cNvGraphicFramePr/>
+          <p:nvPr>
+            <p:custDataLst>
+              <p:tags r:id="rId3"/>
+            </p:custDataLst>
+          </p:nvPr>
+        </p:nvGraphicFramePr>
+        <p:xfrm>
+          <a:off x="3266440" y="3361055"/>
+          <a:ext cx="1371600" cy="365760"/>
+        </p:xfrm>
+        <a:graphic>
+          <a:graphicData uri="http://schemas.openxmlformats.org/drawingml/2006/table">
+            <a:tbl>
+              <a:tblPr firstRow="1" bandRow="1">
+                <a:tableStyleId>{2D5ABB26-0587-4C30-8999-92F81FD0307C}</a:tableStyleId>
+              </a:tblPr>
+              <a:tblGrid>
+                <a:gridCol w="457200"/>
+                <a:gridCol w="457200"/>
+              </a:tblGrid>
+              <a:tr h="365760">
+                <a:tc>
+                  <a:txBody>
+                    <a:bodyPr/>
+                    <a:p>
+                      <a:pPr>
+                        <a:buNone/>
+                      </a:pPr>
+                      <a:endParaRPr lang="en-US"/>
+                    </a:p>
+                  </a:txBody>
+                  <a:tcPr>
+                    <a:lnL w="12700">
+                      <a:solidFill>
+                        <a:schemeClr val="tx1"/>
+                      </a:solidFill>
+                      <a:prstDash val="solid"/>
+                    </a:lnL>
+                    <a:lnR w="12700">
+                      <a:solidFill>
+                        <a:schemeClr val="tx1"/>
+                      </a:solidFill>
+                      <a:prstDash val="solid"/>
+                    </a:lnR>
+                    <a:lnT w="12700">
+                      <a:solidFill>
+                        <a:schemeClr val="tx1"/>
+                      </a:solidFill>
+                      <a:prstDash val="solid"/>
+                    </a:lnT>
+                    <a:lnB w="12700">
+                      <a:solidFill>
+                        <a:schemeClr val="tx1"/>
+                      </a:solidFill>
+                      <a:prstDash val="solid"/>
+                    </a:lnB>
+                    <a:solidFill>
+                      <a:schemeClr val="accent1">
+                        <a:lumMod val="40000"/>
+                        <a:lumOff val="60000"/>
+                      </a:schemeClr>
+                    </a:solidFill>
+                  </a:tcPr>
+                </a:tc>
+                <a:tc>
+                  <a:txBody>
+                    <a:bodyPr/>
+                    <a:p>
+                      <a:pPr>
+                        <a:buNone/>
+                      </a:pPr>
+                      <a:endParaRPr lang="en-US"/>
+                    </a:p>
+                  </a:txBody>
+                  <a:tcPr>
+                    <a:lnL w="12700">
+                      <a:solidFill>
+                        <a:schemeClr val="tx1"/>
+                      </a:solidFill>
+                      <a:prstDash val="solid"/>
+                    </a:lnL>
+                    <a:lnR w="12700">
+                      <a:solidFill>
+                        <a:schemeClr val="tx1"/>
+                      </a:solidFill>
+                      <a:prstDash val="solid"/>
+                    </a:lnR>
+                    <a:lnT w="12700">
+                      <a:solidFill>
+                        <a:schemeClr val="tx1"/>
+                      </a:solidFill>
+                      <a:prstDash val="solid"/>
+                    </a:lnT>
+                    <a:lnB w="12700">
+                      <a:solidFill>
+                        <a:schemeClr val="tx1"/>
+                      </a:solidFill>
+                      <a:prstDash val="solid"/>
+                    </a:lnB>
+                    <a:solidFill>
+                      <a:schemeClr val="accent1">
+                        <a:lumMod val="40000"/>
+                        <a:lumOff val="60000"/>
+                      </a:schemeClr>
+                    </a:solidFill>
+                  </a:tcPr>
+                </a:tc>
+              </a:tr>
+            </a:tbl>
+          </a:graphicData>
+        </a:graphic>
+      </p:graphicFrame>
+      <p:graphicFrame>
+        <p:nvGraphicFramePr>
+          <p:cNvPr id="12" name="Table 11"/>
+          <p:cNvGraphicFramePr/>
+          <p:nvPr>
+            <p:custDataLst>
+              <p:tags r:id="rId4"/>
+            </p:custDataLst>
+          </p:nvPr>
+        </p:nvGraphicFramePr>
+        <p:xfrm>
+          <a:off x="4724400" y="2781935"/>
+          <a:ext cx="1373505" cy="365760"/>
+        </p:xfrm>
+        <a:graphic>
+          <a:graphicData uri="http://schemas.openxmlformats.org/drawingml/2006/table">
+            <a:tbl>
+              <a:tblPr firstRow="1" bandRow="1">
+                <a:tableStyleId>{2D5ABB26-0587-4C30-8999-92F81FD0307C}</a:tableStyleId>
+              </a:tblPr>
+              <a:tblGrid>
+                <a:gridCol w="457835"/>
+                <a:gridCol w="457835"/>
+                <a:gridCol w="457835"/>
+              </a:tblGrid>
+              <a:tr h="365760">
+                <a:tc>
+                  <a:txBody>
+                    <a:bodyPr/>
+                    <a:p>
+                      <a:pPr>
+                        <a:buNone/>
+                      </a:pPr>
+                      <a:endParaRPr lang="en-US">
+                        <a:solidFill>
+                          <a:srgbClr val="FF0000"/>
+                        </a:solidFill>
+                      </a:endParaRPr>
+                    </a:p>
+                  </a:txBody>
+                  <a:tcPr>
+                    <a:lnL w="12700">
+                      <a:solidFill>
+                        <a:schemeClr val="tx1"/>
+                      </a:solidFill>
+                      <a:prstDash val="solid"/>
+                    </a:lnL>
+                    <a:lnR w="12700">
+                      <a:solidFill>
+                        <a:schemeClr val="tx1"/>
+                      </a:solidFill>
+                      <a:prstDash val="solid"/>
+                    </a:lnR>
+                    <a:lnT w="12700">
+                      <a:solidFill>
+                        <a:schemeClr val="tx1"/>
+                      </a:solidFill>
+                      <a:prstDash val="solid"/>
+                    </a:lnT>
+                    <a:lnB w="12700">
+                      <a:solidFill>
+                        <a:schemeClr val="tx1"/>
+                      </a:solidFill>
+                      <a:prstDash val="solid"/>
+                    </a:lnB>
+                    <a:solidFill>
+                      <a:schemeClr val="accent2">
+                        <a:lumMod val="60000"/>
+                        <a:lumOff val="40000"/>
+                      </a:schemeClr>
+                    </a:solidFill>
+                  </a:tcPr>
+                </a:tc>
+                <a:tc>
+                  <a:txBody>
+                    <a:bodyPr/>
+                    <a:p>
+                      <a:pPr>
+                        <a:buNone/>
+                      </a:pPr>
+                      <a:endParaRPr lang="en-US">
+                        <a:solidFill>
+                          <a:srgbClr val="FF0000"/>
+                        </a:solidFill>
+                      </a:endParaRPr>
+                    </a:p>
+                  </a:txBody>
+                  <a:tcPr>
+                    <a:lnL w="12700">
+                      <a:solidFill>
+                        <a:schemeClr val="tx1"/>
+                      </a:solidFill>
+                      <a:prstDash val="solid"/>
+                    </a:lnL>
+                    <a:lnR w="12700">
+                      <a:solidFill>
+                        <a:schemeClr val="tx1"/>
+                      </a:solidFill>
+                      <a:prstDash val="solid"/>
+                    </a:lnR>
+                    <a:lnT w="12700">
+                      <a:solidFill>
+                        <a:schemeClr val="tx1"/>
+                      </a:solidFill>
+                      <a:prstDash val="solid"/>
+                    </a:lnT>
+                    <a:lnB w="12700">
+                      <a:solidFill>
+                        <a:schemeClr val="tx1"/>
+                      </a:solidFill>
+                      <a:prstDash val="solid"/>
+                    </a:lnB>
+                    <a:solidFill>
+                      <a:schemeClr val="accent2">
+                        <a:lumMod val="60000"/>
+                        <a:lumOff val="40000"/>
+                      </a:schemeClr>
+                    </a:solidFill>
+                  </a:tcPr>
+                </a:tc>
+                <a:tc>
+                  <a:txBody>
+                    <a:bodyPr/>
+                    <a:p>
+                      <a:pPr>
+                        <a:buNone/>
+                      </a:pPr>
+                      <a:endParaRPr lang="en-US">
+                        <a:solidFill>
+                          <a:srgbClr val="FF0000"/>
+                        </a:solidFill>
+                      </a:endParaRPr>
+                    </a:p>
+                  </a:txBody>
+                  <a:tcPr>
+                    <a:lnL w="12700">
+                      <a:solidFill>
+                        <a:schemeClr val="tx1"/>
+                      </a:solidFill>
+                      <a:prstDash val="solid"/>
+                    </a:lnL>
+                    <a:lnR w="12700">
+                      <a:solidFill>
+                        <a:schemeClr val="tx1"/>
+                      </a:solidFill>
+                      <a:prstDash val="solid"/>
+                    </a:lnR>
+                    <a:lnT w="12700">
+                      <a:solidFill>
+                        <a:schemeClr val="tx1"/>
+                      </a:solidFill>
+                      <a:prstDash val="solid"/>
+                    </a:lnT>
+                    <a:lnB w="12700">
+                      <a:solidFill>
+                        <a:schemeClr val="tx1"/>
+                      </a:solidFill>
+                      <a:prstDash val="solid"/>
+                    </a:lnB>
+                    <a:solidFill>
+                      <a:schemeClr val="accent2">
+                        <a:lumMod val="60000"/>
+                        <a:lumOff val="40000"/>
+                      </a:schemeClr>
+                    </a:solidFill>
+                  </a:tcPr>
+                </a:tc>
+              </a:tr>
+            </a:tbl>
+          </a:graphicData>
+        </a:graphic>
+      </p:graphicFrame>
+      <p:graphicFrame>
+        <p:nvGraphicFramePr>
+          <p:cNvPr id="19" name="Table 18"/>
+          <p:cNvGraphicFramePr/>
+          <p:nvPr>
+            <p:custDataLst>
+              <p:tags r:id="rId5"/>
+            </p:custDataLst>
+          </p:nvPr>
+        </p:nvGraphicFramePr>
+        <p:xfrm>
+          <a:off x="4724400" y="3374390"/>
+          <a:ext cx="1373505" cy="365760"/>
+        </p:xfrm>
+        <a:graphic>
+          <a:graphicData uri="http://schemas.openxmlformats.org/drawingml/2006/table">
+            <a:tbl>
+              <a:tblPr firstRow="1" bandRow="1">
+                <a:tableStyleId>{2D5ABB26-0587-4C30-8999-92F81FD0307C}</a:tableStyleId>
+              </a:tblPr>
+              <a:tblGrid>
+                <a:gridCol w="457835"/>
+                <a:gridCol w="457835"/>
+                <a:gridCol w="457835"/>
+              </a:tblGrid>
+              <a:tr h="365760">
+                <a:tc>
+                  <a:txBody>
+                    <a:bodyPr/>
+                    <a:p>
+                      <a:pPr>
+                        <a:buNone/>
+                      </a:pPr>
+                      <a:endParaRPr lang="en-US">
+                        <a:solidFill>
+                          <a:srgbClr val="FF0000"/>
+                        </a:solidFill>
+                      </a:endParaRPr>
+                    </a:p>
+                  </a:txBody>
+                  <a:tcPr>
+                    <a:lnL w="12700">
+                      <a:solidFill>
+                        <a:schemeClr val="tx1"/>
+                      </a:solidFill>
+                      <a:prstDash val="solid"/>
+                    </a:lnL>
+                    <a:lnR w="12700">
+                      <a:solidFill>
+                        <a:schemeClr val="tx1"/>
+                      </a:solidFill>
+                      <a:prstDash val="solid"/>
+                    </a:lnR>
+                    <a:lnT w="12700">
+                      <a:solidFill>
+                        <a:schemeClr val="tx1"/>
+                      </a:solidFill>
+                      <a:prstDash val="solid"/>
+                    </a:lnT>
+                    <a:lnB w="12700">
+                      <a:solidFill>
+                        <a:schemeClr val="tx1"/>
+                      </a:solidFill>
+                      <a:prstDash val="solid"/>
+                    </a:lnB>
+                    <a:solidFill>
+                      <a:schemeClr val="accent2">
+                        <a:lumMod val="60000"/>
+                        <a:lumOff val="40000"/>
+                      </a:schemeClr>
+                    </a:solidFill>
+                  </a:tcPr>
+                </a:tc>
+                <a:tc>
+                  <a:txBody>
+                    <a:bodyPr/>
+                    <a:p>
+                      <a:pPr>
+                        <a:buNone/>
+                      </a:pPr>
+                      <a:endParaRPr lang="en-US">
+                        <a:solidFill>
+                          <a:srgbClr val="FF0000"/>
+                        </a:solidFill>
+                      </a:endParaRPr>
+                    </a:p>
+                  </a:txBody>
+                  <a:tcPr>
+                    <a:lnL w="12700">
+                      <a:solidFill>
+                        <a:schemeClr val="tx1"/>
+                      </a:solidFill>
+                      <a:prstDash val="solid"/>
+                    </a:lnL>
+                    <a:lnR w="12700">
+                      <a:solidFill>
+                        <a:schemeClr val="tx1"/>
+                      </a:solidFill>
+                      <a:prstDash val="solid"/>
+                    </a:lnR>
+                    <a:lnT w="12700">
+                      <a:solidFill>
+                        <a:schemeClr val="tx1"/>
+                      </a:solidFill>
+                      <a:prstDash val="solid"/>
+                    </a:lnT>
+                    <a:lnB w="12700">
+                      <a:solidFill>
+                        <a:schemeClr val="tx1"/>
+                      </a:solidFill>
+                      <a:prstDash val="solid"/>
+                    </a:lnB>
+                    <a:solidFill>
+                      <a:schemeClr val="accent2">
+                        <a:lumMod val="60000"/>
+                        <a:lumOff val="40000"/>
+                      </a:schemeClr>
+                    </a:solidFill>
+                  </a:tcPr>
+                </a:tc>
+                <a:tc>
+                  <a:txBody>
+                    <a:bodyPr/>
+                    <a:p>
+                      <a:pPr>
+                        <a:buNone/>
+                      </a:pPr>
+                      <a:endParaRPr lang="en-US">
+                        <a:solidFill>
+                          <a:srgbClr val="FF0000"/>
+                        </a:solidFill>
+                      </a:endParaRPr>
+                    </a:p>
+                  </a:txBody>
+                  <a:tcPr>
+                    <a:lnL w="12700">
+                      <a:solidFill>
+                        <a:schemeClr val="tx1"/>
+                      </a:solidFill>
+                      <a:prstDash val="solid"/>
+                    </a:lnL>
+                    <a:lnR w="12700">
+                      <a:solidFill>
+                        <a:schemeClr val="tx1"/>
+                      </a:solidFill>
+                      <a:prstDash val="solid"/>
+                    </a:lnR>
+                    <a:lnT w="12700">
+                      <a:solidFill>
+                        <a:schemeClr val="tx1"/>
+                      </a:solidFill>
+                      <a:prstDash val="solid"/>
+                    </a:lnT>
+                    <a:lnB w="12700">
+                      <a:solidFill>
+                        <a:schemeClr val="tx1"/>
+                      </a:solidFill>
+                      <a:prstDash val="solid"/>
+                    </a:lnB>
+                    <a:solidFill>
+                      <a:schemeClr val="accent2">
+                        <a:lumMod val="60000"/>
+                        <a:lumOff val="40000"/>
+                      </a:schemeClr>
+                    </a:solidFill>
+                  </a:tcPr>
+                </a:tc>
+              </a:tr>
+            </a:tbl>
+          </a:graphicData>
+        </a:graphic>
+      </p:graphicFrame>
+      <p:graphicFrame>
+        <p:nvGraphicFramePr>
+          <p:cNvPr id="20" name="Table 19"/>
+          <p:cNvGraphicFramePr/>
+          <p:nvPr>
+            <p:custDataLst>
+              <p:tags r:id="rId6"/>
+            </p:custDataLst>
+          </p:nvPr>
+        </p:nvGraphicFramePr>
+        <p:xfrm>
+          <a:off x="2767330" y="3806825"/>
+          <a:ext cx="457200" cy="1097280"/>
+        </p:xfrm>
+        <a:graphic>
+          <a:graphicData uri="http://schemas.openxmlformats.org/drawingml/2006/table">
+            <a:tbl>
+              <a:tblPr firstRow="1" bandRow="1">
+                <a:tableStyleId>{2D5ABB26-0587-4C30-8999-92F81FD0307C}</a:tableStyleId>
+              </a:tblPr>
+              <a:tblGrid>
+                <a:gridCol w="457200"/>
+              </a:tblGrid>
+              <a:tr h="365760">
+                <a:tc>
+                  <a:txBody>
+                    <a:bodyPr/>
+                    <a:p>
+                      <a:pPr>
+                        <a:buNone/>
+                      </a:pPr>
+                      <a:endParaRPr lang="en-US"/>
+                    </a:p>
+                  </a:txBody>
+                  <a:tcPr>
+                    <a:lnL w="12700">
+                      <a:solidFill>
+                        <a:schemeClr val="tx1"/>
+                      </a:solidFill>
+                      <a:prstDash val="solid"/>
+                    </a:lnL>
+                    <a:lnR w="12700">
+                      <a:solidFill>
+                        <a:schemeClr val="tx1"/>
+                      </a:solidFill>
+                      <a:prstDash val="solid"/>
+                    </a:lnR>
+                    <a:lnT w="12700">
+                      <a:solidFill>
+                        <a:schemeClr val="tx1"/>
+                      </a:solidFill>
+                      <a:prstDash val="solid"/>
+                    </a:lnT>
+                    <a:lnB w="12700">
+                      <a:solidFill>
+                        <a:schemeClr val="tx1"/>
+                      </a:solidFill>
+                      <a:prstDash val="solid"/>
+                    </a:lnB>
+                    <a:solidFill>
+                      <a:schemeClr val="accent2">
+                        <a:lumMod val="60000"/>
+                        <a:lumOff val="40000"/>
+                      </a:schemeClr>
+                    </a:solidFill>
+                  </a:tcPr>
+                </a:tc>
+              </a:tr>
+              <a:tr h="365760">
+                <a:tc>
+                  <a:txBody>
+                    <a:bodyPr/>
+                    <a:p>
+                      <a:pPr>
+                        <a:buNone/>
+                      </a:pPr>
+                      <a:endParaRPr lang="en-US"/>
+                    </a:p>
+                  </a:txBody>
+                  <a:tcPr>
+                    <a:lnL w="12700">
+                      <a:solidFill>
+                        <a:schemeClr val="tx1"/>
+                      </a:solidFill>
+                      <a:prstDash val="solid"/>
+                    </a:lnL>
+                    <a:lnR w="12700">
+                      <a:solidFill>
+                        <a:schemeClr val="tx1"/>
+                      </a:solidFill>
+                      <a:prstDash val="solid"/>
+                    </a:lnR>
+                    <a:lnT w="12700">
+                      <a:solidFill>
+                        <a:schemeClr val="tx1"/>
+                      </a:solidFill>
+                      <a:prstDash val="solid"/>
+                    </a:lnT>
+                    <a:lnB w="12700">
+                      <a:solidFill>
+                        <a:schemeClr val="tx1"/>
+                      </a:solidFill>
+                      <a:prstDash val="solid"/>
+                    </a:lnB>
+                    <a:solidFill>
+                      <a:schemeClr val="accent2">
+                        <a:lumMod val="60000"/>
+                        <a:lumOff val="40000"/>
+                      </a:schemeClr>
+                    </a:solidFill>
+                  </a:tcPr>
+                </a:tc>
+              </a:tr>
+              <a:tr h="365760">
+                <a:tc>
+                  <a:txBody>
+                    <a:bodyPr/>
+                    <a:p>
+                      <a:pPr>
+                        <a:buNone/>
+                      </a:pPr>
+                      <a:endParaRPr lang="en-US"/>
+                    </a:p>
+                  </a:txBody>
+                  <a:tcPr>
+                    <a:lnL w="12700">
+                      <a:solidFill>
+                        <a:schemeClr val="tx1"/>
+                      </a:solidFill>
+                      <a:prstDash val="solid"/>
+                    </a:lnL>
+                    <a:lnR w="12700">
+                      <a:solidFill>
+                        <a:schemeClr val="tx1"/>
+                      </a:solidFill>
+                      <a:prstDash val="solid"/>
+                    </a:lnR>
+                    <a:lnT w="12700">
+                      <a:solidFill>
+                        <a:schemeClr val="tx1"/>
+                      </a:solidFill>
+                      <a:prstDash val="solid"/>
+                    </a:lnT>
+                    <a:lnB w="12700">
+                      <a:solidFill>
+                        <a:schemeClr val="tx1"/>
+                      </a:solidFill>
+                      <a:prstDash val="solid"/>
+                    </a:lnB>
+                    <a:solidFill>
+                      <a:schemeClr val="accent2">
+                        <a:lumMod val="60000"/>
+                        <a:lumOff val="40000"/>
+                      </a:schemeClr>
+                    </a:solidFill>
+                  </a:tcPr>
+                </a:tc>
+              </a:tr>
+            </a:tbl>
+          </a:graphicData>
+        </a:graphic>
+      </p:graphicFrame>
+    </p:spTree>
+  </p:cSld>
+  <p:clrMapOvr>
+    <a:masterClrMapping/>
+  </p:clrMapOvr>
+</p:sld>
+</file>
+
+<file path=ppt/slides/slide3.xml><?xml version="1.0" encoding="utf-8"?>
+<p:sld xmlns:a="http://schemas.openxmlformats.org/drawingml/2006/main" xmlns:r="http://schemas.openxmlformats.org/officeDocument/2006/relationships" xmlns:p="http://schemas.openxmlformats.org/presentationml/2006/main">
+  <p:cSld>
+    <p:spTree>
+      <p:nvGrpSpPr>
+        <p:cNvPr id="1" name=""/>
+        <p:cNvGrpSpPr/>
+        <p:nvPr/>
+      </p:nvGrpSpPr>
+      <p:grpSpPr/>
+      <p:sp>
+        <p:nvSpPr>
+          <p:cNvPr id="2" name="Rectangles 1"/>
+          <p:cNvSpPr/>
+          <p:nvPr/>
+        </p:nvSpPr>
+        <p:spPr>
+          <a:xfrm>
+            <a:off x="5747385" y="3028950"/>
+            <a:ext cx="1623060" cy="927735"/>
+          </a:xfrm>
+          <a:prstGeom prst="rect">
+            <a:avLst/>
+          </a:prstGeom>
+          <a:solidFill>
+            <a:schemeClr val="accent2"/>
+          </a:solidFill>
+          <a:ln>
+            <a:noFill/>
+          </a:ln>
+        </p:spPr>
+        <p:style>
+          <a:lnRef idx="2">
+            <a:schemeClr val="accent1">
+              <a:lumMod val="75000"/>
+            </a:schemeClr>
+          </a:lnRef>
+          <a:fillRef idx="1">
+            <a:schemeClr val="accent1"/>
+          </a:fillRef>
+          <a:effectRef idx="0">
+            <a:srgbClr val="FFFFFF"/>
+          </a:effectRef>
+          <a:fontRef idx="minor">
+            <a:schemeClr val="lt1"/>
+          </a:fontRef>
+        </p:style>
+        <p:txBody>
+          <a:bodyPr rtlCol="0" anchor="ctr"/>
+          <a:p>
+            <a:pPr algn="ctr"/>
+            <a:endParaRPr lang="en-US">
+              <a:solidFill>
+                <a:schemeClr val="accent2"/>
+              </a:solidFill>
+            </a:endParaRPr>
+          </a:p>
+        </p:txBody>
+      </p:sp>
+      <p:sp>
+        <p:nvSpPr>
+          <p:cNvPr id="4" name="Rectangles 3"/>
+          <p:cNvSpPr/>
+          <p:nvPr>
+            <p:custDataLst>
+              <p:tags r:id="rId1"/>
+            </p:custDataLst>
+          </p:nvPr>
+        </p:nvSpPr>
+        <p:spPr>
+          <a:xfrm rot="5400000">
+            <a:off x="4684395" y="4413885"/>
+            <a:ext cx="1356995" cy="464185"/>
+          </a:xfrm>
+          <a:prstGeom prst="rect">
+            <a:avLst/>
+          </a:prstGeom>
+          <a:solidFill>
+            <a:schemeClr val="accent2"/>
+          </a:solidFill>
+          <a:ln>
+            <a:noFill/>
+          </a:ln>
+        </p:spPr>
+        <p:style>
+          <a:lnRef idx="2">
+            <a:schemeClr val="accent1">
+              <a:lumMod val="75000"/>
+            </a:schemeClr>
+          </a:lnRef>
+          <a:fillRef idx="1">
+            <a:schemeClr val="accent1"/>
+          </a:fillRef>
+          <a:effectRef idx="0">
+            <a:srgbClr val="FFFFFF"/>
+          </a:effectRef>
+          <a:fontRef idx="minor">
+            <a:schemeClr val="lt1"/>
+          </a:fontRef>
+        </p:style>
+        <p:txBody>
+          <a:bodyPr rtlCol="0" anchor="ctr"/>
+          <a:p>
+            <a:pPr algn="ctr"/>
+            <a:endParaRPr lang="en-US">
+              <a:solidFill>
+                <a:schemeClr val="accent2"/>
+              </a:solidFill>
+            </a:endParaRPr>
+          </a:p>
+        </p:txBody>
+      </p:sp>
+      <p:sp>
+        <p:nvSpPr>
+          <p:cNvPr id="5" name="Rectangles 4"/>
+          <p:cNvSpPr/>
+          <p:nvPr>
+            <p:custDataLst>
+              <p:tags r:id="rId2"/>
+            </p:custDataLst>
+          </p:nvPr>
+        </p:nvSpPr>
+        <p:spPr>
+          <a:xfrm rot="10800000">
+            <a:off x="4025900" y="3234690"/>
+            <a:ext cx="1454785" cy="464185"/>
+          </a:xfrm>
+          <a:prstGeom prst="rect">
+            <a:avLst/>
+          </a:prstGeom>
+          <a:solidFill>
+            <a:schemeClr val="accent1"/>
+          </a:solidFill>
+          <a:ln>
+            <a:noFill/>
+          </a:ln>
+        </p:spPr>
+        <p:style>
+          <a:lnRef idx="2">
+            <a:schemeClr val="accent1">
+              <a:lumMod val="75000"/>
+            </a:schemeClr>
+          </a:lnRef>
+          <a:fillRef idx="1">
+            <a:schemeClr val="accent1"/>
+          </a:fillRef>
+          <a:effectRef idx="0">
+            <a:srgbClr val="FFFFFF"/>
+          </a:effectRef>
+          <a:fontRef idx="minor">
+            <a:schemeClr val="lt1"/>
+          </a:fontRef>
+        </p:style>
+        <p:txBody>
+          <a:bodyPr rtlCol="0" anchor="ctr"/>
+          <a:p>
+            <a:pPr algn="ctr"/>
+            <a:endParaRPr lang="en-US">
+              <a:solidFill>
+                <a:schemeClr val="accent2"/>
+              </a:solidFill>
+            </a:endParaRPr>
+          </a:p>
+        </p:txBody>
+      </p:sp>
+      <p:sp>
+        <p:nvSpPr>
+          <p:cNvPr id="6" name="Rectangles 5"/>
+          <p:cNvSpPr/>
+          <p:nvPr>
+            <p:custDataLst>
+              <p:tags r:id="rId3"/>
+            </p:custDataLst>
+          </p:nvPr>
+        </p:nvSpPr>
+        <p:spPr>
+          <a:xfrm rot="5400000">
+            <a:off x="4899025" y="2294255"/>
+            <a:ext cx="928370" cy="463550"/>
+          </a:xfrm>
+          <a:prstGeom prst="rect">
+            <a:avLst/>
+          </a:prstGeom>
+          <a:solidFill>
+            <a:schemeClr val="accent1"/>
+          </a:solidFill>
+        </p:spPr>
+        <p:style>
+          <a:lnRef idx="2">
+            <a:schemeClr val="accent1">
+              <a:lumMod val="75000"/>
+            </a:schemeClr>
+          </a:lnRef>
+          <a:fillRef idx="1">
+            <a:schemeClr val="accent1"/>
+          </a:fillRef>
+          <a:effectRef idx="0">
+            <a:srgbClr val="FFFFFF"/>
+          </a:effectRef>
+          <a:fontRef idx="minor">
+            <a:schemeClr val="lt1"/>
+          </a:fontRef>
+        </p:style>
+        <p:txBody>
+          <a:bodyPr rtlCol="0" anchor="ctr"/>
+          <a:p>
+            <a:pPr algn="ctr"/>
+            <a:endParaRPr lang="en-US">
+              <a:solidFill>
+                <a:schemeClr val="accent2"/>
+              </a:solidFill>
+            </a:endParaRPr>
+          </a:p>
+        </p:txBody>
+      </p:sp>
+      <p:sp>
+        <p:nvSpPr>
+          <p:cNvPr id="9" name="Rectangles 8"/>
+          <p:cNvSpPr/>
+          <p:nvPr>
+            <p:custDataLst>
+              <p:tags r:id="rId4"/>
+            </p:custDataLst>
+          </p:nvPr>
+        </p:nvSpPr>
+        <p:spPr>
+          <a:xfrm rot="5400000">
+            <a:off x="3846830" y="4424680"/>
+            <a:ext cx="1356995" cy="464185"/>
+          </a:xfrm>
+          <a:prstGeom prst="rect">
+            <a:avLst/>
+          </a:prstGeom>
+          <a:solidFill>
+            <a:schemeClr val="accent2"/>
+          </a:solidFill>
+          <a:ln>
+            <a:noFill/>
+          </a:ln>
+        </p:spPr>
+        <p:style>
+          <a:lnRef idx="2">
+            <a:schemeClr val="accent1">
+              <a:lumMod val="75000"/>
+            </a:schemeClr>
+          </a:lnRef>
+          <a:fillRef idx="1">
+            <a:schemeClr val="accent1"/>
+          </a:fillRef>
+          <a:effectRef idx="0">
+            <a:srgbClr val="FFFFFF"/>
+          </a:effectRef>
+          <a:fontRef idx="minor">
+            <a:schemeClr val="lt1"/>
+          </a:fontRef>
+        </p:style>
+        <p:txBody>
+          <a:bodyPr rtlCol="0" anchor="ctr"/>
+          <a:p>
+            <a:pPr algn="ctr"/>
+            <a:endParaRPr lang="en-US">
+              <a:solidFill>
+                <a:schemeClr val="accent2"/>
+              </a:solidFill>
+            </a:endParaRPr>
+          </a:p>
+        </p:txBody>
+      </p:sp>
+    </p:spTree>
+  </p:cSld>
+  <p:clrMapOvr>
+    <a:masterClrMapping/>
+  </p:clrMapOvr>
+</p:sld>
+</file>
+
+<file path=ppt/slides/slide4.xml><?xml version="1.0" encoding="utf-8"?>
+<p:sld xmlns:a="http://schemas.openxmlformats.org/drawingml/2006/main" xmlns:r="http://schemas.openxmlformats.org/officeDocument/2006/relationships" xmlns:p="http://schemas.openxmlformats.org/presentationml/2006/main">
+  <p:cSld>
+    <p:spTree>
+      <p:nvGrpSpPr>
+        <p:cNvPr id="1" name=""/>
+        <p:cNvGrpSpPr/>
+        <p:nvPr/>
+      </p:nvGrpSpPr>
+      <p:grpSpPr/>
+      <p:graphicFrame>
+        <p:nvGraphicFramePr>
+          <p:cNvPr id="7" name="Table 6"/>
+          <p:cNvGraphicFramePr/>
+          <p:nvPr>
+            <p:custDataLst>
+              <p:tags r:id="rId1"/>
+            </p:custDataLst>
+          </p:nvPr>
+        </p:nvGraphicFramePr>
+        <p:xfrm>
+          <a:off x="4211320" y="3780790"/>
+          <a:ext cx="457200" cy="2194560"/>
+        </p:xfrm>
+        <a:graphic>
+          <a:graphicData uri="http://schemas.openxmlformats.org/drawingml/2006/table">
+            <a:tbl>
+              <a:tblPr firstRow="1" bandRow="1">
+                <a:tableStyleId>{2D5ABB26-0587-4C30-8999-92F81FD0307C}</a:tableStyleId>
+              </a:tblPr>
+              <a:tblGrid>
+                <a:gridCol w="457200"/>
+              </a:tblGrid>
+              <a:tr h="365760">
+                <a:tc>
+                  <a:txBody>
+                    <a:bodyPr/>
+                    <a:p>
+                      <a:pPr>
+                        <a:buNone/>
+                      </a:pPr>
+                      <a:endParaRPr lang="en-US"/>
+                    </a:p>
+                  </a:txBody>
+                  <a:tcPr>
+                    <a:lnL w="12700">
+                      <a:solidFill>
+                        <a:schemeClr val="tx1"/>
+                      </a:solidFill>
+                      <a:prstDash val="solid"/>
+                    </a:lnL>
+                    <a:lnR w="12700">
+                      <a:solidFill>
+                        <a:schemeClr val="tx1"/>
+                      </a:solidFill>
+                      <a:prstDash val="solid"/>
+                    </a:lnR>
+                    <a:lnT w="12700">
+                      <a:solidFill>
+                        <a:schemeClr val="tx1"/>
+                      </a:solidFill>
+                      <a:prstDash val="solid"/>
+                    </a:lnT>
+                    <a:lnB w="12700">
+                      <a:solidFill>
+                        <a:schemeClr val="tx1"/>
+                      </a:solidFill>
+                      <a:prstDash val="solid"/>
+                    </a:lnB>
+                    <a:solidFill>
+                      <a:schemeClr val="accent2">
+                        <a:lumMod val="60000"/>
+                        <a:lumOff val="40000"/>
+                      </a:schemeClr>
+                    </a:solidFill>
+                  </a:tcPr>
+                </a:tc>
+              </a:tr>
+              <a:tr h="365760">
+                <a:tc>
+                  <a:txBody>
+                    <a:bodyPr/>
+                    <a:p>
+                      <a:pPr>
+                        <a:buNone/>
+                      </a:pPr>
+                      <a:endParaRPr lang="en-US"/>
+                    </a:p>
+                  </a:txBody>
+                  <a:tcPr>
+                    <a:lnL w="12700">
+                      <a:solidFill>
+                        <a:schemeClr val="tx1"/>
+                      </a:solidFill>
+                      <a:prstDash val="solid"/>
+                    </a:lnL>
+                    <a:lnR w="12700">
+                      <a:solidFill>
+                        <a:schemeClr val="tx1"/>
+                      </a:solidFill>
+                      <a:prstDash val="solid"/>
+                    </a:lnR>
+                    <a:lnT w="12700">
+                      <a:solidFill>
+                        <a:schemeClr val="tx1"/>
+                      </a:solidFill>
+                      <a:prstDash val="solid"/>
+                    </a:lnT>
+                    <a:lnB w="12700">
+                      <a:solidFill>
+                        <a:schemeClr val="tx1"/>
+                      </a:solidFill>
+                      <a:prstDash val="solid"/>
+                    </a:lnB>
+                    <a:solidFill>
+                      <a:schemeClr val="accent2">
+                        <a:lumMod val="60000"/>
+                        <a:lumOff val="40000"/>
+                      </a:schemeClr>
+                    </a:solidFill>
+                  </a:tcPr>
+                </a:tc>
+              </a:tr>
+              <a:tr h="365760">
+                <a:tc>
+                  <a:txBody>
+                    <a:bodyPr/>
+                    <a:p>
+                      <a:pPr>
+                        <a:buNone/>
+                      </a:pPr>
+                      <a:endParaRPr lang="en-US"/>
+                    </a:p>
+                  </a:txBody>
+                  <a:tcPr>
+                    <a:lnL w="12700">
+                      <a:solidFill>
+                        <a:schemeClr val="tx1"/>
+                      </a:solidFill>
+                      <a:prstDash val="solid"/>
+                    </a:lnL>
+                    <a:lnR w="12700">
+                      <a:solidFill>
+                        <a:schemeClr val="tx1"/>
+                      </a:solidFill>
+                      <a:prstDash val="solid"/>
+                    </a:lnR>
+                    <a:lnT w="12700">
+                      <a:solidFill>
+                        <a:schemeClr val="tx1"/>
+                      </a:solidFill>
+                      <a:prstDash val="solid"/>
+                    </a:lnT>
+                    <a:lnB w="12700">
+                      <a:solidFill>
+                        <a:schemeClr val="tx1"/>
+                      </a:solidFill>
+                      <a:prstDash val="solid"/>
+                    </a:lnB>
+                    <a:solidFill>
+                      <a:schemeClr val="accent2">
+                        <a:lumMod val="60000"/>
+                        <a:lumOff val="40000"/>
+                      </a:schemeClr>
+                    </a:solidFill>
+                  </a:tcPr>
+                </a:tc>
+              </a:tr>
+            </a:tbl>
+          </a:graphicData>
+        </a:graphic>
+      </p:graphicFrame>
+      <p:graphicFrame>
+        <p:nvGraphicFramePr>
+          <p:cNvPr id="8" name="Table 7"/>
+          <p:cNvGraphicFramePr/>
+          <p:nvPr>
+            <p:custDataLst>
+              <p:tags r:id="rId2"/>
+            </p:custDataLst>
+          </p:nvPr>
+        </p:nvGraphicFramePr>
+        <p:xfrm>
+          <a:off x="4185285" y="1644650"/>
+          <a:ext cx="457200" cy="1097280"/>
+        </p:xfrm>
+        <a:graphic>
+          <a:graphicData uri="http://schemas.openxmlformats.org/drawingml/2006/table">
+            <a:tbl>
+              <a:tblPr firstRow="1" bandRow="1">
+                <a:tableStyleId>{2D5ABB26-0587-4C30-8999-92F81FD0307C}</a:tableStyleId>
+              </a:tblPr>
+              <a:tblGrid>
+                <a:gridCol w="457200"/>
+              </a:tblGrid>
+              <a:tr h="365760">
+                <a:tc>
+                  <a:txBody>
+                    <a:bodyPr/>
+                    <a:p>
+                      <a:pPr>
+                        <a:buNone/>
+                      </a:pPr>
+                      <a:endParaRPr lang="en-US"/>
+                    </a:p>
+                  </a:txBody>
+                  <a:tcPr>
+                    <a:lnL w="12700">
+                      <a:solidFill>
+                        <a:schemeClr val="tx1"/>
+                      </a:solidFill>
+                      <a:prstDash val="solid"/>
+                    </a:lnL>
+                    <a:lnR w="12700">
+                      <a:solidFill>
+                        <a:schemeClr val="tx1"/>
+                      </a:solidFill>
+                      <a:prstDash val="solid"/>
+                    </a:lnR>
+                    <a:lnT w="12700">
+                      <a:solidFill>
+                        <a:schemeClr val="tx1"/>
+                      </a:solidFill>
+                      <a:prstDash val="solid"/>
+                    </a:lnT>
+                    <a:lnB w="12700">
+                      <a:solidFill>
+                        <a:schemeClr val="tx1"/>
+                      </a:solidFill>
+                      <a:prstDash val="solid"/>
+                    </a:lnB>
+                    <a:solidFill>
+                      <a:schemeClr val="accent1">
+                        <a:lumMod val="60000"/>
+                        <a:lumOff val="40000"/>
+                      </a:schemeClr>
+                    </a:solidFill>
+                  </a:tcPr>
+                </a:tc>
+              </a:tr>
+              <a:tr h="365760">
+                <a:tc>
+                  <a:txBody>
+                    <a:bodyPr/>
+                    <a:p>
+                      <a:pPr>
+                        <a:buNone/>
+                      </a:pPr>
+                      <a:endParaRPr lang="en-US"/>
+                    </a:p>
+                  </a:txBody>
+                  <a:tcPr>
+                    <a:lnL w="12700">
+                      <a:solidFill>
+                        <a:schemeClr val="tx1"/>
+                      </a:solidFill>
+                      <a:prstDash val="solid"/>
+                    </a:lnL>
+                    <a:lnR w="12700">
+                      <a:solidFill>
+                        <a:schemeClr val="tx1"/>
+                      </a:solidFill>
+                      <a:prstDash val="solid"/>
+                    </a:lnR>
+                    <a:lnT w="12700">
+                      <a:solidFill>
+                        <a:schemeClr val="tx1"/>
+                      </a:solidFill>
+                      <a:prstDash val="solid"/>
+                    </a:lnT>
+                    <a:lnB w="12700">
+                      <a:solidFill>
+                        <a:schemeClr val="tx1"/>
+                      </a:solidFill>
+                      <a:prstDash val="solid"/>
+                    </a:lnB>
+                    <a:solidFill>
+                      <a:schemeClr val="accent1">
+                        <a:lumMod val="60000"/>
+                        <a:lumOff val="40000"/>
+                      </a:schemeClr>
+                    </a:solidFill>
+                  </a:tcPr>
+                </a:tc>
+              </a:tr>
+              <a:tr h="365760">
+                <a:tc>
+                  <a:txBody>
+                    <a:bodyPr/>
+                    <a:p>
+                      <a:pPr>
+                        <a:buNone/>
+                      </a:pPr>
+                      <a:endParaRPr lang="en-US"/>
+                    </a:p>
+                  </a:txBody>
+                  <a:tcPr>
+                    <a:lnL w="12700">
+                      <a:solidFill>
+                        <a:schemeClr val="tx1"/>
+                      </a:solidFill>
+                      <a:prstDash val="solid"/>
+                    </a:lnL>
+                    <a:lnR w="12700">
+                      <a:solidFill>
+                        <a:schemeClr val="tx1"/>
+                      </a:solidFill>
+                      <a:prstDash val="solid"/>
+                    </a:lnR>
+                    <a:lnT w="12700">
+                      <a:solidFill>
+                        <a:schemeClr val="tx1"/>
+                      </a:solidFill>
+                      <a:prstDash val="solid"/>
+                    </a:lnT>
+                    <a:lnB w="12700">
+                      <a:solidFill>
+                        <a:schemeClr val="tx1"/>
+                      </a:solidFill>
+                      <a:prstDash val="solid"/>
+                    </a:lnB>
+                    <a:solidFill>
+                      <a:schemeClr val="accent1">
+                        <a:lumMod val="60000"/>
+                        <a:lumOff val="40000"/>
+                      </a:schemeClr>
+                    </a:solidFill>
+                  </a:tcPr>
+                </a:tc>
+              </a:tr>
+            </a:tbl>
+          </a:graphicData>
+        </a:graphic>
+      </p:graphicFrame>
+      <p:graphicFrame>
+        <p:nvGraphicFramePr>
+          <p:cNvPr id="10" name="Table 9"/>
+          <p:cNvGraphicFramePr/>
+          <p:nvPr>
+            <p:custDataLst>
+              <p:tags r:id="rId3"/>
+            </p:custDataLst>
+          </p:nvPr>
+        </p:nvGraphicFramePr>
+        <p:xfrm>
+          <a:off x="2832735" y="2871470"/>
+          <a:ext cx="1371600" cy="365760"/>
+        </p:xfrm>
+        <a:graphic>
+          <a:graphicData uri="http://schemas.openxmlformats.org/drawingml/2006/table">
+            <a:tbl>
+              <a:tblPr firstRow="1" bandRow="1">
+                <a:tableStyleId>{2D5ABB26-0587-4C30-8999-92F81FD0307C}</a:tableStyleId>
+              </a:tblPr>
+              <a:tblGrid>
+                <a:gridCol w="457200"/>
+                <a:gridCol w="457200"/>
+                <a:gridCol w="457200"/>
+              </a:tblGrid>
+              <a:tr h="365760">
+                <a:tc>
+                  <a:txBody>
+                    <a:bodyPr/>
+                    <a:p>
+                      <a:pPr>
+                        <a:buNone/>
+                      </a:pPr>
+                      <a:endParaRPr lang="en-US"/>
+                    </a:p>
+                  </a:txBody>
+                  <a:tcPr>
+                    <a:lnL w="12700">
+                      <a:solidFill>
+                        <a:schemeClr val="tx1"/>
+                      </a:solidFill>
+                      <a:prstDash val="solid"/>
+                    </a:lnL>
+                    <a:lnR w="12700">
+                      <a:solidFill>
+                        <a:schemeClr val="tx1"/>
+                      </a:solidFill>
+                      <a:prstDash val="solid"/>
+                    </a:lnR>
+                    <a:lnT w="12700">
+                      <a:solidFill>
+                        <a:schemeClr val="tx1"/>
+                      </a:solidFill>
+                      <a:prstDash val="solid"/>
+                    </a:lnT>
+                    <a:lnB w="12700">
+                      <a:solidFill>
+                        <a:schemeClr val="tx1"/>
+                      </a:solidFill>
+                      <a:prstDash val="solid"/>
+                    </a:lnB>
+                    <a:solidFill>
+                      <a:schemeClr val="accent1">
+                        <a:lumMod val="40000"/>
+                        <a:lumOff val="60000"/>
+                      </a:schemeClr>
+                    </a:solidFill>
+                  </a:tcPr>
+                </a:tc>
+                <a:tc>
+                  <a:txBody>
+                    <a:bodyPr/>
+                    <a:p>
+                      <a:pPr>
+                        <a:buNone/>
+                      </a:pPr>
+                      <a:endParaRPr lang="en-US"/>
+                    </a:p>
+                  </a:txBody>
+                  <a:tcPr>
+                    <a:lnL w="12700">
+                      <a:solidFill>
+                        <a:schemeClr val="tx1"/>
+                      </a:solidFill>
+                      <a:prstDash val="solid"/>
+                    </a:lnL>
+                    <a:lnR w="12700">
+                      <a:solidFill>
+                        <a:schemeClr val="tx1"/>
+                      </a:solidFill>
+                      <a:prstDash val="solid"/>
+                    </a:lnR>
+                    <a:lnT w="12700">
+                      <a:solidFill>
+                        <a:schemeClr val="tx1"/>
+                      </a:solidFill>
+                      <a:prstDash val="solid"/>
+                    </a:lnT>
+                    <a:lnB w="12700">
+                      <a:solidFill>
+                        <a:schemeClr val="tx1"/>
+                      </a:solidFill>
+                      <a:prstDash val="solid"/>
+                    </a:lnB>
+                    <a:solidFill>
+                      <a:schemeClr val="accent1">
+                        <a:lumMod val="40000"/>
+                        <a:lumOff val="60000"/>
+                      </a:schemeClr>
+                    </a:solidFill>
+                  </a:tcPr>
+                </a:tc>
+                <a:tc>
+                  <a:txBody>
+                    <a:bodyPr/>
+                    <a:p>
+                      <a:pPr>
+                        <a:buNone/>
+                      </a:pPr>
+                      <a:endParaRPr lang="en-US"/>
+                    </a:p>
+                  </a:txBody>
+                  <a:tcPr>
+                    <a:lnL w="12700">
+                      <a:solidFill>
+                        <a:schemeClr val="tx1"/>
+                      </a:solidFill>
+                      <a:prstDash val="solid"/>
+                    </a:lnL>
+                    <a:lnR w="12700">
+                      <a:solidFill>
+                        <a:schemeClr val="tx1"/>
+                      </a:solidFill>
+                      <a:prstDash val="solid"/>
+                    </a:lnR>
+                    <a:lnT w="12700">
+                      <a:solidFill>
+                        <a:schemeClr val="tx1"/>
+                      </a:solidFill>
+                      <a:prstDash val="solid"/>
+                    </a:lnT>
+                    <a:lnB w="12700">
+                      <a:solidFill>
+                        <a:schemeClr val="tx1"/>
+                      </a:solidFill>
+                      <a:prstDash val="solid"/>
+                    </a:lnB>
+                    <a:solidFill>
+                      <a:schemeClr val="accent1">
+                        <a:lumMod val="40000"/>
+                        <a:lumOff val="60000"/>
+                      </a:schemeClr>
+                    </a:solidFill>
+                  </a:tcPr>
+                </a:tc>
+              </a:tr>
+            </a:tbl>
+          </a:graphicData>
+        </a:graphic>
+      </p:graphicFrame>
+      <p:graphicFrame>
+        <p:nvGraphicFramePr>
+          <p:cNvPr id="12" name="Table 11"/>
+          <p:cNvGraphicFramePr/>
+          <p:nvPr>
+            <p:custDataLst>
+              <p:tags r:id="rId4"/>
+            </p:custDataLst>
+          </p:nvPr>
+        </p:nvGraphicFramePr>
+        <p:xfrm>
+          <a:off x="4724400" y="2781935"/>
+          <a:ext cx="1373505" cy="365760"/>
+        </p:xfrm>
+        <a:graphic>
+          <a:graphicData uri="http://schemas.openxmlformats.org/drawingml/2006/table">
+            <a:tbl>
+              <a:tblPr firstRow="1" bandRow="1">
+                <a:tableStyleId>{2D5ABB26-0587-4C30-8999-92F81FD0307C}</a:tableStyleId>
+              </a:tblPr>
+              <a:tblGrid>
+                <a:gridCol w="457835"/>
+                <a:gridCol w="457835"/>
+                <a:gridCol w="457835"/>
+              </a:tblGrid>
+              <a:tr h="365760">
+                <a:tc>
+                  <a:txBody>
+                    <a:bodyPr/>
+                    <a:p>
+                      <a:pPr>
+                        <a:buNone/>
+                      </a:pPr>
+                      <a:endParaRPr lang="en-US">
+                        <a:solidFill>
+                          <a:srgbClr val="FF0000"/>
+                        </a:solidFill>
+                      </a:endParaRPr>
+                    </a:p>
+                  </a:txBody>
+                  <a:tcPr>
+                    <a:lnL w="12700">
+                      <a:solidFill>
+                        <a:schemeClr val="tx1"/>
+                      </a:solidFill>
+                      <a:prstDash val="solid"/>
+                    </a:lnL>
+                    <a:lnR w="12700">
+                      <a:solidFill>
+                        <a:schemeClr val="tx1"/>
+                      </a:solidFill>
+                      <a:prstDash val="solid"/>
+                    </a:lnR>
+                    <a:lnT w="12700">
+                      <a:solidFill>
+                        <a:schemeClr val="tx1"/>
+                      </a:solidFill>
+                      <a:prstDash val="solid"/>
+                    </a:lnT>
+                    <a:lnB w="12700">
+                      <a:solidFill>
+                        <a:schemeClr val="tx1"/>
+                      </a:solidFill>
+                      <a:prstDash val="solid"/>
+                    </a:lnB>
+                    <a:solidFill>
+                      <a:schemeClr val="accent2">
+                        <a:lumMod val="60000"/>
+                        <a:lumOff val="40000"/>
+                      </a:schemeClr>
+                    </a:solidFill>
+                  </a:tcPr>
+                </a:tc>
+                <a:tc>
+                  <a:txBody>
+                    <a:bodyPr/>
+                    <a:p>
+                      <a:pPr>
+                        <a:buNone/>
+                      </a:pPr>
+                      <a:endParaRPr lang="en-US">
+                        <a:solidFill>
+                          <a:srgbClr val="FF0000"/>
+                        </a:solidFill>
+                      </a:endParaRPr>
+                    </a:p>
+                  </a:txBody>
+                  <a:tcPr>
+                    <a:lnL w="12700">
+                      <a:solidFill>
+                        <a:schemeClr val="tx1"/>
+                      </a:solidFill>
+                      <a:prstDash val="solid"/>
+                    </a:lnL>
+                    <a:lnR w="12700">
+                      <a:solidFill>
+                        <a:schemeClr val="tx1"/>
+                      </a:solidFill>
+                      <a:prstDash val="solid"/>
+                    </a:lnR>
+                    <a:lnT w="12700">
+                      <a:solidFill>
+                        <a:schemeClr val="tx1"/>
+                      </a:solidFill>
+                      <a:prstDash val="solid"/>
+                    </a:lnT>
+                    <a:lnB w="12700">
+                      <a:solidFill>
+                        <a:schemeClr val="tx1"/>
+                      </a:solidFill>
+                      <a:prstDash val="solid"/>
+                    </a:lnB>
+                    <a:solidFill>
+                      <a:schemeClr val="accent2">
+                        <a:lumMod val="60000"/>
+                        <a:lumOff val="40000"/>
+                      </a:schemeClr>
+                    </a:solidFill>
+                  </a:tcPr>
+                </a:tc>
+                <a:tc>
+                  <a:txBody>
+                    <a:bodyPr/>
+                    <a:p>
+                      <a:pPr>
+                        <a:buNone/>
+                      </a:pPr>
+                      <a:endParaRPr lang="en-US">
+                        <a:solidFill>
+                          <a:srgbClr val="FF0000"/>
+                        </a:solidFill>
+                      </a:endParaRPr>
+                    </a:p>
+                  </a:txBody>
+                  <a:tcPr>
+                    <a:lnL w="12700">
+                      <a:solidFill>
+                        <a:schemeClr val="tx1"/>
+                      </a:solidFill>
+                      <a:prstDash val="solid"/>
+                    </a:lnL>
+                    <a:lnR w="12700">
+                      <a:solidFill>
+                        <a:schemeClr val="tx1"/>
+                      </a:solidFill>
+                      <a:prstDash val="solid"/>
+                    </a:lnR>
+                    <a:lnT w="12700">
+                      <a:solidFill>
+                        <a:schemeClr val="tx1"/>
+                      </a:solidFill>
+                      <a:prstDash val="solid"/>
+                    </a:lnT>
+                    <a:lnB w="12700">
+                      <a:solidFill>
+                        <a:schemeClr val="tx1"/>
+                      </a:solidFill>
+                      <a:prstDash val="solid"/>
+                    </a:lnB>
+                    <a:solidFill>
+                      <a:schemeClr val="accent2">
+                        <a:lumMod val="60000"/>
+                        <a:lumOff val="40000"/>
+                      </a:schemeClr>
+                    </a:solidFill>
+                  </a:tcPr>
+                </a:tc>
+              </a:tr>
+            </a:tbl>
+          </a:graphicData>
+        </a:graphic>
+      </p:graphicFrame>
+      <p:graphicFrame>
+        <p:nvGraphicFramePr>
+          <p:cNvPr id="19" name="Table 18"/>
+          <p:cNvGraphicFramePr/>
+          <p:nvPr>
+            <p:custDataLst>
+              <p:tags r:id="rId5"/>
+            </p:custDataLst>
+          </p:nvPr>
+        </p:nvGraphicFramePr>
+        <p:xfrm>
+          <a:off x="4724400" y="3374390"/>
+          <a:ext cx="1373505" cy="365760"/>
+        </p:xfrm>
+        <a:graphic>
+          <a:graphicData uri="http://schemas.openxmlformats.org/drawingml/2006/table">
+            <a:tbl>
+              <a:tblPr firstRow="1" bandRow="1">
+                <a:tableStyleId>{2D5ABB26-0587-4C30-8999-92F81FD0307C}</a:tableStyleId>
+              </a:tblPr>
+              <a:tblGrid>
+                <a:gridCol w="457835"/>
+                <a:gridCol w="457835"/>
+                <a:gridCol w="457835"/>
+              </a:tblGrid>
+              <a:tr h="365760">
+                <a:tc>
+                  <a:txBody>
+                    <a:bodyPr/>
+                    <a:p>
+                      <a:pPr>
+                        <a:buNone/>
+                      </a:pPr>
+                      <a:endParaRPr lang="en-US">
+                        <a:solidFill>
+                          <a:srgbClr val="FF0000"/>
+                        </a:solidFill>
+                      </a:endParaRPr>
+                    </a:p>
+                  </a:txBody>
+                  <a:tcPr>
+                    <a:lnL w="12700">
+                      <a:solidFill>
+                        <a:schemeClr val="tx1"/>
+                      </a:solidFill>
+                      <a:prstDash val="solid"/>
+                    </a:lnL>
+                    <a:lnR w="12700">
+                      <a:solidFill>
+                        <a:schemeClr val="tx1"/>
+                      </a:solidFill>
+                      <a:prstDash val="solid"/>
+                    </a:lnR>
+                    <a:lnT w="12700">
+                      <a:solidFill>
+                        <a:schemeClr val="tx1"/>
+                      </a:solidFill>
+                      <a:prstDash val="solid"/>
+                    </a:lnT>
+                    <a:lnB w="12700">
+                      <a:solidFill>
+                        <a:schemeClr val="tx1"/>
+                      </a:solidFill>
+                      <a:prstDash val="solid"/>
+                    </a:lnB>
+                    <a:solidFill>
+                      <a:schemeClr val="accent2">
+                        <a:lumMod val="60000"/>
+                        <a:lumOff val="40000"/>
+                      </a:schemeClr>
+                    </a:solidFill>
+                  </a:tcPr>
+                </a:tc>
+                <a:tc>
+                  <a:txBody>
+                    <a:bodyPr/>
+                    <a:p>
+                      <a:pPr>
+                        <a:buNone/>
+                      </a:pPr>
+                      <a:endParaRPr lang="en-US">
+                        <a:solidFill>
+                          <a:srgbClr val="FF0000"/>
+                        </a:solidFill>
+                      </a:endParaRPr>
+                    </a:p>
+                  </a:txBody>
+                  <a:tcPr>
+                    <a:lnL w="12700">
+                      <a:solidFill>
+                        <a:schemeClr val="tx1"/>
+                      </a:solidFill>
+                      <a:prstDash val="solid"/>
+                    </a:lnL>
+                    <a:lnR w="12700">
+                      <a:solidFill>
+                        <a:schemeClr val="tx1"/>
+                      </a:solidFill>
+                      <a:prstDash val="solid"/>
+                    </a:lnR>
+                    <a:lnT w="12700">
+                      <a:solidFill>
+                        <a:schemeClr val="tx1"/>
+                      </a:solidFill>
+                      <a:prstDash val="solid"/>
+                    </a:lnT>
+                    <a:lnB w="12700">
+                      <a:solidFill>
+                        <a:schemeClr val="tx1"/>
+                      </a:solidFill>
+                      <a:prstDash val="solid"/>
+                    </a:lnB>
+                    <a:solidFill>
+                      <a:schemeClr val="accent2">
+                        <a:lumMod val="60000"/>
+                        <a:lumOff val="40000"/>
+                      </a:schemeClr>
+                    </a:solidFill>
+                  </a:tcPr>
+                </a:tc>
+                <a:tc>
+                  <a:txBody>
+                    <a:bodyPr/>
+                    <a:p>
+                      <a:pPr>
+                        <a:buNone/>
+                      </a:pPr>
+                      <a:endParaRPr lang="en-US">
+                        <a:solidFill>
+                          <a:srgbClr val="FF0000"/>
+                        </a:solidFill>
+                      </a:endParaRPr>
+                    </a:p>
+                  </a:txBody>
+                  <a:tcPr>
+                    <a:lnL w="12700">
+                      <a:solidFill>
+                        <a:schemeClr val="tx1"/>
+                      </a:solidFill>
+                      <a:prstDash val="solid"/>
+                    </a:lnL>
+                    <a:lnR w="12700">
+                      <a:solidFill>
+                        <a:schemeClr val="tx1"/>
+                      </a:solidFill>
+                      <a:prstDash val="solid"/>
+                    </a:lnR>
+                    <a:lnT w="12700">
+                      <a:solidFill>
+                        <a:schemeClr val="tx1"/>
+                      </a:solidFill>
+                      <a:prstDash val="solid"/>
+                    </a:lnT>
+                    <a:lnB w="12700">
+                      <a:solidFill>
+                        <a:schemeClr val="tx1"/>
+                      </a:solidFill>
+                      <a:prstDash val="solid"/>
+                    </a:lnB>
+                    <a:solidFill>
+                      <a:schemeClr val="accent2">
+                        <a:lumMod val="60000"/>
+                        <a:lumOff val="40000"/>
+                      </a:schemeClr>
+                    </a:solidFill>
+                  </a:tcPr>
+                </a:tc>
+              </a:tr>
+            </a:tbl>
+          </a:graphicData>
+        </a:graphic>
+      </p:graphicFrame>
+      <p:graphicFrame>
+        <p:nvGraphicFramePr>
+          <p:cNvPr id="20" name="Table 19"/>
+          <p:cNvGraphicFramePr/>
+          <p:nvPr>
+            <p:custDataLst>
+              <p:tags r:id="rId6"/>
+            </p:custDataLst>
+          </p:nvPr>
+        </p:nvGraphicFramePr>
+        <p:xfrm>
+          <a:off x="7769225" y="3374390"/>
+          <a:ext cx="457200" cy="2194560"/>
+        </p:xfrm>
+        <a:graphic>
+          <a:graphicData uri="http://schemas.openxmlformats.org/drawingml/2006/table">
+            <a:tbl>
+              <a:tblPr firstRow="1" bandRow="1">
+                <a:tableStyleId>{2D5ABB26-0587-4C30-8999-92F81FD0307C}</a:tableStyleId>
+              </a:tblPr>
+              <a:tblGrid>
+                <a:gridCol w="457200"/>
+              </a:tblGrid>
+              <a:tr h="365760">
+                <a:tc>
+                  <a:txBody>
+                    <a:bodyPr/>
+                    <a:p>
+                      <a:pPr>
+                        <a:buNone/>
+                      </a:pPr>
+                      <a:endParaRPr lang="en-US"/>
+                    </a:p>
+                  </a:txBody>
+                  <a:tcPr>
+                    <a:lnL w="12700">
+                      <a:solidFill>
+                        <a:schemeClr val="tx1"/>
+                      </a:solidFill>
+                      <a:prstDash val="solid"/>
+                    </a:lnL>
+                    <a:lnR w="12700">
+                      <a:solidFill>
+                        <a:schemeClr val="tx1"/>
+                      </a:solidFill>
+                      <a:prstDash val="solid"/>
+                    </a:lnR>
+                    <a:lnT w="12700">
+                      <a:solidFill>
+                        <a:schemeClr val="tx1"/>
+                      </a:solidFill>
+                      <a:prstDash val="solid"/>
+                    </a:lnT>
+                    <a:lnB w="12700">
+                      <a:solidFill>
+                        <a:schemeClr val="tx1"/>
+                      </a:solidFill>
+                      <a:prstDash val="solid"/>
+                    </a:lnB>
+                    <a:solidFill>
+                      <a:schemeClr val="accent2">
+                        <a:lumMod val="60000"/>
+                        <a:lumOff val="40000"/>
+                      </a:schemeClr>
+                    </a:solidFill>
+                  </a:tcPr>
+                </a:tc>
+              </a:tr>
+              <a:tr h="365760">
+                <a:tc>
+                  <a:txBody>
+                    <a:bodyPr/>
+                    <a:p>
+                      <a:pPr>
+                        <a:buNone/>
+                      </a:pPr>
+                      <a:endParaRPr lang="en-US"/>
+                    </a:p>
+                  </a:txBody>
+                  <a:tcPr>
+                    <a:lnL w="12700">
+                      <a:solidFill>
+                        <a:schemeClr val="tx1"/>
+                      </a:solidFill>
+                      <a:prstDash val="solid"/>
+                    </a:lnL>
+                    <a:lnR w="12700">
+                      <a:solidFill>
+                        <a:schemeClr val="tx1"/>
+                      </a:solidFill>
+                      <a:prstDash val="solid"/>
+                    </a:lnR>
+                    <a:lnT w="12700">
+                      <a:solidFill>
+                        <a:schemeClr val="tx1"/>
+                      </a:solidFill>
+                      <a:prstDash val="solid"/>
+                    </a:lnT>
+                    <a:lnB w="12700">
+                      <a:solidFill>
+                        <a:schemeClr val="tx1"/>
+                      </a:solidFill>
+                      <a:prstDash val="solid"/>
+                    </a:lnB>
+                    <a:solidFill>
+                      <a:schemeClr val="accent2">
+                        <a:lumMod val="60000"/>
+                        <a:lumOff val="40000"/>
+                      </a:schemeClr>
+                    </a:solidFill>
+                  </a:tcPr>
+                </a:tc>
+              </a:tr>
+              <a:tr h="365760">
+                <a:tc>
+                  <a:txBody>
+                    <a:bodyPr/>
+                    <a:p>
+                      <a:pPr>
+                        <a:buNone/>
+                      </a:pPr>
+                      <a:endParaRPr lang="en-US"/>
+                    </a:p>
+                  </a:txBody>
+                  <a:tcPr>
+                    <a:lnL w="12700">
+                      <a:solidFill>
+                        <a:schemeClr val="tx1"/>
+                      </a:solidFill>
+                      <a:prstDash val="solid"/>
+                    </a:lnL>
+                    <a:lnR w="12700">
+                      <a:solidFill>
+                        <a:schemeClr val="tx1"/>
+                      </a:solidFill>
+                      <a:prstDash val="solid"/>
+                    </a:lnR>
+                    <a:lnT w="12700">
+                      <a:solidFill>
+                        <a:schemeClr val="tx1"/>
+                      </a:solidFill>
+                      <a:prstDash val="solid"/>
+                    </a:lnT>
+                    <a:lnB w="12700">
+                      <a:solidFill>
+                        <a:schemeClr val="tx1"/>
+                      </a:solidFill>
+                      <a:prstDash val="solid"/>
+                    </a:lnB>
+                    <a:solidFill>
+                      <a:schemeClr val="accent2">
+                        <a:lumMod val="60000"/>
+                        <a:lumOff val="40000"/>
+                      </a:schemeClr>
+                    </a:solidFill>
+                  </a:tcPr>
+                </a:tc>
+              </a:tr>
+            </a:tbl>
+          </a:graphicData>
+        </a:graphic>
+      </p:graphicFrame>
+      <p:pic>
+        <p:nvPicPr>
+          <p:cNvPr id="24" name="Picture 23" descr="Screen Shot 2024-11-01 at 5.08.34 PM"/>
+          <p:cNvPicPr>
+            <a:picLocks noChangeAspect="1"/>
+          </p:cNvPicPr>
+          <p:nvPr>
+            <p:custDataLst>
+              <p:tags r:id="rId7"/>
+            </p:custDataLst>
+          </p:nvPr>
+        </p:nvPicPr>
+        <p:blipFill>
+          <a:blip r:embed="rId8"/>
+          <a:stretch>
+            <a:fillRect/>
+          </a:stretch>
+        </p:blipFill>
+        <p:spPr>
+          <a:xfrm rot="2880000">
+            <a:off x="3197225" y="3269615"/>
+            <a:ext cx="635000" cy="1231900"/>
+          </a:xfrm>
+          <a:prstGeom prst="rect">
+            <a:avLst/>
+          </a:prstGeom>
+        </p:spPr>
+      </p:pic>
+    </p:spTree>
+  </p:cSld>
+  <p:clrMapOvr>
+    <a:masterClrMapping/>
+  </p:clrMapOvr>
+</p:sld>
+</file>
+
+<file path=ppt/slides/slide5.xml><?xml version="1.0" encoding="utf-8"?>
+<p:sld xmlns:a="http://schemas.openxmlformats.org/drawingml/2006/main" xmlns:r="http://schemas.openxmlformats.org/officeDocument/2006/relationships" xmlns:p="http://schemas.openxmlformats.org/presentationml/2006/main">
+  <p:cSld>
+    <p:spTree>
+      <p:nvGrpSpPr>
+        <p:cNvPr id="1" name=""/>
+        <p:cNvGrpSpPr/>
+        <p:nvPr/>
+      </p:nvGrpSpPr>
+      <p:grpSpPr/>
+      <p:graphicFrame>
+        <p:nvGraphicFramePr>
+          <p:cNvPr id="11" name="Table 10"/>
+          <p:cNvGraphicFramePr/>
+          <p:nvPr>
+            <p:custDataLst>
+              <p:tags r:id="rId1"/>
+            </p:custDataLst>
+          </p:nvPr>
+        </p:nvGraphicFramePr>
+        <p:xfrm>
+          <a:off x="4027170" y="3482975"/>
+          <a:ext cx="457200" cy="2194560"/>
+        </p:xfrm>
+        <a:graphic>
+          <a:graphicData uri="http://schemas.openxmlformats.org/drawingml/2006/table">
+            <a:tbl>
+              <a:tblPr firstRow="1" bandRow="1">
+                <a:tableStyleId>{2D5ABB26-0587-4C30-8999-92F81FD0307C}</a:tableStyleId>
+              </a:tblPr>
+              <a:tblGrid>
+                <a:gridCol w="457200"/>
+              </a:tblGrid>
+              <a:tr h="365760">
+                <a:tc>
+                  <a:txBody>
+                    <a:bodyPr/>
+                    <a:p>
+                      <a:pPr>
+                        <a:buNone/>
+                      </a:pPr>
+                      <a:endParaRPr lang="en-US"/>
+                    </a:p>
+                  </a:txBody>
+                  <a:tcPr>
+                    <a:lnL w="12700">
+                      <a:solidFill>
+                        <a:schemeClr val="tx1"/>
+                      </a:solidFill>
+                      <a:prstDash val="solid"/>
+                    </a:lnL>
+                    <a:lnR w="12700">
+                      <a:solidFill>
+                        <a:schemeClr val="tx1"/>
+                      </a:solidFill>
+                      <a:prstDash val="solid"/>
+                    </a:lnR>
+                    <a:lnT w="12700">
+                      <a:solidFill>
+                        <a:schemeClr val="tx1"/>
+                      </a:solidFill>
+                      <a:prstDash val="solid"/>
+                    </a:lnT>
+                    <a:lnB w="12700">
+                      <a:solidFill>
+                        <a:schemeClr val="tx1"/>
+                      </a:solidFill>
+                      <a:prstDash val="solid"/>
+                    </a:lnB>
+                    <a:solidFill>
+                      <a:schemeClr val="accent2">
+                        <a:lumMod val="60000"/>
+                        <a:lumOff val="40000"/>
+                      </a:schemeClr>
+                    </a:solidFill>
+                  </a:tcPr>
+                </a:tc>
+              </a:tr>
+              <a:tr h="365760">
+                <a:tc>
+                  <a:txBody>
+                    <a:bodyPr/>
+                    <a:p>
+                      <a:pPr>
+                        <a:buNone/>
+                      </a:pPr>
+                      <a:endParaRPr lang="en-US"/>
+                    </a:p>
+                  </a:txBody>
+                  <a:tcPr>
+                    <a:lnL w="12700">
+                      <a:solidFill>
+                        <a:schemeClr val="tx1"/>
+                      </a:solidFill>
+                      <a:prstDash val="solid"/>
+                    </a:lnL>
+                    <a:lnR w="12700">
+                      <a:solidFill>
+                        <a:schemeClr val="tx1"/>
+                      </a:solidFill>
+                      <a:prstDash val="solid"/>
+                    </a:lnR>
+                    <a:lnT w="12700">
+                      <a:solidFill>
+                        <a:schemeClr val="tx1"/>
+                      </a:solidFill>
+                      <a:prstDash val="solid"/>
+                    </a:lnT>
+                    <a:lnB w="12700">
+                      <a:solidFill>
+                        <a:schemeClr val="tx1"/>
+                      </a:solidFill>
+                      <a:prstDash val="solid"/>
+                    </a:lnB>
+                    <a:solidFill>
+                      <a:schemeClr val="accent2">
+                        <a:lumMod val="60000"/>
+                        <a:lumOff val="40000"/>
+                      </a:schemeClr>
+                    </a:solidFill>
+                  </a:tcPr>
+                </a:tc>
+              </a:tr>
+              <a:tr h="365760">
+                <a:tc>
+                  <a:txBody>
+                    <a:bodyPr/>
+                    <a:p>
+                      <a:pPr>
+                        <a:buNone/>
+                      </a:pPr>
+                      <a:endParaRPr lang="en-US"/>
+                    </a:p>
+                  </a:txBody>
+                  <a:tcPr>
+                    <a:lnL w="12700">
+                      <a:solidFill>
+                        <a:schemeClr val="tx1"/>
+                      </a:solidFill>
+                      <a:prstDash val="solid"/>
+                    </a:lnL>
+                    <a:lnR w="12700">
+                      <a:solidFill>
+                        <a:schemeClr val="tx1"/>
+                      </a:solidFill>
+                      <a:prstDash val="solid"/>
+                    </a:lnR>
+                    <a:lnT w="12700">
+                      <a:solidFill>
+                        <a:schemeClr val="tx1"/>
+                      </a:solidFill>
+                      <a:prstDash val="solid"/>
+                    </a:lnT>
+                    <a:lnB w="12700">
+                      <a:solidFill>
+                        <a:schemeClr val="tx1"/>
+                      </a:solidFill>
+                      <a:prstDash val="solid"/>
+                    </a:lnB>
+                    <a:solidFill>
+                      <a:schemeClr val="accent2">
+                        <a:lumMod val="60000"/>
+                        <a:lumOff val="40000"/>
+                      </a:schemeClr>
+                    </a:solidFill>
+                  </a:tcPr>
+                </a:tc>
+              </a:tr>
+            </a:tbl>
+          </a:graphicData>
+        </a:graphic>
+      </p:graphicFrame>
+      <p:graphicFrame>
+        <p:nvGraphicFramePr>
+          <p:cNvPr id="18" name="Table 17"/>
+          <p:cNvGraphicFramePr/>
+          <p:nvPr>
+            <p:custDataLst>
+              <p:tags r:id="rId2"/>
+            </p:custDataLst>
+          </p:nvPr>
+        </p:nvGraphicFramePr>
+        <p:xfrm>
+          <a:off x="4039235" y="1359535"/>
+          <a:ext cx="457200" cy="1097280"/>
+        </p:xfrm>
+        <a:graphic>
+          <a:graphicData uri="http://schemas.openxmlformats.org/drawingml/2006/table">
+            <a:tbl>
+              <a:tblPr firstRow="1" bandRow="1">
+                <a:tableStyleId>{2D5ABB26-0587-4C30-8999-92F81FD0307C}</a:tableStyleId>
+              </a:tblPr>
+              <a:tblGrid>
+                <a:gridCol w="457200"/>
+              </a:tblGrid>
+              <a:tr h="365760">
+                <a:tc>
+                  <a:txBody>
+                    <a:bodyPr/>
+                    <a:p>
+                      <a:pPr>
+                        <a:buNone/>
+                      </a:pPr>
+                      <a:endParaRPr lang="en-US"/>
+                    </a:p>
+                  </a:txBody>
+                  <a:tcPr>
+                    <a:lnL w="12700">
+                      <a:solidFill>
+                        <a:schemeClr val="tx1"/>
+                      </a:solidFill>
+                      <a:prstDash val="solid"/>
+                    </a:lnL>
+                    <a:lnR w="12700">
+                      <a:solidFill>
+                        <a:schemeClr val="tx1"/>
+                      </a:solidFill>
+                      <a:prstDash val="solid"/>
+                    </a:lnR>
+                    <a:lnT w="12700">
+                      <a:solidFill>
+                        <a:schemeClr val="tx1"/>
+                      </a:solidFill>
+                      <a:prstDash val="solid"/>
+                    </a:lnT>
+                    <a:lnB w="12700">
+                      <a:solidFill>
+                        <a:schemeClr val="tx1"/>
+                      </a:solidFill>
+                      <a:prstDash val="solid"/>
+                    </a:lnB>
+                    <a:solidFill>
+                      <a:schemeClr val="accent1">
+                        <a:lumMod val="60000"/>
+                        <a:lumOff val="40000"/>
+                      </a:schemeClr>
+                    </a:solidFill>
+                  </a:tcPr>
+                </a:tc>
+              </a:tr>
+              <a:tr h="365760">
+                <a:tc>
+                  <a:txBody>
+                    <a:bodyPr/>
+                    <a:p>
+                      <a:pPr>
+                        <a:buNone/>
+                      </a:pPr>
+                      <a:endParaRPr lang="en-US"/>
+                    </a:p>
+                  </a:txBody>
+                  <a:tcPr>
+                    <a:lnL w="12700">
+                      <a:solidFill>
+                        <a:schemeClr val="tx1"/>
+                      </a:solidFill>
+                      <a:prstDash val="solid"/>
+                    </a:lnL>
+                    <a:lnR w="12700">
+                      <a:solidFill>
+                        <a:schemeClr val="tx1"/>
+                      </a:solidFill>
+                      <a:prstDash val="solid"/>
+                    </a:lnR>
+                    <a:lnT w="12700">
+                      <a:solidFill>
+                        <a:schemeClr val="tx1"/>
+                      </a:solidFill>
+                      <a:prstDash val="solid"/>
+                    </a:lnT>
+                    <a:lnB w="12700">
+                      <a:solidFill>
+                        <a:schemeClr val="tx1"/>
+                      </a:solidFill>
+                      <a:prstDash val="solid"/>
+                    </a:lnB>
+                    <a:solidFill>
+                      <a:schemeClr val="accent1">
+                        <a:lumMod val="60000"/>
+                        <a:lumOff val="40000"/>
+                      </a:schemeClr>
+                    </a:solidFill>
+                  </a:tcPr>
+                </a:tc>
+              </a:tr>
+              <a:tr h="365760">
+                <a:tc>
+                  <a:txBody>
+                    <a:bodyPr/>
+                    <a:p>
+                      <a:pPr>
+                        <a:buNone/>
+                      </a:pPr>
+                      <a:endParaRPr lang="en-US"/>
+                    </a:p>
+                  </a:txBody>
+                  <a:tcPr>
+                    <a:lnL w="12700">
+                      <a:solidFill>
+                        <a:schemeClr val="tx1"/>
+                      </a:solidFill>
+                      <a:prstDash val="solid"/>
+                    </a:lnL>
+                    <a:lnR w="12700">
+                      <a:solidFill>
+                        <a:schemeClr val="tx1"/>
+                      </a:solidFill>
+                      <a:prstDash val="solid"/>
+                    </a:lnR>
+                    <a:lnT w="12700">
+                      <a:solidFill>
+                        <a:schemeClr val="tx1"/>
+                      </a:solidFill>
+                      <a:prstDash val="solid"/>
+                    </a:lnT>
+                    <a:lnB w="12700">
+                      <a:solidFill>
+                        <a:schemeClr val="tx1"/>
+                      </a:solidFill>
+                      <a:prstDash val="solid"/>
+                    </a:lnB>
+                    <a:solidFill>
+                      <a:schemeClr val="accent1">
+                        <a:lumMod val="60000"/>
+                        <a:lumOff val="40000"/>
+                      </a:schemeClr>
+                    </a:solidFill>
+                  </a:tcPr>
+                </a:tc>
+              </a:tr>
+            </a:tbl>
+          </a:graphicData>
+        </a:graphic>
+      </p:graphicFrame>
+      <p:graphicFrame>
+        <p:nvGraphicFramePr>
+          <p:cNvPr id="17" name="Table 16"/>
+          <p:cNvGraphicFramePr/>
+          <p:nvPr>
+            <p:custDataLst>
+              <p:tags r:id="rId3"/>
+            </p:custDataLst>
+          </p:nvPr>
+        </p:nvGraphicFramePr>
+        <p:xfrm>
+          <a:off x="2686685" y="2586355"/>
+          <a:ext cx="1371600" cy="365760"/>
+        </p:xfrm>
+        <a:graphic>
+          <a:graphicData uri="http://schemas.openxmlformats.org/drawingml/2006/table">
+            <a:tbl>
+              <a:tblPr firstRow="1" bandRow="1">
+                <a:tableStyleId>{2D5ABB26-0587-4C30-8999-92F81FD0307C}</a:tableStyleId>
+              </a:tblPr>
+              <a:tblGrid>
+                <a:gridCol w="457200"/>
+                <a:gridCol w="457200"/>
+                <a:gridCol w="457200"/>
+              </a:tblGrid>
+              <a:tr h="365760">
+                <a:tc>
+                  <a:txBody>
+                    <a:bodyPr/>
+                    <a:p>
+                      <a:pPr>
+                        <a:buNone/>
+                      </a:pPr>
+                      <a:endParaRPr lang="en-US"/>
+                    </a:p>
+                  </a:txBody>
+                  <a:tcPr>
+                    <a:lnL w="12700">
+                      <a:solidFill>
+                        <a:schemeClr val="tx1"/>
+                      </a:solidFill>
+                      <a:prstDash val="solid"/>
+                    </a:lnL>
+                    <a:lnR w="12700">
+                      <a:solidFill>
+                        <a:schemeClr val="tx1"/>
+                      </a:solidFill>
+                      <a:prstDash val="solid"/>
+                    </a:lnR>
+                    <a:lnT w="12700">
+                      <a:solidFill>
+                        <a:schemeClr val="tx1"/>
+                      </a:solidFill>
+                      <a:prstDash val="solid"/>
+                    </a:lnT>
+                    <a:lnB w="12700">
+                      <a:solidFill>
+                        <a:schemeClr val="tx1"/>
+                      </a:solidFill>
+                      <a:prstDash val="solid"/>
+                    </a:lnB>
+                    <a:solidFill>
+                      <a:schemeClr val="accent1">
+                        <a:lumMod val="40000"/>
+                        <a:lumOff val="60000"/>
+                      </a:schemeClr>
+                    </a:solidFill>
+                  </a:tcPr>
+                </a:tc>
+                <a:tc>
+                  <a:txBody>
+                    <a:bodyPr/>
+                    <a:p>
+                      <a:pPr>
+                        <a:buNone/>
+                      </a:pPr>
+                      <a:endParaRPr lang="en-US"/>
+                    </a:p>
+                  </a:txBody>
+                  <a:tcPr>
+                    <a:lnL w="12700">
+                      <a:solidFill>
+                        <a:schemeClr val="tx1"/>
+                      </a:solidFill>
+                      <a:prstDash val="solid"/>
+                    </a:lnL>
+                    <a:lnR w="12700">
+                      <a:solidFill>
+                        <a:schemeClr val="tx1"/>
+                      </a:solidFill>
+                      <a:prstDash val="solid"/>
+                    </a:lnR>
+                    <a:lnT w="12700">
+                      <a:solidFill>
+                        <a:schemeClr val="tx1"/>
+                      </a:solidFill>
+                      <a:prstDash val="solid"/>
+                    </a:lnT>
+                    <a:lnB w="12700">
+                      <a:solidFill>
+                        <a:schemeClr val="tx1"/>
+                      </a:solidFill>
+                      <a:prstDash val="solid"/>
+                    </a:lnB>
+                    <a:solidFill>
+                      <a:schemeClr val="accent1">
+                        <a:lumMod val="40000"/>
+                        <a:lumOff val="60000"/>
+                      </a:schemeClr>
+                    </a:solidFill>
+                  </a:tcPr>
+                </a:tc>
+                <a:tc>
+                  <a:txBody>
+                    <a:bodyPr/>
+                    <a:p>
+                      <a:pPr>
+                        <a:buNone/>
+                      </a:pPr>
+                      <a:endParaRPr lang="en-US"/>
+                    </a:p>
+                  </a:txBody>
+                  <a:tcPr>
+                    <a:lnL w="12700">
+                      <a:solidFill>
+                        <a:schemeClr val="tx1"/>
+                      </a:solidFill>
+                      <a:prstDash val="solid"/>
+                    </a:lnL>
+                    <a:lnR w="12700">
+                      <a:solidFill>
+                        <a:schemeClr val="tx1"/>
+                      </a:solidFill>
+                      <a:prstDash val="solid"/>
+                    </a:lnR>
+                    <a:lnT w="12700">
+                      <a:solidFill>
+                        <a:schemeClr val="tx1"/>
+                      </a:solidFill>
+                      <a:prstDash val="solid"/>
+                    </a:lnT>
+                    <a:lnB w="12700">
+                      <a:solidFill>
+                        <a:schemeClr val="tx1"/>
+                      </a:solidFill>
+                      <a:prstDash val="solid"/>
+                    </a:lnB>
+                    <a:solidFill>
+                      <a:schemeClr val="accent1">
+                        <a:lumMod val="40000"/>
+                        <a:lumOff val="60000"/>
+                      </a:schemeClr>
+                    </a:solidFill>
+                  </a:tcPr>
+                </a:tc>
+              </a:tr>
+            </a:tbl>
+          </a:graphicData>
+        </a:graphic>
+      </p:graphicFrame>
+      <p:graphicFrame>
+        <p:nvGraphicFramePr>
+          <p:cNvPr id="16" name="Table 15"/>
+          <p:cNvGraphicFramePr/>
+          <p:nvPr>
+            <p:custDataLst>
+              <p:tags r:id="rId4"/>
+            </p:custDataLst>
+          </p:nvPr>
+        </p:nvGraphicFramePr>
+        <p:xfrm>
+          <a:off x="4540250" y="2496820"/>
+          <a:ext cx="1373505" cy="365760"/>
+        </p:xfrm>
+        <a:graphic>
+          <a:graphicData uri="http://schemas.openxmlformats.org/drawingml/2006/table">
+            <a:tbl>
+              <a:tblPr firstRow="1" bandRow="1">
+                <a:tableStyleId>{2D5ABB26-0587-4C30-8999-92F81FD0307C}</a:tableStyleId>
+              </a:tblPr>
+              <a:tblGrid>
+                <a:gridCol w="457835"/>
+                <a:gridCol w="457835"/>
+                <a:gridCol w="457835"/>
+              </a:tblGrid>
+              <a:tr h="365760">
+                <a:tc>
+                  <a:txBody>
+                    <a:bodyPr/>
+                    <a:p>
+                      <a:pPr>
+                        <a:buNone/>
+                      </a:pPr>
+                      <a:endParaRPr lang="en-US">
+                        <a:solidFill>
+                          <a:srgbClr val="FF0000"/>
+                        </a:solidFill>
+                      </a:endParaRPr>
+                    </a:p>
+                  </a:txBody>
+                  <a:tcPr>
+                    <a:lnL w="12700">
+                      <a:solidFill>
+                        <a:schemeClr val="tx1"/>
+                      </a:solidFill>
+                      <a:prstDash val="solid"/>
+                    </a:lnL>
+                    <a:lnR w="12700">
+                      <a:solidFill>
+                        <a:schemeClr val="tx1"/>
+                      </a:solidFill>
+                      <a:prstDash val="solid"/>
+                    </a:lnR>
+                    <a:lnT w="12700">
+                      <a:solidFill>
+                        <a:schemeClr val="tx1"/>
+                      </a:solidFill>
+                      <a:prstDash val="solid"/>
+                    </a:lnT>
+                    <a:lnB w="12700">
+                      <a:solidFill>
+                        <a:schemeClr val="tx1"/>
+                      </a:solidFill>
+                      <a:prstDash val="solid"/>
+                    </a:lnB>
+                    <a:solidFill>
+                      <a:schemeClr val="accent2">
+                        <a:lumMod val="60000"/>
+                        <a:lumOff val="40000"/>
+                      </a:schemeClr>
+                    </a:solidFill>
+                  </a:tcPr>
+                </a:tc>
+                <a:tc>
+                  <a:txBody>
+                    <a:bodyPr/>
+                    <a:p>
+                      <a:pPr>
+                        <a:buNone/>
+                      </a:pPr>
+                      <a:endParaRPr lang="en-US">
+                        <a:solidFill>
+                          <a:srgbClr val="FF0000"/>
+                        </a:solidFill>
+                      </a:endParaRPr>
+                    </a:p>
+                  </a:txBody>
+                  <a:tcPr>
+                    <a:lnL w="12700">
+                      <a:solidFill>
+                        <a:schemeClr val="tx1"/>
+                      </a:solidFill>
+                      <a:prstDash val="solid"/>
+                    </a:lnL>
+                    <a:lnR w="12700">
+                      <a:solidFill>
+                        <a:schemeClr val="tx1"/>
+                      </a:solidFill>
+                      <a:prstDash val="solid"/>
+                    </a:lnR>
+                    <a:lnT w="12700">
+                      <a:solidFill>
+                        <a:schemeClr val="tx1"/>
+                      </a:solidFill>
+                      <a:prstDash val="solid"/>
+                    </a:lnT>
+                    <a:lnB w="12700">
+                      <a:solidFill>
+                        <a:schemeClr val="tx1"/>
+                      </a:solidFill>
+                      <a:prstDash val="solid"/>
+                    </a:lnB>
+                    <a:solidFill>
+                      <a:schemeClr val="accent2">
+                        <a:lumMod val="60000"/>
+                        <a:lumOff val="40000"/>
+                      </a:schemeClr>
+                    </a:solidFill>
+                  </a:tcPr>
+                </a:tc>
+                <a:tc>
+                  <a:txBody>
+                    <a:bodyPr/>
+                    <a:p>
+                      <a:pPr>
+                        <a:buNone/>
+                      </a:pPr>
+                      <a:endParaRPr lang="en-US">
+                        <a:solidFill>
+                          <a:srgbClr val="FF0000"/>
+                        </a:solidFill>
+                      </a:endParaRPr>
+                    </a:p>
+                  </a:txBody>
+                  <a:tcPr>
+                    <a:lnL w="12700">
+                      <a:solidFill>
+                        <a:schemeClr val="tx1"/>
+                      </a:solidFill>
+                      <a:prstDash val="solid"/>
+                    </a:lnL>
+                    <a:lnR w="12700">
+                      <a:solidFill>
+                        <a:schemeClr val="tx1"/>
+                      </a:solidFill>
+                      <a:prstDash val="solid"/>
+                    </a:lnR>
+                    <a:lnT w="12700">
+                      <a:solidFill>
+                        <a:schemeClr val="tx1"/>
+                      </a:solidFill>
+                      <a:prstDash val="solid"/>
+                    </a:lnT>
+                    <a:lnB w="12700">
+                      <a:solidFill>
+                        <a:schemeClr val="tx1"/>
+                      </a:solidFill>
+                      <a:prstDash val="solid"/>
+                    </a:lnB>
+                    <a:solidFill>
+                      <a:schemeClr val="accent2">
+                        <a:lumMod val="60000"/>
+                        <a:lumOff val="40000"/>
+                      </a:schemeClr>
+                    </a:solidFill>
+                  </a:tcPr>
+                </a:tc>
+              </a:tr>
+            </a:tbl>
+          </a:graphicData>
+        </a:graphic>
+      </p:graphicFrame>
+      <p:pic>
+        <p:nvPicPr>
+          <p:cNvPr id="5" name="Picture 4" descr="Screen Shot 2024-11-01 at 5.08.34 PM"/>
+          <p:cNvPicPr>
+            <a:picLocks noChangeAspect="1"/>
+          </p:cNvPicPr>
+          <p:nvPr>
+            <p:custDataLst>
+              <p:tags r:id="rId5"/>
+            </p:custDataLst>
+          </p:nvPr>
+        </p:nvPicPr>
+        <p:blipFill>
+          <a:blip r:embed="rId6"/>
+          <a:stretch>
+            <a:fillRect/>
+          </a:stretch>
+        </p:blipFill>
+        <p:spPr>
+          <a:xfrm rot="2880000">
+            <a:off x="3062605" y="2960370"/>
+            <a:ext cx="635000" cy="1231900"/>
+          </a:xfrm>
+          <a:prstGeom prst="rect">
+            <a:avLst/>
+          </a:prstGeom>
+        </p:spPr>
+      </p:pic>
+      <p:pic>
+        <p:nvPicPr>
+          <p:cNvPr id="6" name="Picture 5" descr="Screen Shot 2024-11-01 at 5.08.34 PM"/>
+          <p:cNvPicPr>
+            <a:picLocks noChangeAspect="1"/>
+          </p:cNvPicPr>
+          <p:nvPr>
+            <p:custDataLst>
+              <p:tags r:id="rId7"/>
+            </p:custDataLst>
+          </p:nvPr>
+        </p:nvPicPr>
+        <p:blipFill>
+          <a:blip r:embed="rId6"/>
+          <a:stretch>
+            <a:fillRect/>
+          </a:stretch>
+        </p:blipFill>
+        <p:spPr>
+          <a:xfrm rot="17220000">
+            <a:off x="4860290" y="2916555"/>
+            <a:ext cx="635000" cy="1231900"/>
+          </a:xfrm>
+          <a:prstGeom prst="rect">
+            <a:avLst/>
+          </a:prstGeom>
+        </p:spPr>
+      </p:pic>
+    </p:spTree>
+  </p:cSld>
+  <p:clrMapOvr>
+    <a:masterClrMapping/>
+  </p:clrMapOvr>
+</p:sld>
+</file>
+
+<file path=ppt/slides/slide6.xml><?xml version="1.0" encoding="utf-8"?>
+<p:sld xmlns:a="http://schemas.openxmlformats.org/drawingml/2006/main" xmlns:r="http://schemas.openxmlformats.org/officeDocument/2006/relationships" xmlns:p="http://schemas.openxmlformats.org/presentationml/2006/main">
+  <p:cSld>
+    <p:spTree>
+      <p:nvGrpSpPr>
+        <p:cNvPr id="1" name=""/>
+        <p:cNvGrpSpPr/>
+        <p:nvPr/>
+      </p:nvGrpSpPr>
+      <p:grpSpPr/>
       <p:sp>
         <p:nvSpPr>
           <p:cNvPr id="5" name="Text Box 4"/>
@@ -11739,7 +14749,7 @@
 </p:sld>
 </file>
 
-<file path=ppt/slides/slide3.xml><?xml version="1.0" encoding="utf-8"?>
+<file path=ppt/slides/slide7.xml><?xml version="1.0" encoding="utf-8"?>
 <p:sld xmlns:a="http://schemas.openxmlformats.org/drawingml/2006/main" xmlns:r="http://schemas.openxmlformats.org/officeDocument/2006/relationships" xmlns:p="http://schemas.openxmlformats.org/presentationml/2006/main">
   <p:cSld>
     <p:spTree>
@@ -13969,13 +16979,151 @@
 </p:tagLst>
 </file>
 
+<file path=ppt/tags/tag60.xml><?xml version="1.0" encoding="utf-8"?>
+<p:tagLst xmlns:p="http://schemas.openxmlformats.org/presentationml/2006/main">
+  <p:tag name="KSO_WM_BEAUTIFY_FLAG" val=""/>
+</p:tagLst>
+</file>
+
+<file path=ppt/tags/tag61.xml><?xml version="1.0" encoding="utf-8"?>
+<p:tagLst xmlns:p="http://schemas.openxmlformats.org/presentationml/2006/main">
+  <p:tag name="KSO_WM_BEAUTIFY_FLAG" val=""/>
+</p:tagLst>
+</file>
+
+<file path=ppt/tags/tag62.xml><?xml version="1.0" encoding="utf-8"?>
+<p:tagLst xmlns:p="http://schemas.openxmlformats.org/presentationml/2006/main">
+  <p:tag name="KSO_WM_BEAUTIFY_FLAG" val=""/>
+</p:tagLst>
+</file>
+
+<file path=ppt/tags/tag63.xml><?xml version="1.0" encoding="utf-8"?>
+<p:tagLst xmlns:p="http://schemas.openxmlformats.org/presentationml/2006/main">
+  <p:tag name="KSO_WM_BEAUTIFY_FLAG" val=""/>
+</p:tagLst>
+</file>
+
+<file path=ppt/tags/tag64.xml><?xml version="1.0" encoding="utf-8"?>
+<p:tagLst xmlns:p="http://schemas.openxmlformats.org/presentationml/2006/main">
+  <p:tag name="KSO_WM_BEAUTIFY_FLAG" val=""/>
+</p:tagLst>
+</file>
+
+<file path=ppt/tags/tag65.xml><?xml version="1.0" encoding="utf-8"?>
+<p:tagLst xmlns:p="http://schemas.openxmlformats.org/presentationml/2006/main">
+  <p:tag name="KSO_WM_BEAUTIFY_FLAG" val=""/>
+</p:tagLst>
+</file>
+
+<file path=ppt/tags/tag66.xml><?xml version="1.0" encoding="utf-8"?>
+<p:tagLst xmlns:p="http://schemas.openxmlformats.org/presentationml/2006/main">
+  <p:tag name="KSO_WM_BEAUTIFY_FLAG" val=""/>
+</p:tagLst>
+</file>
+
+<file path=ppt/tags/tag67.xml><?xml version="1.0" encoding="utf-8"?>
+<p:tagLst xmlns:p="http://schemas.openxmlformats.org/presentationml/2006/main">
+  <p:tag name="KSO_WM_BEAUTIFY_FLAG" val=""/>
+</p:tagLst>
+</file>
+
+<file path=ppt/tags/tag68.xml><?xml version="1.0" encoding="utf-8"?>
+<p:tagLst xmlns:p="http://schemas.openxmlformats.org/presentationml/2006/main">
+  <p:tag name="KSO_WM_BEAUTIFY_FLAG" val=""/>
+</p:tagLst>
+</file>
+
+<file path=ppt/tags/tag69.xml><?xml version="1.0" encoding="utf-8"?>
+<p:tagLst xmlns:p="http://schemas.openxmlformats.org/presentationml/2006/main">
+  <p:tag name="KSO_WM_BEAUTIFY_FLAG" val=""/>
+</p:tagLst>
+</file>
+
 <file path=ppt/tags/tag7.xml><?xml version="1.0" encoding="utf-8"?>
 <p:tagLst xmlns:p="http://schemas.openxmlformats.org/presentationml/2006/main">
   <p:tag name="KSO_WM_BEAUTIFY_FLAG" val=""/>
 </p:tagLst>
 </file>
 
+<file path=ppt/tags/tag70.xml><?xml version="1.0" encoding="utf-8"?>
+<p:tagLst xmlns:p="http://schemas.openxmlformats.org/presentationml/2006/main">
+  <p:tag name="KSO_WM_BEAUTIFY_FLAG" val=""/>
+</p:tagLst>
+</file>
+
+<file path=ppt/tags/tag71.xml><?xml version="1.0" encoding="utf-8"?>
+<p:tagLst xmlns:p="http://schemas.openxmlformats.org/presentationml/2006/main">
+  <p:tag name="KSO_WM_BEAUTIFY_FLAG" val=""/>
+</p:tagLst>
+</file>
+
+<file path=ppt/tags/tag72.xml><?xml version="1.0" encoding="utf-8"?>
+<p:tagLst xmlns:p="http://schemas.openxmlformats.org/presentationml/2006/main">
+  <p:tag name="KSO_WM_BEAUTIFY_FLAG" val=""/>
+</p:tagLst>
+</file>
+
+<file path=ppt/tags/tag73.xml><?xml version="1.0" encoding="utf-8"?>
+<p:tagLst xmlns:p="http://schemas.openxmlformats.org/presentationml/2006/main">
+  <p:tag name="KSO_WM_BEAUTIFY_FLAG" val=""/>
+</p:tagLst>
+</file>
+
+<file path=ppt/tags/tag74.xml><?xml version="1.0" encoding="utf-8"?>
+<p:tagLst xmlns:p="http://schemas.openxmlformats.org/presentationml/2006/main">
+  <p:tag name="KSO_WM_BEAUTIFY_FLAG" val=""/>
+</p:tagLst>
+</file>
+
+<file path=ppt/tags/tag75.xml><?xml version="1.0" encoding="utf-8"?>
+<p:tagLst xmlns:p="http://schemas.openxmlformats.org/presentationml/2006/main">
+  <p:tag name="KSO_WM_BEAUTIFY_FLAG" val=""/>
+</p:tagLst>
+</file>
+
+<file path=ppt/tags/tag76.xml><?xml version="1.0" encoding="utf-8"?>
+<p:tagLst xmlns:p="http://schemas.openxmlformats.org/presentationml/2006/main">
+  <p:tag name="KSO_WM_BEAUTIFY_FLAG" val=""/>
+</p:tagLst>
+</file>
+
+<file path=ppt/tags/tag77.xml><?xml version="1.0" encoding="utf-8"?>
+<p:tagLst xmlns:p="http://schemas.openxmlformats.org/presentationml/2006/main">
+  <p:tag name="KSO_WM_BEAUTIFY_FLAG" val=""/>
+</p:tagLst>
+</file>
+
+<file path=ppt/tags/tag78.xml><?xml version="1.0" encoding="utf-8"?>
+<p:tagLst xmlns:p="http://schemas.openxmlformats.org/presentationml/2006/main">
+  <p:tag name="KSO_WM_BEAUTIFY_FLAG" val=""/>
+</p:tagLst>
+</file>
+
+<file path=ppt/tags/tag79.xml><?xml version="1.0" encoding="utf-8"?>
+<p:tagLst xmlns:p="http://schemas.openxmlformats.org/presentationml/2006/main">
+  <p:tag name="KSO_WM_BEAUTIFY_FLAG" val=""/>
+</p:tagLst>
+</file>
+
 <file path=ppt/tags/tag8.xml><?xml version="1.0" encoding="utf-8"?>
+<p:tagLst xmlns:p="http://schemas.openxmlformats.org/presentationml/2006/main">
+  <p:tag name="KSO_WM_BEAUTIFY_FLAG" val=""/>
+</p:tagLst>
+</file>
+
+<file path=ppt/tags/tag80.xml><?xml version="1.0" encoding="utf-8"?>
+<p:tagLst xmlns:p="http://schemas.openxmlformats.org/presentationml/2006/main">
+  <p:tag name="KSO_WM_BEAUTIFY_FLAG" val=""/>
+</p:tagLst>
+</file>
+
+<file path=ppt/tags/tag81.xml><?xml version="1.0" encoding="utf-8"?>
+<p:tagLst xmlns:p="http://schemas.openxmlformats.org/presentationml/2006/main">
+  <p:tag name="KSO_WM_BEAUTIFY_FLAG" val=""/>
+</p:tagLst>
+</file>
+
+<file path=ppt/tags/tag82.xml><?xml version="1.0" encoding="utf-8"?>
 <p:tagLst xmlns:p="http://schemas.openxmlformats.org/presentationml/2006/main">
   <p:tag name="KSO_WM_BEAUTIFY_FLAG" val=""/>
 </p:tagLst>
